--- a/49_MP_presentation.pptx
+++ b/49_MP_presentation.pptx
@@ -26,12 +26,12 @@
     <p:sldId id="264" r:id="rId14"/>
     <p:sldId id="265" r:id="rId15"/>
     <p:sldId id="267" r:id="rId16"/>
-    <p:sldId id="268" r:id="rId17"/>
-    <p:sldId id="269" r:id="rId18"/>
-    <p:sldId id="270" r:id="rId19"/>
-    <p:sldId id="271" r:id="rId20"/>
-    <p:sldId id="272" r:id="rId21"/>
-    <p:sldId id="275" r:id="rId22"/>
+    <p:sldId id="279" r:id="rId17"/>
+    <p:sldId id="268" r:id="rId18"/>
+    <p:sldId id="269" r:id="rId19"/>
+    <p:sldId id="270" r:id="rId20"/>
+    <p:sldId id="271" r:id="rId21"/>
+    <p:sldId id="272" r:id="rId22"/>
     <p:sldId id="273" r:id="rId23"/>
     <p:sldId id="274" r:id="rId24"/>
   </p:sldIdLst>
@@ -236,7 +236,7 @@
           <a:p>
             <a:fld id="{DDEE2A0B-86E8-46AD-8D7A-6254762C9557}" type="datetimeFigureOut">
               <a:rPr lang="en-US" smtClean="0"/>
-              <a:t>8/12/2025</a:t>
+              <a:t>8/20/2025</a:t>
             </a:fld>
             <a:endParaRPr lang="en-US"/>
           </a:p>
@@ -401,7 +401,7 @@
           <a:p>
             <a:fld id="{C0B6C269-8C4E-4E0E-A28B-ACFB6E786E0F}" type="datetimeFigureOut">
               <a:rPr lang="en-US" smtClean="0"/>
-              <a:t>8/12/2025</a:t>
+              <a:t>8/20/2025</a:t>
             </a:fld>
             <a:endParaRPr lang="en-US"/>
           </a:p>
@@ -860,7 +860,7 @@
           <a:p>
             <a:fld id="{5484D9CC-97E9-43D0-9C0A-B38B6ADA7531}" type="datetime1">
               <a:rPr lang="en-US" smtClean="0"/>
-              <a:t>8/12/2025</a:t>
+              <a:t>8/20/2025</a:t>
             </a:fld>
             <a:endParaRPr lang="en-US"/>
           </a:p>
@@ -1118,7 +1118,7 @@
           <a:p>
             <a:fld id="{839A784A-D693-4B8B-8783-5F012B24800D}" type="datetime1">
               <a:rPr lang="en-US" smtClean="0"/>
-              <a:t>8/12/2025</a:t>
+              <a:t>8/20/2025</a:t>
             </a:fld>
             <a:endParaRPr lang="en-US"/>
           </a:p>
@@ -1292,7 +1292,7 @@
           <a:p>
             <a:fld id="{CFA275D0-4AC1-4B77-8D20-030A30032762}" type="datetime1">
               <a:rPr lang="en-US" smtClean="0"/>
-              <a:t>8/12/2025</a:t>
+              <a:t>8/20/2025</a:t>
             </a:fld>
             <a:endParaRPr lang="en-US"/>
           </a:p>
@@ -1476,7 +1476,7 @@
           <a:p>
             <a:fld id="{E464FA7C-9124-49C9-8D4B-6BB473ACFAEB}" type="datetime1">
               <a:rPr lang="en-US" smtClean="0"/>
-              <a:t>8/12/2025</a:t>
+              <a:t>8/20/2025</a:t>
             </a:fld>
             <a:endParaRPr lang="en-US"/>
           </a:p>
@@ -2251,7 +2251,7 @@
           <a:p>
             <a:fld id="{CDBD8763-1223-4E1C-9348-E4479451FFA2}" type="datetime1">
               <a:rPr lang="en-US" smtClean="0"/>
-              <a:t>8/12/2025</a:t>
+              <a:t>8/20/2025</a:t>
             </a:fld>
             <a:endParaRPr lang="en-US"/>
           </a:p>
@@ -2542,7 +2542,7 @@
           <a:p>
             <a:fld id="{853A3728-E260-4992-8842-3C089F6C3D88}" type="datetime1">
               <a:rPr lang="en-US" smtClean="0"/>
-              <a:t>8/12/2025</a:t>
+              <a:t>8/20/2025</a:t>
             </a:fld>
             <a:endParaRPr lang="en-US"/>
           </a:p>
@@ -2967,7 +2967,7 @@
           <a:p>
             <a:fld id="{163DE32F-317A-4950-B3B6-7B500923F79A}" type="datetime1">
               <a:rPr lang="en-US" smtClean="0"/>
-              <a:t>8/12/2025</a:t>
+              <a:t>8/20/2025</a:t>
             </a:fld>
             <a:endParaRPr lang="en-US"/>
           </a:p>
@@ -3090,7 +3090,7 @@
           <a:p>
             <a:fld id="{CA1D3D62-0C66-4F15-9588-8CB96F41B0D1}" type="datetime1">
               <a:rPr lang="en-US" smtClean="0"/>
-              <a:t>8/12/2025</a:t>
+              <a:t>8/20/2025</a:t>
             </a:fld>
             <a:endParaRPr lang="en-US"/>
           </a:p>
@@ -3191,7 +3191,7 @@
           <a:p>
             <a:fld id="{3976A512-578D-4C36-9299-7E9D9DEF4439}" type="datetime1">
               <a:rPr lang="en-US" smtClean="0"/>
-              <a:t>8/12/2025</a:t>
+              <a:t>8/20/2025</a:t>
             </a:fld>
             <a:endParaRPr lang="en-US"/>
           </a:p>
@@ -3472,7 +3472,7 @@
           <a:p>
             <a:fld id="{E5A72B38-B580-4B82-B7C4-B42B85713C86}" type="datetime1">
               <a:rPr lang="en-US" smtClean="0"/>
-              <a:t>8/12/2025</a:t>
+              <a:t>8/20/2025</a:t>
             </a:fld>
             <a:endParaRPr lang="en-US"/>
           </a:p>
@@ -4044,7 +4044,7 @@
                 </a:solidFill>
                 <a:cs typeface="Times New Roman" pitchFamily="18" charset="0"/>
               </a:rPr>
-              <a:t>&lt;PROJECT TITLE&gt;</a:t>
+              <a:t>MARTIAL WORLD</a:t>
             </a:r>
           </a:p>
         </p:txBody>
@@ -4228,7 +4228,7 @@
                 </a:solidFill>
                 <a:latin typeface="Bookman Old Style" panose="02050604050505020204" pitchFamily="18" charset="0"/>
               </a:rPr>
-              <a:t>20/08/2025</a:t>
+              <a:t>21/08/2025</a:t>
             </a:r>
           </a:p>
         </p:txBody>
@@ -4330,7 +4330,35 @@
                 <a:cs typeface="Times New Roman"/>
                 <a:sym typeface="Times New Roman"/>
               </a:rPr>
-              <a:t>Write Project Functionalities with short description using bullet points (1 to 2 Slide)</a:t>
+              <a:t>E-commerce platform that only have products needed for martial artists.</a:t>
+            </a:r>
+          </a:p>
+          <a:p>
+            <a:pPr lvl="0"/>
+            <a:r>
+              <a:rPr lang="en-US" dirty="0">
+                <a:solidFill>
+                  <a:srgbClr val="000000"/>
+                </a:solidFill>
+                <a:ea typeface="Times New Roman"/>
+                <a:cs typeface="Times New Roman"/>
+                <a:sym typeface="Times New Roman"/>
+              </a:rPr>
+              <a:t>Social media platform for martial artists which they can posts photos and videos of martial arts techniques and anyone can follow other martial arts practitioners.</a:t>
+            </a:r>
+          </a:p>
+          <a:p>
+            <a:pPr lvl="0"/>
+            <a:r>
+              <a:rPr lang="en-US" dirty="0">
+                <a:solidFill>
+                  <a:srgbClr val="000000"/>
+                </a:solidFill>
+                <a:ea typeface="Times New Roman"/>
+                <a:cs typeface="Times New Roman"/>
+                <a:sym typeface="Times New Roman"/>
+              </a:rPr>
+              <a:t>Progress tracking or syllabus for physical development.</a:t>
             </a:r>
           </a:p>
           <a:p>
@@ -4458,8 +4486,75 @@
                 <a:cs typeface="Times New Roman"/>
                 <a:sym typeface="Times New Roman"/>
               </a:rPr>
-              <a:t>Write Module Descriptions using bullet points (1 to 2 Slide)</a:t>
-            </a:r>
+              <a:t>User Authentication</a:t>
+            </a:r>
+          </a:p>
+          <a:p>
+            <a:pPr lvl="0"/>
+            <a:r>
+              <a:rPr lang="en-US" dirty="0">
+                <a:solidFill>
+                  <a:srgbClr val="000000"/>
+                </a:solidFill>
+                <a:ea typeface="Times New Roman"/>
+                <a:cs typeface="Times New Roman"/>
+                <a:sym typeface="Times New Roman"/>
+              </a:rPr>
+              <a:t>E-commerce</a:t>
+            </a:r>
+          </a:p>
+          <a:p>
+            <a:pPr lvl="0"/>
+            <a:r>
+              <a:rPr lang="en-US" dirty="0">
+                <a:solidFill>
+                  <a:srgbClr val="000000"/>
+                </a:solidFill>
+                <a:ea typeface="Times New Roman"/>
+                <a:cs typeface="Times New Roman"/>
+                <a:sym typeface="Times New Roman"/>
+              </a:rPr>
+              <a:t>Video Management</a:t>
+            </a:r>
+          </a:p>
+          <a:p>
+            <a:pPr lvl="0"/>
+            <a:r>
+              <a:rPr lang="en-US" dirty="0">
+                <a:solidFill>
+                  <a:srgbClr val="000000"/>
+                </a:solidFill>
+                <a:ea typeface="Times New Roman"/>
+                <a:cs typeface="Times New Roman"/>
+                <a:sym typeface="Times New Roman"/>
+              </a:rPr>
+              <a:t>Progress Tracker</a:t>
+            </a:r>
+          </a:p>
+          <a:p>
+            <a:pPr lvl="0"/>
+            <a:r>
+              <a:rPr lang="en-US" dirty="0">
+                <a:solidFill>
+                  <a:srgbClr val="000000"/>
+                </a:solidFill>
+                <a:ea typeface="Times New Roman"/>
+                <a:cs typeface="Times New Roman"/>
+                <a:sym typeface="Times New Roman"/>
+              </a:rPr>
+              <a:t>Admin Dashboard</a:t>
+            </a:r>
+          </a:p>
+          <a:p>
+            <a:pPr lvl="0"/>
+            <a:endParaRPr lang="en-US" dirty="0">
+              <a:solidFill>
+                <a:srgbClr val="000000"/>
+              </a:solidFill>
+              <a:ea typeface="Times New Roman"/>
+              <a:cs typeface="Times New Roman"/>
+              <a:sym typeface="Times New Roman"/>
+            </a:endParaRPr>
           </a:p>
           <a:p>
             <a:endParaRPr lang="en-US" dirty="0"/>
@@ -4572,12 +4667,64 @@
         </p:nvSpPr>
         <p:spPr/>
         <p:txBody>
-          <a:bodyPr/>
+          <a:bodyPr>
+            <a:normAutofit/>
+          </a:bodyPr>
           <a:lstStyle/>
           <a:p>
             <a:r>
               <a:rPr lang="en-US" dirty="0"/>
-              <a:t>Write the software tools/technologies used for developing the project like Operating System, Front End, Back End, Database, Framework, IDE etc..</a:t>
+              <a:t>Operating System: </a:t>
+            </a:r>
+            <a:r>
+              <a:rPr lang="en-US" dirty="0" err="1"/>
+              <a:t>Windows,Linux</a:t>
+            </a:r>
+            <a:endParaRPr lang="en-US" dirty="0"/>
+          </a:p>
+          <a:p>
+            <a:r>
+              <a:rPr lang="en-US" dirty="0"/>
+              <a:t>Front End: html, </a:t>
+            </a:r>
+            <a:r>
+              <a:rPr lang="en-US" dirty="0" err="1"/>
+              <a:t>css</a:t>
+            </a:r>
+            <a:r>
+              <a:rPr lang="en-US" dirty="0"/>
+              <a:t>, </a:t>
+            </a:r>
+            <a:r>
+              <a:rPr lang="en-US" dirty="0" err="1"/>
+              <a:t>javascript</a:t>
+            </a:r>
+            <a:endParaRPr lang="en-US" dirty="0"/>
+          </a:p>
+          <a:p>
+            <a:r>
+              <a:rPr lang="en-US" dirty="0"/>
+              <a:t>Back End: </a:t>
+            </a:r>
+            <a:r>
+              <a:rPr lang="en-US" dirty="0" err="1"/>
+              <a:t>javascript</a:t>
+            </a:r>
+            <a:r>
+              <a:rPr lang="en-US" dirty="0"/>
+              <a:t>(Node.js),Express.</a:t>
+            </a:r>
+          </a:p>
+          <a:p>
+            <a:r>
+              <a:rPr lang="en-US" dirty="0"/>
+              <a:t>Database: SQLite/Firebase</a:t>
+            </a:r>
+          </a:p>
+          <a:p>
+            <a:r>
+              <a:rPr lang="en-US" dirty="0"/>
+              <a:t>IDE: Visual Studio Code</a:t>
             </a:r>
           </a:p>
         </p:txBody>
@@ -4749,14 +4896,14 @@
           <p:nvPr>
             <p:extLst>
               <p:ext uri="{D42A27DB-BD31-4B8C-83A1-F6EECF244321}">
-                <p14:modId xmlns:p14="http://schemas.microsoft.com/office/powerpoint/2010/main" val="3206989839"/>
+                <p14:modId xmlns:p14="http://schemas.microsoft.com/office/powerpoint/2010/main" val="1360559525"/>
               </p:ext>
             </p:extLst>
           </p:nvPr>
         </p:nvGraphicFramePr>
         <p:xfrm>
-          <a:off x="457200" y="1177233"/>
-          <a:ext cx="8229599" cy="4385369"/>
+          <a:off x="457200" y="1177232"/>
+          <a:ext cx="8229599" cy="5110065"/>
         </p:xfrm>
         <a:graphic>
           <a:graphicData uri="http://schemas.openxmlformats.org/drawingml/2006/table">
@@ -4857,7 +5004,7 @@
                   </a:extLst>
                 </a:gridCol>
               </a:tblGrid>
-              <a:tr h="883313">
+              <a:tr h="996827">
                 <a:tc>
                   <a:txBody>
                     <a:bodyPr/>
@@ -4874,7 +5021,7 @@
                       </a:pPr>
                       <a:r>
                         <a:rPr lang="en" sz="1200" b="1" dirty="0"/>
-                        <a:t>Backlog tem </a:t>
+                        <a:t>Backlog item </a:t>
                       </a:r>
                       <a:endParaRPr sz="1200" b="1" dirty="0"/>
                     </a:p>
@@ -4927,96 +5074,96 @@
                         <a:buNone/>
                       </a:pPr>
                       <a:r>
-                        <a:rPr lang="en" sz="1200" b="1"/>
+                        <a:rPr lang="en" sz="1200" b="1" dirty="0"/>
                         <a:t>Original Estimation in Hours </a:t>
                       </a:r>
-                      <a:endParaRPr sz="1200" b="1"/>
-                    </a:p>
-                  </a:txBody>
-                  <a:tcPr marL="91425" marR="91425" marT="91425" marB="91425" anchor="ctr">
-                    <a:solidFill>
-                      <a:schemeClr val="bg1"/>
-                    </a:solidFill>
-                  </a:tcPr>
-                </a:tc>
-                <a:tc>
-                  <a:txBody>
-                    <a:bodyPr/>
-                    <a:lstStyle/>
-                    <a:p>
-                      <a:pPr marL="0" lvl="0" indent="0" algn="ctr" rtl="0">
-                        <a:spcBef>
-                          <a:spcPts val="0"/>
-                        </a:spcBef>
-                        <a:spcAft>
-                          <a:spcPts val="0"/>
-                        </a:spcAft>
-                        <a:buNone/>
-                      </a:pPr>
-                      <a:r>
-                        <a:rPr lang="en" sz="1100" b="1"/>
+                      <a:endParaRPr sz="1200" b="1" dirty="0"/>
+                    </a:p>
+                  </a:txBody>
+                  <a:tcPr marL="91425" marR="91425" marT="91425" marB="91425" anchor="ctr">
+                    <a:solidFill>
+                      <a:schemeClr val="bg1"/>
+                    </a:solidFill>
+                  </a:tcPr>
+                </a:tc>
+                <a:tc>
+                  <a:txBody>
+                    <a:bodyPr/>
+                    <a:lstStyle/>
+                    <a:p>
+                      <a:pPr marL="0" lvl="0" indent="0" algn="ctr" rtl="0">
+                        <a:spcBef>
+                          <a:spcPts val="0"/>
+                        </a:spcBef>
+                        <a:spcAft>
+                          <a:spcPts val="0"/>
+                        </a:spcAft>
+                        <a:buNone/>
+                      </a:pPr>
+                      <a:r>
+                        <a:rPr lang="en" sz="1100" b="1" dirty="0"/>
                         <a:t>Day 1</a:t>
                       </a:r>
-                      <a:endParaRPr sz="1100" b="1"/>
-                    </a:p>
-                    <a:p>
-                      <a:pPr marL="0" lvl="0" indent="0" algn="ctr" rtl="0">
-                        <a:spcBef>
-                          <a:spcPts val="0"/>
-                        </a:spcBef>
-                        <a:spcAft>
-                          <a:spcPts val="0"/>
-                        </a:spcAft>
-                        <a:buNone/>
-                      </a:pPr>
-                      <a:r>
-                        <a:rPr lang="en" sz="1100" b="1"/>
+                      <a:endParaRPr sz="1100" b="1" dirty="0"/>
+                    </a:p>
+                    <a:p>
+                      <a:pPr marL="0" lvl="0" indent="0" algn="ctr" rtl="0">
+                        <a:spcBef>
+                          <a:spcPts val="0"/>
+                        </a:spcBef>
+                        <a:spcAft>
+                          <a:spcPts val="0"/>
+                        </a:spcAft>
+                        <a:buNone/>
+                      </a:pPr>
+                      <a:r>
+                        <a:rPr lang="en" sz="1100" b="1" dirty="0"/>
                         <a:t>hrs</a:t>
                       </a:r>
-                      <a:endParaRPr sz="1100" b="1"/>
-                    </a:p>
-                  </a:txBody>
-                  <a:tcPr marL="91425" marR="91425" marT="91425" marB="91425" anchor="ctr">
-                    <a:solidFill>
-                      <a:schemeClr val="bg1"/>
-                    </a:solidFill>
-                  </a:tcPr>
-                </a:tc>
-                <a:tc>
-                  <a:txBody>
-                    <a:bodyPr/>
-                    <a:lstStyle/>
-                    <a:p>
-                      <a:pPr marL="0" lvl="0" indent="0" algn="ctr" rtl="0">
-                        <a:spcBef>
-                          <a:spcPts val="0"/>
-                        </a:spcBef>
-                        <a:spcAft>
-                          <a:spcPts val="0"/>
-                        </a:spcAft>
-                        <a:buNone/>
-                      </a:pPr>
-                      <a:r>
-                        <a:rPr lang="en" sz="1100" b="1"/>
+                      <a:endParaRPr sz="1100" b="1" dirty="0"/>
+                    </a:p>
+                  </a:txBody>
+                  <a:tcPr marL="91425" marR="91425" marT="91425" marB="91425" anchor="ctr">
+                    <a:solidFill>
+                      <a:schemeClr val="bg1"/>
+                    </a:solidFill>
+                  </a:tcPr>
+                </a:tc>
+                <a:tc>
+                  <a:txBody>
+                    <a:bodyPr/>
+                    <a:lstStyle/>
+                    <a:p>
+                      <a:pPr marL="0" lvl="0" indent="0" algn="ctr" rtl="0">
+                        <a:spcBef>
+                          <a:spcPts val="0"/>
+                        </a:spcBef>
+                        <a:spcAft>
+                          <a:spcPts val="0"/>
+                        </a:spcAft>
+                        <a:buNone/>
+                      </a:pPr>
+                      <a:r>
+                        <a:rPr lang="en" sz="1100" b="1" dirty="0"/>
                         <a:t>Day 2</a:t>
                       </a:r>
-                      <a:endParaRPr sz="1100" b="1"/>
-                    </a:p>
-                    <a:p>
-                      <a:pPr marL="0" lvl="0" indent="0" algn="ctr" rtl="0">
-                        <a:spcBef>
-                          <a:spcPts val="0"/>
-                        </a:spcBef>
-                        <a:spcAft>
-                          <a:spcPts val="0"/>
-                        </a:spcAft>
-                        <a:buNone/>
-                      </a:pPr>
-                      <a:r>
-                        <a:rPr lang="en" sz="1100" b="1"/>
+                      <a:endParaRPr sz="1100" b="1" dirty="0"/>
+                    </a:p>
+                    <a:p>
+                      <a:pPr marL="0" lvl="0" indent="0" algn="ctr" rtl="0">
+                        <a:spcBef>
+                          <a:spcPts val="0"/>
+                        </a:spcBef>
+                        <a:spcAft>
+                          <a:spcPts val="0"/>
+                        </a:spcAft>
+                        <a:buNone/>
+                      </a:pPr>
+                      <a:r>
+                        <a:rPr lang="en" sz="1100" b="1" dirty="0"/>
                         <a:t>hrs</a:t>
                       </a:r>
-                      <a:endParaRPr sz="1100" b="1"/>
+                      <a:endParaRPr sz="1100" b="1" dirty="0"/>
                     </a:p>
                   </a:txBody>
                   <a:tcPr marL="91425" marR="91425" marT="91425" marB="91425" anchor="ctr">
@@ -5099,328 +5246,328 @@
                         <a:buNone/>
                       </a:pPr>
                       <a:r>
-                        <a:rPr lang="en" sz="1100" b="1"/>
+                        <a:rPr lang="en" sz="1100" b="1" dirty="0"/>
                         <a:t>Day</a:t>
                       </a:r>
-                      <a:endParaRPr sz="1100" b="1"/>
-                    </a:p>
-                    <a:p>
-                      <a:pPr marL="0" lvl="0" indent="0" algn="ctr" rtl="0">
-                        <a:spcBef>
-                          <a:spcPts val="0"/>
-                        </a:spcBef>
-                        <a:spcAft>
-                          <a:spcPts val="0"/>
-                        </a:spcAft>
-                        <a:buNone/>
-                      </a:pPr>
-                      <a:r>
-                        <a:rPr lang="en" sz="1100" b="1"/>
+                      <a:endParaRPr sz="1100" b="1" dirty="0"/>
+                    </a:p>
+                    <a:p>
+                      <a:pPr marL="0" lvl="0" indent="0" algn="ctr" rtl="0">
+                        <a:spcBef>
+                          <a:spcPts val="0"/>
+                        </a:spcBef>
+                        <a:spcAft>
+                          <a:spcPts val="0"/>
+                        </a:spcAft>
+                        <a:buNone/>
+                      </a:pPr>
+                      <a:r>
+                        <a:rPr lang="en" sz="1100" b="1" dirty="0"/>
                         <a:t>4</a:t>
                       </a:r>
-                      <a:endParaRPr sz="1100" b="1"/>
-                    </a:p>
-                    <a:p>
-                      <a:pPr marL="0" lvl="0" indent="0" algn="ctr" rtl="0">
-                        <a:spcBef>
-                          <a:spcPts val="0"/>
-                        </a:spcBef>
-                        <a:spcAft>
-                          <a:spcPts val="0"/>
-                        </a:spcAft>
-                        <a:buNone/>
-                      </a:pPr>
-                      <a:r>
-                        <a:rPr lang="en" sz="1100" b="1"/>
+                      <a:endParaRPr sz="1100" b="1" dirty="0"/>
+                    </a:p>
+                    <a:p>
+                      <a:pPr marL="0" lvl="0" indent="0" algn="ctr" rtl="0">
+                        <a:spcBef>
+                          <a:spcPts val="0"/>
+                        </a:spcBef>
+                        <a:spcAft>
+                          <a:spcPts val="0"/>
+                        </a:spcAft>
+                        <a:buNone/>
+                      </a:pPr>
+                      <a:r>
+                        <a:rPr lang="en" sz="1100" b="1" dirty="0"/>
                         <a:t>hrs</a:t>
                       </a:r>
-                      <a:endParaRPr sz="1100" b="1"/>
-                    </a:p>
-                  </a:txBody>
-                  <a:tcPr marL="91425" marR="91425" marT="91425" marB="91425" anchor="ctr">
-                    <a:solidFill>
-                      <a:schemeClr val="bg1"/>
-                    </a:solidFill>
-                  </a:tcPr>
-                </a:tc>
-                <a:tc>
-                  <a:txBody>
-                    <a:bodyPr/>
-                    <a:lstStyle/>
-                    <a:p>
-                      <a:pPr marL="0" lvl="0" indent="0" algn="ctr" rtl="0">
-                        <a:spcBef>
-                          <a:spcPts val="0"/>
-                        </a:spcBef>
-                        <a:spcAft>
-                          <a:spcPts val="0"/>
-                        </a:spcAft>
-                        <a:buNone/>
-                      </a:pPr>
-                      <a:r>
-                        <a:rPr lang="en" sz="1100" b="1"/>
+                      <a:endParaRPr sz="1100" b="1" dirty="0"/>
+                    </a:p>
+                  </a:txBody>
+                  <a:tcPr marL="91425" marR="91425" marT="91425" marB="91425" anchor="ctr">
+                    <a:solidFill>
+                      <a:schemeClr val="bg1"/>
+                    </a:solidFill>
+                  </a:tcPr>
+                </a:tc>
+                <a:tc>
+                  <a:txBody>
+                    <a:bodyPr/>
+                    <a:lstStyle/>
+                    <a:p>
+                      <a:pPr marL="0" lvl="0" indent="0" algn="ctr" rtl="0">
+                        <a:spcBef>
+                          <a:spcPts val="0"/>
+                        </a:spcBef>
+                        <a:spcAft>
+                          <a:spcPts val="0"/>
+                        </a:spcAft>
+                        <a:buNone/>
+                      </a:pPr>
+                      <a:r>
+                        <a:rPr lang="en" sz="1100" b="1" dirty="0"/>
                         <a:t>Day </a:t>
                       </a:r>
-                      <a:endParaRPr sz="1100" b="1"/>
-                    </a:p>
-                    <a:p>
-                      <a:pPr marL="0" lvl="0" indent="0" algn="ctr" rtl="0">
-                        <a:spcBef>
-                          <a:spcPts val="0"/>
-                        </a:spcBef>
-                        <a:spcAft>
-                          <a:spcPts val="0"/>
-                        </a:spcAft>
-                        <a:buNone/>
-                      </a:pPr>
-                      <a:r>
-                        <a:rPr lang="en" sz="1100" b="1"/>
+                      <a:endParaRPr sz="1100" b="1" dirty="0"/>
+                    </a:p>
+                    <a:p>
+                      <a:pPr marL="0" lvl="0" indent="0" algn="ctr" rtl="0">
+                        <a:spcBef>
+                          <a:spcPts val="0"/>
+                        </a:spcBef>
+                        <a:spcAft>
+                          <a:spcPts val="0"/>
+                        </a:spcAft>
+                        <a:buNone/>
+                      </a:pPr>
+                      <a:r>
+                        <a:rPr lang="en" sz="1100" b="1" dirty="0"/>
                         <a:t>5</a:t>
                       </a:r>
-                      <a:endParaRPr sz="1100" b="1"/>
-                    </a:p>
-                    <a:p>
-                      <a:pPr marL="0" lvl="0" indent="0" algn="ctr" rtl="0">
-                        <a:spcBef>
-                          <a:spcPts val="0"/>
-                        </a:spcBef>
-                        <a:spcAft>
-                          <a:spcPts val="0"/>
-                        </a:spcAft>
-                        <a:buNone/>
-                      </a:pPr>
-                      <a:r>
-                        <a:rPr lang="en" sz="1100" b="1"/>
+                      <a:endParaRPr sz="1100" b="1" dirty="0"/>
+                    </a:p>
+                    <a:p>
+                      <a:pPr marL="0" lvl="0" indent="0" algn="ctr" rtl="0">
+                        <a:spcBef>
+                          <a:spcPts val="0"/>
+                        </a:spcBef>
+                        <a:spcAft>
+                          <a:spcPts val="0"/>
+                        </a:spcAft>
+                        <a:buNone/>
+                      </a:pPr>
+                      <a:r>
+                        <a:rPr lang="en" sz="1100" b="1" dirty="0"/>
                         <a:t>hrs</a:t>
                       </a:r>
-                      <a:endParaRPr sz="1100" b="1"/>
-                    </a:p>
-                  </a:txBody>
-                  <a:tcPr marL="91425" marR="91425" marT="91425" marB="91425" anchor="ctr">
-                    <a:solidFill>
-                      <a:schemeClr val="bg1"/>
-                    </a:solidFill>
-                  </a:tcPr>
-                </a:tc>
-                <a:tc>
-                  <a:txBody>
-                    <a:bodyPr/>
-                    <a:lstStyle/>
-                    <a:p>
-                      <a:pPr marL="0" lvl="0" indent="0" algn="ctr" rtl="0">
-                        <a:spcBef>
-                          <a:spcPts val="0"/>
-                        </a:spcBef>
-                        <a:spcAft>
-                          <a:spcPts val="0"/>
-                        </a:spcAft>
-                        <a:buNone/>
-                      </a:pPr>
-                      <a:r>
-                        <a:rPr lang="en" sz="1100" b="1"/>
+                      <a:endParaRPr sz="1100" b="1" dirty="0"/>
+                    </a:p>
+                  </a:txBody>
+                  <a:tcPr marL="91425" marR="91425" marT="91425" marB="91425" anchor="ctr">
+                    <a:solidFill>
+                      <a:schemeClr val="bg1"/>
+                    </a:solidFill>
+                  </a:tcPr>
+                </a:tc>
+                <a:tc>
+                  <a:txBody>
+                    <a:bodyPr/>
+                    <a:lstStyle/>
+                    <a:p>
+                      <a:pPr marL="0" lvl="0" indent="0" algn="ctr" rtl="0">
+                        <a:spcBef>
+                          <a:spcPts val="0"/>
+                        </a:spcBef>
+                        <a:spcAft>
+                          <a:spcPts val="0"/>
+                        </a:spcAft>
+                        <a:buNone/>
+                      </a:pPr>
+                      <a:r>
+                        <a:rPr lang="en" sz="1100" b="1" dirty="0"/>
                         <a:t>Day 6</a:t>
                       </a:r>
-                      <a:endParaRPr sz="1100" b="1"/>
-                    </a:p>
-                    <a:p>
-                      <a:pPr marL="0" lvl="0" indent="0" algn="ctr" rtl="0">
-                        <a:spcBef>
-                          <a:spcPts val="0"/>
-                        </a:spcBef>
-                        <a:spcAft>
-                          <a:spcPts val="0"/>
-                        </a:spcAft>
-                        <a:buNone/>
-                      </a:pPr>
-                      <a:r>
-                        <a:rPr lang="en" sz="1100" b="1"/>
+                      <a:endParaRPr sz="1100" b="1" dirty="0"/>
+                    </a:p>
+                    <a:p>
+                      <a:pPr marL="0" lvl="0" indent="0" algn="ctr" rtl="0">
+                        <a:spcBef>
+                          <a:spcPts val="0"/>
+                        </a:spcBef>
+                        <a:spcAft>
+                          <a:spcPts val="0"/>
+                        </a:spcAft>
+                        <a:buNone/>
+                      </a:pPr>
+                      <a:r>
+                        <a:rPr lang="en" sz="1100" b="1" dirty="0"/>
                         <a:t>hrs</a:t>
                       </a:r>
-                      <a:endParaRPr sz="1100" b="1"/>
-                    </a:p>
-                  </a:txBody>
-                  <a:tcPr marL="91425" marR="91425" marT="91425" marB="91425" anchor="ctr">
-                    <a:solidFill>
-                      <a:schemeClr val="bg1"/>
-                    </a:solidFill>
-                  </a:tcPr>
-                </a:tc>
-                <a:tc>
-                  <a:txBody>
-                    <a:bodyPr/>
-                    <a:lstStyle/>
-                    <a:p>
-                      <a:pPr marL="0" lvl="0" indent="0" algn="ctr" rtl="0">
-                        <a:spcBef>
-                          <a:spcPts val="0"/>
-                        </a:spcBef>
-                        <a:spcAft>
-                          <a:spcPts val="0"/>
-                        </a:spcAft>
-                        <a:buNone/>
-                      </a:pPr>
-                      <a:r>
-                        <a:rPr lang="en" sz="1100" b="1"/>
+                      <a:endParaRPr sz="1100" b="1" dirty="0"/>
+                    </a:p>
+                  </a:txBody>
+                  <a:tcPr marL="91425" marR="91425" marT="91425" marB="91425" anchor="ctr">
+                    <a:solidFill>
+                      <a:schemeClr val="bg1"/>
+                    </a:solidFill>
+                  </a:tcPr>
+                </a:tc>
+                <a:tc>
+                  <a:txBody>
+                    <a:bodyPr/>
+                    <a:lstStyle/>
+                    <a:p>
+                      <a:pPr marL="0" lvl="0" indent="0" algn="ctr" rtl="0">
+                        <a:spcBef>
+                          <a:spcPts val="0"/>
+                        </a:spcBef>
+                        <a:spcAft>
+                          <a:spcPts val="0"/>
+                        </a:spcAft>
+                        <a:buNone/>
+                      </a:pPr>
+                      <a:r>
+                        <a:rPr lang="en" sz="1100" b="1" dirty="0"/>
                         <a:t>Day 7</a:t>
                       </a:r>
-                      <a:endParaRPr sz="1100" b="1"/>
-                    </a:p>
-                    <a:p>
-                      <a:pPr marL="0" lvl="0" indent="0" algn="ctr" rtl="0">
-                        <a:spcBef>
-                          <a:spcPts val="0"/>
-                        </a:spcBef>
-                        <a:spcAft>
-                          <a:spcPts val="0"/>
-                        </a:spcAft>
-                        <a:buNone/>
-                      </a:pPr>
-                      <a:r>
-                        <a:rPr lang="en" sz="1100" b="1"/>
+                      <a:endParaRPr sz="1100" b="1" dirty="0"/>
+                    </a:p>
+                    <a:p>
+                      <a:pPr marL="0" lvl="0" indent="0" algn="ctr" rtl="0">
+                        <a:spcBef>
+                          <a:spcPts val="0"/>
+                        </a:spcBef>
+                        <a:spcAft>
+                          <a:spcPts val="0"/>
+                        </a:spcAft>
+                        <a:buNone/>
+                      </a:pPr>
+                      <a:r>
+                        <a:rPr lang="en" sz="1100" b="1" dirty="0"/>
                         <a:t>hrs</a:t>
                       </a:r>
-                      <a:endParaRPr sz="1100" b="1"/>
-                    </a:p>
-                  </a:txBody>
-                  <a:tcPr marL="91425" marR="91425" marT="91425" marB="91425" anchor="ctr">
-                    <a:solidFill>
-                      <a:schemeClr val="bg1"/>
-                    </a:solidFill>
-                  </a:tcPr>
-                </a:tc>
-                <a:tc>
-                  <a:txBody>
-                    <a:bodyPr/>
-                    <a:lstStyle/>
-                    <a:p>
-                      <a:pPr marL="0" lvl="0" indent="0" algn="ctr" rtl="0">
-                        <a:spcBef>
-                          <a:spcPts val="0"/>
-                        </a:spcBef>
-                        <a:spcAft>
-                          <a:spcPts val="0"/>
-                        </a:spcAft>
-                        <a:buNone/>
-                      </a:pPr>
-                      <a:r>
-                        <a:rPr lang="en" sz="1100" b="1"/>
+                      <a:endParaRPr sz="1100" b="1" dirty="0"/>
+                    </a:p>
+                  </a:txBody>
+                  <a:tcPr marL="91425" marR="91425" marT="91425" marB="91425" anchor="ctr">
+                    <a:solidFill>
+                      <a:schemeClr val="bg1"/>
+                    </a:solidFill>
+                  </a:tcPr>
+                </a:tc>
+                <a:tc>
+                  <a:txBody>
+                    <a:bodyPr/>
+                    <a:lstStyle/>
+                    <a:p>
+                      <a:pPr marL="0" lvl="0" indent="0" algn="ctr" rtl="0">
+                        <a:spcBef>
+                          <a:spcPts val="0"/>
+                        </a:spcBef>
+                        <a:spcAft>
+                          <a:spcPts val="0"/>
+                        </a:spcAft>
+                        <a:buNone/>
+                      </a:pPr>
+                      <a:r>
+                        <a:rPr lang="en" sz="1100" b="1" dirty="0"/>
                         <a:t>Day 8</a:t>
                       </a:r>
-                      <a:endParaRPr sz="1100" b="1"/>
-                    </a:p>
-                    <a:p>
-                      <a:pPr marL="0" lvl="0" indent="0" algn="ctr" rtl="0">
-                        <a:spcBef>
-                          <a:spcPts val="0"/>
-                        </a:spcBef>
-                        <a:spcAft>
-                          <a:spcPts val="0"/>
-                        </a:spcAft>
-                        <a:buNone/>
-                      </a:pPr>
-                      <a:r>
-                        <a:rPr lang="en" sz="1100" b="1"/>
+                      <a:endParaRPr sz="1100" b="1" dirty="0"/>
+                    </a:p>
+                    <a:p>
+                      <a:pPr marL="0" lvl="0" indent="0" algn="ctr" rtl="0">
+                        <a:spcBef>
+                          <a:spcPts val="0"/>
+                        </a:spcBef>
+                        <a:spcAft>
+                          <a:spcPts val="0"/>
+                        </a:spcAft>
+                        <a:buNone/>
+                      </a:pPr>
+                      <a:r>
+                        <a:rPr lang="en" sz="1100" b="1" dirty="0"/>
                         <a:t>hrs</a:t>
                       </a:r>
-                      <a:endParaRPr sz="1100" b="1"/>
-                    </a:p>
-                  </a:txBody>
-                  <a:tcPr marL="91425" marR="91425" marT="91425" marB="91425" anchor="ctr">
-                    <a:solidFill>
-                      <a:schemeClr val="bg1"/>
-                    </a:solidFill>
-                  </a:tcPr>
-                </a:tc>
-                <a:tc>
-                  <a:txBody>
-                    <a:bodyPr/>
-                    <a:lstStyle/>
-                    <a:p>
-                      <a:pPr marL="0" lvl="0" indent="0" algn="ctr" rtl="0">
-                        <a:spcBef>
-                          <a:spcPts val="0"/>
-                        </a:spcBef>
-                        <a:spcAft>
-                          <a:spcPts val="0"/>
-                        </a:spcAft>
-                        <a:buNone/>
-                      </a:pPr>
-                      <a:r>
-                        <a:rPr lang="en" sz="1100" b="1"/>
+                      <a:endParaRPr sz="1100" b="1" dirty="0"/>
+                    </a:p>
+                  </a:txBody>
+                  <a:tcPr marL="91425" marR="91425" marT="91425" marB="91425" anchor="ctr">
+                    <a:solidFill>
+                      <a:schemeClr val="bg1"/>
+                    </a:solidFill>
+                  </a:tcPr>
+                </a:tc>
+                <a:tc>
+                  <a:txBody>
+                    <a:bodyPr/>
+                    <a:lstStyle/>
+                    <a:p>
+                      <a:pPr marL="0" lvl="0" indent="0" algn="ctr" rtl="0">
+                        <a:spcBef>
+                          <a:spcPts val="0"/>
+                        </a:spcBef>
+                        <a:spcAft>
+                          <a:spcPts val="0"/>
+                        </a:spcAft>
+                        <a:buNone/>
+                      </a:pPr>
+                      <a:r>
+                        <a:rPr lang="en" sz="1100" b="1" dirty="0"/>
                         <a:t>Day 9</a:t>
                       </a:r>
-                      <a:endParaRPr sz="1100" b="1"/>
-                    </a:p>
-                    <a:p>
-                      <a:pPr marL="0" lvl="0" indent="0" algn="ctr" rtl="0">
-                        <a:spcBef>
-                          <a:spcPts val="0"/>
-                        </a:spcBef>
-                        <a:spcAft>
-                          <a:spcPts val="0"/>
-                        </a:spcAft>
-                        <a:buNone/>
-                      </a:pPr>
-                      <a:r>
-                        <a:rPr lang="en" sz="1100" b="1"/>
+                      <a:endParaRPr sz="1100" b="1" dirty="0"/>
+                    </a:p>
+                    <a:p>
+                      <a:pPr marL="0" lvl="0" indent="0" algn="ctr" rtl="0">
+                        <a:spcBef>
+                          <a:spcPts val="0"/>
+                        </a:spcBef>
+                        <a:spcAft>
+                          <a:spcPts val="0"/>
+                        </a:spcAft>
+                        <a:buNone/>
+                      </a:pPr>
+                      <a:r>
+                        <a:rPr lang="en" sz="1100" b="1" dirty="0"/>
                         <a:t>hrs</a:t>
                       </a:r>
-                      <a:endParaRPr sz="1100" b="1"/>
-                    </a:p>
-                  </a:txBody>
-                  <a:tcPr marL="91425" marR="91425" marT="91425" marB="91425" anchor="ctr">
-                    <a:solidFill>
-                      <a:schemeClr val="bg1"/>
-                    </a:solidFill>
-                  </a:tcPr>
-                </a:tc>
-                <a:tc>
-                  <a:txBody>
-                    <a:bodyPr/>
-                    <a:lstStyle/>
-                    <a:p>
-                      <a:pPr marL="0" lvl="0" indent="0" algn="ctr" rtl="0">
-                        <a:spcBef>
-                          <a:spcPts val="0"/>
-                        </a:spcBef>
-                        <a:spcAft>
-                          <a:spcPts val="0"/>
-                        </a:spcAft>
-                        <a:buNone/>
-                      </a:pPr>
-                      <a:r>
-                        <a:rPr lang="en" sz="1100" b="1"/>
+                      <a:endParaRPr sz="1100" b="1" dirty="0"/>
+                    </a:p>
+                  </a:txBody>
+                  <a:tcPr marL="91425" marR="91425" marT="91425" marB="91425" anchor="ctr">
+                    <a:solidFill>
+                      <a:schemeClr val="bg1"/>
+                    </a:solidFill>
+                  </a:tcPr>
+                </a:tc>
+                <a:tc>
+                  <a:txBody>
+                    <a:bodyPr/>
+                    <a:lstStyle/>
+                    <a:p>
+                      <a:pPr marL="0" lvl="0" indent="0" algn="ctr" rtl="0">
+                        <a:spcBef>
+                          <a:spcPts val="0"/>
+                        </a:spcBef>
+                        <a:spcAft>
+                          <a:spcPts val="0"/>
+                        </a:spcAft>
+                        <a:buNone/>
+                      </a:pPr>
+                      <a:r>
+                        <a:rPr lang="en" sz="1100" b="1" dirty="0"/>
                         <a:t>Day 10</a:t>
                       </a:r>
-                      <a:endParaRPr sz="1100" b="1"/>
-                    </a:p>
-                    <a:p>
-                      <a:pPr marL="0" lvl="0" indent="0" algn="ctr" rtl="0">
-                        <a:spcBef>
-                          <a:spcPts val="0"/>
-                        </a:spcBef>
-                        <a:spcAft>
-                          <a:spcPts val="0"/>
-                        </a:spcAft>
-                        <a:buNone/>
-                      </a:pPr>
-                      <a:r>
-                        <a:rPr lang="en" sz="1100" b="1"/>
+                      <a:endParaRPr sz="1100" b="1" dirty="0"/>
+                    </a:p>
+                    <a:p>
+                      <a:pPr marL="0" lvl="0" indent="0" algn="ctr" rtl="0">
+                        <a:spcBef>
+                          <a:spcPts val="0"/>
+                        </a:spcBef>
+                        <a:spcAft>
+                          <a:spcPts val="0"/>
+                        </a:spcAft>
+                        <a:buNone/>
+                      </a:pPr>
+                      <a:r>
+                        <a:rPr lang="en" sz="1100" b="1" dirty="0"/>
                         <a:t>hrs</a:t>
                       </a:r>
-                      <a:endParaRPr sz="1100" b="1"/>
-                    </a:p>
-                    <a:p>
-                      <a:pPr marL="0" lvl="0" indent="0" algn="ctr" rtl="0">
-                        <a:spcBef>
-                          <a:spcPts val="0"/>
-                        </a:spcBef>
-                        <a:spcAft>
-                          <a:spcPts val="0"/>
-                        </a:spcAft>
-                        <a:buNone/>
-                      </a:pPr>
-                      <a:endParaRPr sz="1100" b="1"/>
+                      <a:endParaRPr sz="1100" b="1" dirty="0"/>
+                    </a:p>
+                    <a:p>
+                      <a:pPr marL="0" lvl="0" indent="0" algn="ctr" rtl="0">
+                        <a:spcBef>
+                          <a:spcPts val="0"/>
+                        </a:spcBef>
+                        <a:spcAft>
+                          <a:spcPts val="0"/>
+                        </a:spcAft>
+                        <a:buNone/>
+                      </a:pPr>
+                      <a:endParaRPr sz="1100" b="1" dirty="0"/>
                     </a:p>
                   </a:txBody>
                   <a:tcPr marL="91425" marR="91425" marT="91425" marB="91425" anchor="ctr">
@@ -5435,7 +5582,7 @@
                   </a:ext>
                 </a:extLst>
               </a:tr>
-              <a:tr h="394318">
+              <a:tr h="444991">
                 <a:tc gridSpan="13">
                   <a:txBody>
                     <a:bodyPr/>
@@ -5589,53 +5736,53 @@
                   </a:ext>
                 </a:extLst>
               </a:tr>
-              <a:tr h="536285">
-                <a:tc>
-                  <a:txBody>
-                    <a:bodyPr/>
-                    <a:lstStyle/>
-                    <a:p>
-                      <a:pPr marL="0" lvl="0" indent="0" algn="ctr" rtl="0">
-                        <a:spcBef>
-                          <a:spcPts val="0"/>
-                        </a:spcBef>
-                        <a:spcAft>
-                          <a:spcPts val="0"/>
-                        </a:spcAft>
-                        <a:buNone/>
-                      </a:pPr>
-                      <a:r>
-                        <a:rPr lang="en" sz="1100"/>
-                        <a:t>Table designing</a:t>
-                      </a:r>
-                      <a:endParaRPr sz="1100"/>
-                    </a:p>
-                  </a:txBody>
-                  <a:tcPr marL="91425" marR="91425" marT="91425" marB="91425" anchor="ctr">
-                    <a:solidFill>
-                      <a:schemeClr val="bg1"/>
-                    </a:solidFill>
-                  </a:tcPr>
-                </a:tc>
-                <a:tc>
-                  <a:txBody>
-                    <a:bodyPr/>
-                    <a:lstStyle/>
-                    <a:p>
-                      <a:pPr marL="0" lvl="0" indent="0" algn="ctr" rtl="0">
-                        <a:spcBef>
-                          <a:spcPts val="0"/>
-                        </a:spcBef>
-                        <a:spcAft>
-                          <a:spcPts val="0"/>
-                        </a:spcAft>
-                        <a:buNone/>
-                      </a:pPr>
-                      <a:r>
-                        <a:rPr lang="en" sz="1000"/>
-                        <a:t>16/8/2022</a:t>
-                      </a:r>
-                      <a:endParaRPr sz="1000"/>
+              <a:tr h="605203">
+                <a:tc>
+                  <a:txBody>
+                    <a:bodyPr/>
+                    <a:lstStyle/>
+                    <a:p>
+                      <a:pPr marL="0" lvl="0" indent="0" algn="ctr" rtl="0">
+                        <a:spcBef>
+                          <a:spcPts val="0"/>
+                        </a:spcBef>
+                        <a:spcAft>
+                          <a:spcPts val="0"/>
+                        </a:spcAft>
+                        <a:buNone/>
+                      </a:pPr>
+                      <a:r>
+                        <a:rPr lang="en" sz="1100" dirty="0"/>
+                        <a:t>User Profile designing</a:t>
+                      </a:r>
+                      <a:endParaRPr sz="1100" dirty="0"/>
+                    </a:p>
+                  </a:txBody>
+                  <a:tcPr marL="91425" marR="91425" marT="91425" marB="91425" anchor="ctr">
+                    <a:solidFill>
+                      <a:schemeClr val="bg1"/>
+                    </a:solidFill>
+                  </a:tcPr>
+                </a:tc>
+                <a:tc>
+                  <a:txBody>
+                    <a:bodyPr/>
+                    <a:lstStyle/>
+                    <a:p>
+                      <a:pPr marL="0" lvl="0" indent="0" algn="ctr" rtl="0">
+                        <a:spcBef>
+                          <a:spcPts val="0"/>
+                        </a:spcBef>
+                        <a:spcAft>
+                          <a:spcPts val="0"/>
+                        </a:spcAft>
+                        <a:buNone/>
+                      </a:pPr>
+                      <a:r>
+                        <a:rPr lang="en" sz="1000" dirty="0"/>
+                        <a:t>22/8/2022</a:t>
+                      </a:r>
+                      <a:endParaRPr sz="1000" dirty="0"/>
                     </a:p>
                   </a:txBody>
                   <a:tcPr marL="91425" marR="91425" marT="91425" marB="91425" anchor="ctr">
@@ -5740,64 +5887,64 @@
                         <a:buNone/>
                       </a:pPr>
                       <a:r>
-                        <a:rPr lang="en"/>
+                        <a:rPr lang="en" dirty="0"/>
                         <a:t>0</a:t>
                       </a:r>
-                      <a:endParaRPr/>
-                    </a:p>
-                  </a:txBody>
-                  <a:tcPr marL="91425" marR="91425" marT="91425" marB="91425" anchor="ctr">
-                    <a:solidFill>
-                      <a:schemeClr val="bg1"/>
-                    </a:solidFill>
-                  </a:tcPr>
-                </a:tc>
-                <a:tc>
-                  <a:txBody>
-                    <a:bodyPr/>
-                    <a:lstStyle/>
-                    <a:p>
-                      <a:pPr marL="0" lvl="0" indent="0" algn="ctr" rtl="0">
-                        <a:spcBef>
-                          <a:spcPts val="0"/>
-                        </a:spcBef>
-                        <a:spcAft>
-                          <a:spcPts val="0"/>
-                        </a:spcAft>
-                        <a:buNone/>
-                      </a:pPr>
-                      <a:r>
-                        <a:rPr lang="en"/>
+                      <a:endParaRPr dirty="0"/>
+                    </a:p>
+                  </a:txBody>
+                  <a:tcPr marL="91425" marR="91425" marT="91425" marB="91425" anchor="ctr">
+                    <a:solidFill>
+                      <a:schemeClr val="bg1"/>
+                    </a:solidFill>
+                  </a:tcPr>
+                </a:tc>
+                <a:tc>
+                  <a:txBody>
+                    <a:bodyPr/>
+                    <a:lstStyle/>
+                    <a:p>
+                      <a:pPr marL="0" lvl="0" indent="0" algn="ctr" rtl="0">
+                        <a:spcBef>
+                          <a:spcPts val="0"/>
+                        </a:spcBef>
+                        <a:spcAft>
+                          <a:spcPts val="0"/>
+                        </a:spcAft>
+                        <a:buNone/>
+                      </a:pPr>
+                      <a:r>
+                        <a:rPr lang="en" dirty="0"/>
                         <a:t>0</a:t>
                       </a:r>
-                      <a:endParaRPr/>
-                    </a:p>
-                  </a:txBody>
-                  <a:tcPr marL="91425" marR="91425" marT="91425" marB="91425" anchor="ctr">
-                    <a:solidFill>
-                      <a:schemeClr val="bg1"/>
-                    </a:solidFill>
-                  </a:tcPr>
-                </a:tc>
-                <a:tc>
-                  <a:txBody>
-                    <a:bodyPr/>
-                    <a:lstStyle/>
-                    <a:p>
-                      <a:pPr marL="0" lvl="0" indent="0" algn="ctr" rtl="0">
-                        <a:spcBef>
-                          <a:spcPts val="0"/>
-                        </a:spcBef>
-                        <a:spcAft>
-                          <a:spcPts val="0"/>
-                        </a:spcAft>
-                        <a:buNone/>
-                      </a:pPr>
-                      <a:r>
-                        <a:rPr lang="en"/>
+                      <a:endParaRPr dirty="0"/>
+                    </a:p>
+                  </a:txBody>
+                  <a:tcPr marL="91425" marR="91425" marT="91425" marB="91425" anchor="ctr">
+                    <a:solidFill>
+                      <a:schemeClr val="bg1"/>
+                    </a:solidFill>
+                  </a:tcPr>
+                </a:tc>
+                <a:tc>
+                  <a:txBody>
+                    <a:bodyPr/>
+                    <a:lstStyle/>
+                    <a:p>
+                      <a:pPr marL="0" lvl="0" indent="0" algn="ctr" rtl="0">
+                        <a:spcBef>
+                          <a:spcPts val="0"/>
+                        </a:spcBef>
+                        <a:spcAft>
+                          <a:spcPts val="0"/>
+                        </a:spcAft>
+                        <a:buNone/>
+                      </a:pPr>
+                      <a:r>
+                        <a:rPr lang="en" dirty="0"/>
                         <a:t>0</a:t>
                       </a:r>
-                      <a:endParaRPr/>
+                      <a:endParaRPr dirty="0"/>
                     </a:p>
                   </a:txBody>
                   <a:tcPr marL="91425" marR="91425" marT="91425" marB="91425" anchor="ctr">
@@ -5947,53 +6094,53 @@
                   </a:ext>
                 </a:extLst>
               </a:tr>
-              <a:tr h="536285">
-                <a:tc>
-                  <a:txBody>
-                    <a:bodyPr/>
-                    <a:lstStyle/>
-                    <a:p>
-                      <a:pPr marL="0" lvl="0" indent="0" algn="ctr" rtl="0">
-                        <a:spcBef>
-                          <a:spcPts val="0"/>
-                        </a:spcBef>
-                        <a:spcAft>
-                          <a:spcPts val="0"/>
-                        </a:spcAft>
-                        <a:buNone/>
-                      </a:pPr>
-                      <a:r>
-                        <a:rPr lang="en" sz="1100"/>
-                        <a:t>Form designing</a:t>
-                      </a:r>
-                      <a:endParaRPr sz="1100"/>
-                    </a:p>
-                  </a:txBody>
-                  <a:tcPr marL="91425" marR="91425" marT="91425" marB="91425" anchor="ctr">
-                    <a:solidFill>
-                      <a:schemeClr val="bg1"/>
-                    </a:solidFill>
-                  </a:tcPr>
-                </a:tc>
-                <a:tc>
-                  <a:txBody>
-                    <a:bodyPr/>
-                    <a:lstStyle/>
-                    <a:p>
-                      <a:pPr marL="0" lvl="0" indent="0" algn="ctr" rtl="0">
-                        <a:spcBef>
-                          <a:spcPts val="0"/>
-                        </a:spcBef>
-                        <a:spcAft>
-                          <a:spcPts val="0"/>
-                        </a:spcAft>
-                        <a:buNone/>
-                      </a:pPr>
-                      <a:r>
-                        <a:rPr lang="en" sz="1000"/>
-                        <a:t>22/8/2022</a:t>
-                      </a:r>
-                      <a:endParaRPr/>
+              <a:tr h="605203">
+                <a:tc>
+                  <a:txBody>
+                    <a:bodyPr/>
+                    <a:lstStyle/>
+                    <a:p>
+                      <a:pPr marL="0" lvl="0" indent="0" algn="ctr" rtl="0">
+                        <a:spcBef>
+                          <a:spcPts val="0"/>
+                        </a:spcBef>
+                        <a:spcAft>
+                          <a:spcPts val="0"/>
+                        </a:spcAft>
+                        <a:buNone/>
+                      </a:pPr>
+                      <a:r>
+                        <a:rPr lang="en" sz="1100" dirty="0"/>
+                        <a:t>Style implimentation</a:t>
+                      </a:r>
+                      <a:endParaRPr sz="1100" dirty="0"/>
+                    </a:p>
+                  </a:txBody>
+                  <a:tcPr marL="91425" marR="91425" marT="91425" marB="91425" anchor="ctr">
+                    <a:solidFill>
+                      <a:schemeClr val="bg1"/>
+                    </a:solidFill>
+                  </a:tcPr>
+                </a:tc>
+                <a:tc>
+                  <a:txBody>
+                    <a:bodyPr/>
+                    <a:lstStyle/>
+                    <a:p>
+                      <a:pPr marL="0" lvl="0" indent="0" algn="ctr" rtl="0">
+                        <a:spcBef>
+                          <a:spcPts val="0"/>
+                        </a:spcBef>
+                        <a:spcAft>
+                          <a:spcPts val="0"/>
+                        </a:spcAft>
+                        <a:buNone/>
+                      </a:pPr>
+                      <a:r>
+                        <a:rPr lang="en" sz="1000" dirty="0"/>
+                        <a:t>25/8/2022</a:t>
+                      </a:r>
+                      <a:endParaRPr dirty="0"/>
                     </a:p>
                   </a:txBody>
                   <a:tcPr marL="91425" marR="91425" marT="91425" marB="91425" anchor="ctr">
@@ -6152,10 +6299,10 @@
                         <a:buNone/>
                       </a:pPr>
                       <a:r>
-                        <a:rPr lang="en"/>
+                        <a:rPr lang="en" dirty="0"/>
                         <a:t>0</a:t>
                       </a:r>
-                      <a:endParaRPr/>
+                      <a:endParaRPr dirty="0"/>
                     </a:p>
                   </a:txBody>
                   <a:tcPr marL="91425" marR="91425" marT="91425" marB="91425" anchor="ctr">
@@ -6305,53 +6452,53 @@
                   </a:ext>
                 </a:extLst>
               </a:tr>
-              <a:tr h="473189">
-                <a:tc>
-                  <a:txBody>
-                    <a:bodyPr/>
-                    <a:lstStyle/>
-                    <a:p>
-                      <a:pPr marL="0" lvl="0" indent="0" algn="ctr" rtl="0">
-                        <a:spcBef>
-                          <a:spcPts val="0"/>
-                        </a:spcBef>
-                        <a:spcAft>
-                          <a:spcPts val="0"/>
-                        </a:spcAft>
-                        <a:buNone/>
-                      </a:pPr>
-                      <a:r>
-                        <a:rPr lang="en" sz="1100"/>
+              <a:tr h="533999">
+                <a:tc>
+                  <a:txBody>
+                    <a:bodyPr/>
+                    <a:lstStyle/>
+                    <a:p>
+                      <a:pPr marL="0" lvl="0" indent="0" algn="ctr" rtl="0">
+                        <a:spcBef>
+                          <a:spcPts val="0"/>
+                        </a:spcBef>
+                        <a:spcAft>
+                          <a:spcPts val="0"/>
+                        </a:spcAft>
+                        <a:buNone/>
+                      </a:pPr>
+                      <a:r>
+                        <a:rPr lang="en" sz="1100" dirty="0"/>
                         <a:t>Coding</a:t>
                       </a:r>
-                      <a:endParaRPr sz="1100"/>
-                    </a:p>
-                  </a:txBody>
-                  <a:tcPr marL="91425" marR="91425" marT="91425" marB="91425" anchor="ctr">
-                    <a:solidFill>
-                      <a:schemeClr val="bg1"/>
-                    </a:solidFill>
-                  </a:tcPr>
-                </a:tc>
-                <a:tc>
-                  <a:txBody>
-                    <a:bodyPr/>
-                    <a:lstStyle/>
-                    <a:p>
-                      <a:pPr marL="0" lvl="0" indent="0" algn="ctr" rtl="0">
-                        <a:spcBef>
-                          <a:spcPts val="0"/>
-                        </a:spcBef>
-                        <a:spcAft>
-                          <a:spcPts val="0"/>
-                        </a:spcAft>
-                        <a:buNone/>
-                      </a:pPr>
-                      <a:r>
-                        <a:rPr lang="en" sz="1000"/>
-                        <a:t>27/8/2022</a:t>
-                      </a:r>
-                      <a:endParaRPr/>
+                      <a:endParaRPr sz="1100" dirty="0"/>
+                    </a:p>
+                  </a:txBody>
+                  <a:tcPr marL="91425" marR="91425" marT="91425" marB="91425" anchor="ctr">
+                    <a:solidFill>
+                      <a:schemeClr val="bg1"/>
+                    </a:solidFill>
+                  </a:tcPr>
+                </a:tc>
+                <a:tc>
+                  <a:txBody>
+                    <a:bodyPr/>
+                    <a:lstStyle/>
+                    <a:p>
+                      <a:pPr marL="0" lvl="0" indent="0" algn="ctr" rtl="0">
+                        <a:spcBef>
+                          <a:spcPts val="0"/>
+                        </a:spcBef>
+                        <a:spcAft>
+                          <a:spcPts val="0"/>
+                        </a:spcAft>
+                        <a:buNone/>
+                      </a:pPr>
+                      <a:r>
+                        <a:rPr lang="en" sz="1000" dirty="0"/>
+                        <a:t>29/8/2022</a:t>
+                      </a:r>
+                      <a:endParaRPr dirty="0"/>
                     </a:p>
                   </a:txBody>
                   <a:tcPr marL="91425" marR="91425" marT="91425" marB="91425" anchor="ctr">
@@ -6663,7 +6810,7 @@
                   </a:ext>
                 </a:extLst>
               </a:tr>
-              <a:tr h="394318">
+              <a:tr h="444991">
                 <a:tc gridSpan="13">
                   <a:txBody>
                     <a:bodyPr/>
@@ -6817,53 +6964,61 @@
                   </a:ext>
                 </a:extLst>
               </a:tr>
-              <a:tr h="536285">
-                <a:tc>
-                  <a:txBody>
-                    <a:bodyPr/>
-                    <a:lstStyle/>
-                    <a:p>
-                      <a:pPr marL="0" lvl="0" indent="0" algn="ctr" rtl="0">
-                        <a:spcBef>
-                          <a:spcPts val="0"/>
-                        </a:spcBef>
-                        <a:spcAft>
-                          <a:spcPts val="0"/>
-                        </a:spcAft>
-                        <a:buNone/>
-                      </a:pPr>
-                      <a:r>
-                        <a:rPr lang="en" sz="1100"/>
-                        <a:t>Data collection </a:t>
-                      </a:r>
-                      <a:endParaRPr sz="1100"/>
-                    </a:p>
-                  </a:txBody>
-                  <a:tcPr marL="91425" marR="91425" marT="91425" marB="91425" anchor="ctr">
-                    <a:solidFill>
-                      <a:schemeClr val="bg1"/>
-                    </a:solidFill>
-                  </a:tcPr>
-                </a:tc>
-                <a:tc>
-                  <a:txBody>
-                    <a:bodyPr/>
-                    <a:lstStyle/>
-                    <a:p>
-                      <a:pPr marL="0" lvl="0" indent="0" algn="ctr" rtl="0">
-                        <a:spcBef>
-                          <a:spcPts val="0"/>
-                        </a:spcBef>
-                        <a:spcAft>
-                          <a:spcPts val="0"/>
-                        </a:spcAft>
-                        <a:buNone/>
-                      </a:pPr>
-                      <a:r>
-                        <a:rPr lang="en" sz="1000"/>
-                        <a:t>13/9/2022</a:t>
-                      </a:r>
-                      <a:endParaRPr sz="1000"/>
+              <a:tr h="605203">
+                <a:tc>
+                  <a:txBody>
+                    <a:bodyPr/>
+                    <a:lstStyle/>
+                    <a:p>
+                      <a:pPr marL="0" lvl="0" indent="0" algn="ctr" rtl="0">
+                        <a:spcBef>
+                          <a:spcPts val="0"/>
+                        </a:spcBef>
+                        <a:spcAft>
+                          <a:spcPts val="0"/>
+                        </a:spcAft>
+                        <a:buNone/>
+                      </a:pPr>
+                      <a:r>
+                        <a:rPr lang="en" sz="1100" dirty="0"/>
+                        <a:t>B</a:t>
+                      </a:r>
+                      <a:r>
+                        <a:rPr lang="en-IN" sz="1100" dirty="0"/>
+                        <a:t>u</a:t>
+                      </a:r>
+                      <a:r>
+                        <a:rPr lang="en" sz="1100" dirty="0"/>
+                        <a:t>ild seller gear listing</a:t>
+                      </a:r>
+                      <a:endParaRPr sz="1100" dirty="0"/>
+                    </a:p>
+                  </a:txBody>
+                  <a:tcPr marL="91425" marR="91425" marT="91425" marB="91425" anchor="ctr">
+                    <a:solidFill>
+                      <a:schemeClr val="bg1"/>
+                    </a:solidFill>
+                  </a:tcPr>
+                </a:tc>
+                <a:tc>
+                  <a:txBody>
+                    <a:bodyPr/>
+                    <a:lstStyle/>
+                    <a:p>
+                      <a:pPr marL="0" lvl="0" indent="0" algn="ctr" rtl="0">
+                        <a:spcBef>
+                          <a:spcPts val="0"/>
+                        </a:spcBef>
+                        <a:spcAft>
+                          <a:spcPts val="0"/>
+                        </a:spcAft>
+                        <a:buNone/>
+                      </a:pPr>
+                      <a:r>
+                        <a:rPr lang="en" sz="1000" dirty="0"/>
+                        <a:t>2/9/2022</a:t>
+                      </a:r>
+                      <a:endParaRPr sz="1000" dirty="0"/>
                     </a:p>
                   </a:txBody>
                   <a:tcPr marL="91425" marR="91425" marT="91425" marB="91425" anchor="ctr">
@@ -7175,7 +7330,7 @@
                   </a:ext>
                 </a:extLst>
               </a:tr>
-              <a:tr h="631376">
+              <a:tr h="712514">
                 <a:tc>
                   <a:txBody>
                     <a:bodyPr/>
@@ -7218,10 +7373,10 @@
                         <a:buNone/>
                       </a:pPr>
                       <a:r>
-                        <a:rPr lang="en" sz="1000"/>
-                        <a:t>29/9/2022</a:t>
-                      </a:r>
-                      <a:endParaRPr/>
+                        <a:rPr lang="en" sz="1000" dirty="0"/>
+                        <a:t>9/9/2022</a:t>
+                      </a:r>
+                      <a:endParaRPr dirty="0"/>
                     </a:p>
                   </a:txBody>
                   <a:tcPr marL="91425" marR="91425" marT="91425" marB="91425" anchor="ctr">
@@ -7537,35 +7692,6 @@
           </a:graphicData>
         </a:graphic>
       </p:graphicFrame>
-      <p:sp>
-        <p:nvSpPr>
-          <p:cNvPr id="7" name="TextBox 6"/>
-          <p:cNvSpPr txBox="1"/>
-          <p:nvPr/>
-        </p:nvSpPr>
-        <p:spPr>
-          <a:xfrm>
-            <a:off x="609600" y="5596835"/>
-            <a:ext cx="7848600" cy="369332"/>
-          </a:xfrm>
-          <a:prstGeom prst="rect">
-            <a:avLst/>
-          </a:prstGeom>
-          <a:noFill/>
-        </p:spPr>
-        <p:txBody>
-          <a:bodyPr wrap="square" rtlCol="0">
-            <a:spAutoFit/>
-          </a:bodyPr>
-          <a:lstStyle/>
-          <a:p>
-            <a:r>
-              <a:rPr lang="en-US" dirty="0"/>
-              <a:t>The table given above is for reference only. Update/create a table with your data. </a:t>
-            </a:r>
-          </a:p>
-        </p:txBody>
-      </p:sp>
     </p:spTree>
   </p:cSld>
   <p:clrMapOvr>
@@ -7628,7 +7754,7 @@
           <a:bodyPr/>
           <a:lstStyle/>
           <a:p>
-            <a:endParaRPr lang="en-US"/>
+            <a:endParaRPr lang="en-US" dirty="0"/>
           </a:p>
         </p:txBody>
       </p:sp>
@@ -7679,35 +7805,6 @@
           </a:p>
         </p:txBody>
       </p:sp>
-      <p:sp>
-        <p:nvSpPr>
-          <p:cNvPr id="7" name="TextBox 6"/>
-          <p:cNvSpPr txBox="1"/>
-          <p:nvPr/>
-        </p:nvSpPr>
-        <p:spPr>
-          <a:xfrm>
-            <a:off x="609600" y="5650468"/>
-            <a:ext cx="7848600" cy="369332"/>
-          </a:xfrm>
-          <a:prstGeom prst="rect">
-            <a:avLst/>
-          </a:prstGeom>
-          <a:noFill/>
-        </p:spPr>
-        <p:txBody>
-          <a:bodyPr wrap="square" rtlCol="0">
-            <a:spAutoFit/>
-          </a:bodyPr>
-          <a:lstStyle/>
-          <a:p>
-            <a:r>
-              <a:rPr lang="en-US" dirty="0"/>
-              <a:t>The table given above is for reference only. Update/create a table with your data. </a:t>
-            </a:r>
-          </a:p>
-        </p:txBody>
-      </p:sp>
       <p:graphicFrame>
         <p:nvGraphicFramePr>
           <p:cNvPr id="8" name="Google Shape;417;p33"/>
@@ -7715,14 +7812,14 @@
           <p:nvPr>
             <p:extLst>
               <p:ext uri="{D42A27DB-BD31-4B8C-83A1-F6EECF244321}">
-                <p14:modId xmlns:p14="http://schemas.microsoft.com/office/powerpoint/2010/main" val="3902094266"/>
+                <p14:modId xmlns:p14="http://schemas.microsoft.com/office/powerpoint/2010/main" val="3483623322"/>
               </p:ext>
             </p:extLst>
           </p:nvPr>
         </p:nvGraphicFramePr>
         <p:xfrm>
-          <a:off x="457199" y="1241610"/>
-          <a:ext cx="8229603" cy="4374627"/>
+          <a:off x="457200" y="1241611"/>
+          <a:ext cx="8229603" cy="4884553"/>
         </p:xfrm>
         <a:graphic>
           <a:graphicData uri="http://schemas.openxmlformats.org/drawingml/2006/table">
@@ -7823,7 +7920,7 @@
                   </a:extLst>
                 </a:gridCol>
               </a:tblGrid>
-              <a:tr h="939354">
+              <a:tr h="1037342">
                 <a:tc>
                   <a:txBody>
                     <a:bodyPr/>
@@ -7840,7 +7937,7 @@
                       </a:pPr>
                       <a:r>
                         <a:rPr lang="en" sz="1200" b="1" dirty="0"/>
-                        <a:t>Backlog tem </a:t>
+                        <a:t>Backlog item </a:t>
                       </a:r>
                       <a:endParaRPr sz="1200" b="1" dirty="0"/>
                     </a:p>
@@ -8401,7 +8498,7 @@
                   </a:ext>
                 </a:extLst>
               </a:tr>
-              <a:tr h="392623">
+              <a:tr h="433580">
                 <a:tc gridSpan="13">
                   <a:txBody>
                     <a:bodyPr/>
@@ -8555,24 +8652,28 @@
                   </a:ext>
                 </a:extLst>
               </a:tr>
-              <a:tr h="583699">
-                <a:tc>
-                  <a:txBody>
-                    <a:bodyPr/>
-                    <a:lstStyle/>
-                    <a:p>
-                      <a:pPr marL="0" lvl="0" indent="0" algn="ctr" rtl="0">
-                        <a:spcBef>
-                          <a:spcPts val="0"/>
-                        </a:spcBef>
-                        <a:spcAft>
-                          <a:spcPts val="0"/>
-                        </a:spcAft>
-                        <a:buNone/>
-                      </a:pPr>
+              <a:tr h="698175">
+                <a:tc>
+                  <a:txBody>
+                    <a:bodyPr/>
+                    <a:lstStyle/>
+                    <a:p>
+                      <a:pPr marL="0" lvl="0" indent="0" algn="ctr" rtl="0">
+                        <a:spcBef>
+                          <a:spcPts val="0"/>
+                        </a:spcBef>
+                        <a:spcAft>
+                          <a:spcPts val="0"/>
+                        </a:spcAft>
+                        <a:buNone/>
+                      </a:pPr>
+                      <a:r>
+                        <a:rPr lang="en-IN" sz="1100" dirty="0"/>
+                        <a:t>I</a:t>
+                      </a:r>
                       <a:r>
                         <a:rPr lang="en" sz="1100" dirty="0"/>
-                        <a:t>Course contents</a:t>
+                        <a:t>mplement buyer checkout </a:t>
                       </a:r>
                       <a:endParaRPr sz="1100" dirty="0"/>
                     </a:p>
@@ -8599,7 +8700,7 @@
                       </a:pPr>
                       <a:r>
                         <a:rPr lang="en" sz="1000" dirty="0"/>
-                        <a:t>3/10/2022</a:t>
+                        <a:t>16/9/2022</a:t>
                       </a:r>
                       <a:endParaRPr sz="1000" dirty="0"/>
                     </a:p>
@@ -8913,26 +9014,26 @@
                   </a:ext>
                 </a:extLst>
               </a:tr>
-              <a:tr h="556852">
-                <a:tc>
-                  <a:txBody>
-                    <a:bodyPr/>
-                    <a:lstStyle/>
-                    <a:p>
-                      <a:pPr marL="0" lvl="0" indent="0" algn="ctr" rtl="0">
-                        <a:spcBef>
-                          <a:spcPts val="0"/>
-                        </a:spcBef>
-                        <a:spcAft>
-                          <a:spcPts val="0"/>
-                        </a:spcAft>
-                        <a:buNone/>
-                      </a:pPr>
-                      <a:r>
-                        <a:rPr lang="en" sz="1100"/>
-                        <a:t>Assassement</a:t>
-                      </a:r>
-                      <a:endParaRPr sz="1100"/>
+              <a:tr h="614940">
+                <a:tc>
+                  <a:txBody>
+                    <a:bodyPr/>
+                    <a:lstStyle/>
+                    <a:p>
+                      <a:pPr marL="0" lvl="0" indent="0" algn="ctr" rtl="0">
+                        <a:spcBef>
+                          <a:spcPts val="0"/>
+                        </a:spcBef>
+                        <a:spcAft>
+                          <a:spcPts val="0"/>
+                        </a:spcAft>
+                        <a:buNone/>
+                      </a:pPr>
+                      <a:r>
+                        <a:rPr lang="en" sz="1100" dirty="0"/>
+                        <a:t>Impliment  connection</a:t>
+                      </a:r>
+                      <a:endParaRPr sz="1100" dirty="0"/>
                     </a:p>
                   </a:txBody>
                   <a:tcPr marL="91425" marR="91425" marT="91425" marB="91425" anchor="ctr">
@@ -8957,7 +9058,7 @@
                       </a:pPr>
                       <a:r>
                         <a:rPr lang="en" sz="1000" dirty="0"/>
-                        <a:t>20/10/2022</a:t>
+                        <a:t>25/9/2022</a:t>
                       </a:r>
                       <a:endParaRPr dirty="0"/>
                     </a:p>
@@ -9271,7 +9372,7 @@
                   </a:ext>
                 </a:extLst>
               </a:tr>
-              <a:tr h="392623">
+              <a:tr h="433580">
                 <a:tc gridSpan="13">
                   <a:txBody>
                     <a:bodyPr/>
@@ -9425,53 +9526,53 @@
                   </a:ext>
                 </a:extLst>
               </a:tr>
-              <a:tr h="556852">
-                <a:tc>
-                  <a:txBody>
-                    <a:bodyPr/>
-                    <a:lstStyle/>
-                    <a:p>
-                      <a:pPr marL="0" lvl="0" indent="0" algn="ctr" rtl="0">
-                        <a:spcBef>
-                          <a:spcPts val="0"/>
-                        </a:spcBef>
-                        <a:spcAft>
-                          <a:spcPts val="0"/>
-                        </a:spcAft>
-                        <a:buNone/>
-                      </a:pPr>
-                      <a:r>
-                        <a:rPr lang="en" sz="1100"/>
-                        <a:t>Certificate</a:t>
-                      </a:r>
-                      <a:endParaRPr sz="1100"/>
-                    </a:p>
-                  </a:txBody>
-                  <a:tcPr marL="91425" marR="91425" marT="91425" marB="91425" anchor="ctr">
-                    <a:solidFill>
-                      <a:schemeClr val="bg1"/>
-                    </a:solidFill>
-                  </a:tcPr>
-                </a:tc>
-                <a:tc>
-                  <a:txBody>
-                    <a:bodyPr/>
-                    <a:lstStyle/>
-                    <a:p>
-                      <a:pPr marL="0" lvl="0" indent="0" algn="ctr" rtl="0">
-                        <a:spcBef>
-                          <a:spcPts val="0"/>
-                        </a:spcBef>
-                        <a:spcAft>
-                          <a:spcPts val="0"/>
-                        </a:spcAft>
-                        <a:buNone/>
-                      </a:pPr>
-                      <a:r>
-                        <a:rPr lang="en" sz="1000"/>
-                        <a:t>8/11/2022</a:t>
-                      </a:r>
-                      <a:endParaRPr sz="1000"/>
+              <a:tr h="614940">
+                <a:tc>
+                  <a:txBody>
+                    <a:bodyPr/>
+                    <a:lstStyle/>
+                    <a:p>
+                      <a:pPr marL="0" lvl="0" indent="0" algn="ctr" rtl="0">
+                        <a:spcBef>
+                          <a:spcPts val="0"/>
+                        </a:spcBef>
+                        <a:spcAft>
+                          <a:spcPts val="0"/>
+                        </a:spcAft>
+                        <a:buNone/>
+                      </a:pPr>
+                      <a:r>
+                        <a:rPr lang="en" sz="1100" dirty="0"/>
+                        <a:t> Admin dashboard</a:t>
+                      </a:r>
+                      <a:endParaRPr sz="1100" dirty="0"/>
+                    </a:p>
+                  </a:txBody>
+                  <a:tcPr marL="91425" marR="91425" marT="91425" marB="91425" anchor="ctr">
+                    <a:solidFill>
+                      <a:schemeClr val="bg1"/>
+                    </a:solidFill>
+                  </a:tcPr>
+                </a:tc>
+                <a:tc>
+                  <a:txBody>
+                    <a:bodyPr/>
+                    <a:lstStyle/>
+                    <a:p>
+                      <a:pPr marL="0" lvl="0" indent="0" algn="ctr" rtl="0">
+                        <a:spcBef>
+                          <a:spcPts val="0"/>
+                        </a:spcBef>
+                        <a:spcAft>
+                          <a:spcPts val="0"/>
+                        </a:spcAft>
+                        <a:buNone/>
+                      </a:pPr>
+                      <a:r>
+                        <a:rPr lang="en" sz="1000" dirty="0"/>
+                        <a:t>3/10/2022</a:t>
+                      </a:r>
+                      <a:endParaRPr sz="1000" dirty="0"/>
                     </a:p>
                   </a:txBody>
                   <a:tcPr marL="91425" marR="91425" marT="91425" marB="91425" anchor="ctr">
@@ -9783,7 +9884,7 @@
                   </a:ext>
                 </a:extLst>
               </a:tr>
-              <a:tr h="476312">
+              <a:tr h="525998">
                 <a:tc>
                   <a:txBody>
                     <a:bodyPr/>
@@ -9827,9 +9928,17 @@
                       </a:pPr>
                       <a:r>
                         <a:rPr lang="en" sz="1000"/>
-                        <a:t>15/11/2022</a:t>
-                      </a:r>
-                      <a:endParaRPr/>
+                        <a:t>1</a:t>
+                      </a:r>
+                      <a:r>
+                        <a:rPr lang="en" sz="1000" dirty="0"/>
+                        <a:t>0</a:t>
+                      </a:r>
+                      <a:r>
+                        <a:rPr lang="en" sz="1000"/>
+                        <a:t>/10/2022</a:t>
+                      </a:r>
+                      <a:endParaRPr dirty="0"/>
                     </a:p>
                   </a:txBody>
                   <a:tcPr marL="91425" marR="91425" marT="91425" marB="91425" anchor="ctr">
@@ -10141,7 +10250,7 @@
                   </a:ext>
                 </a:extLst>
               </a:tr>
-              <a:tr h="476312">
+              <a:tr h="525998">
                 <a:tc>
                   <a:txBody>
                     <a:bodyPr/>
@@ -10183,7 +10292,7 @@
                         </a:spcAft>
                         <a:buNone/>
                       </a:pPr>
-                      <a:endParaRPr sz="1000"/>
+                      <a:endParaRPr sz="1000" dirty="0"/>
                     </a:p>
                   </a:txBody>
                   <a:tcPr marL="91425" marR="91425" marT="91425" marB="91425" anchor="ctr">
@@ -10549,7 +10658,7 @@
           <a:bodyPr/>
           <a:lstStyle/>
           <a:p>
-            <a:endParaRPr lang="en-US"/>
+            <a:endParaRPr lang="en-US" dirty="0"/>
           </a:p>
         </p:txBody>
       </p:sp>
@@ -10607,14 +10716,14 @@
           <p:nvPr>
             <p:extLst>
               <p:ext uri="{D42A27DB-BD31-4B8C-83A1-F6EECF244321}">
-                <p14:modId xmlns:p14="http://schemas.microsoft.com/office/powerpoint/2010/main" val="716020743"/>
+                <p14:modId xmlns:p14="http://schemas.microsoft.com/office/powerpoint/2010/main" val="2608275738"/>
               </p:ext>
             </p:extLst>
           </p:nvPr>
         </p:nvGraphicFramePr>
         <p:xfrm>
-          <a:off x="489375" y="1219200"/>
-          <a:ext cx="8165225" cy="4449900"/>
+          <a:off x="489375" y="1219201"/>
+          <a:ext cx="8197425" cy="4906962"/>
         </p:xfrm>
         <a:graphic>
           <a:graphicData uri="http://schemas.openxmlformats.org/drawingml/2006/table">
@@ -10623,35 +10732,35 @@
                 <a:noFill/>
               </a:tblPr>
               <a:tblGrid>
-                <a:gridCol w="1612450">
+                <a:gridCol w="1618809">
                   <a:extLst>
                     <a:ext uri="{9D8B030D-6E8A-4147-A177-3AD203B41FA5}">
                       <a16:colId xmlns:a16="http://schemas.microsoft.com/office/drawing/2014/main" val="20000"/>
                     </a:ext>
                   </a:extLst>
                 </a:gridCol>
-                <a:gridCol w="1612450">
+                <a:gridCol w="1618809">
                   <a:extLst>
                     <a:ext uri="{9D8B030D-6E8A-4147-A177-3AD203B41FA5}">
                       <a16:colId xmlns:a16="http://schemas.microsoft.com/office/drawing/2014/main" val="20001"/>
                     </a:ext>
                   </a:extLst>
                 </a:gridCol>
-                <a:gridCol w="1612450">
+                <a:gridCol w="1618809">
                   <a:extLst>
                     <a:ext uri="{9D8B030D-6E8A-4147-A177-3AD203B41FA5}">
                       <a16:colId xmlns:a16="http://schemas.microsoft.com/office/drawing/2014/main" val="20002"/>
                     </a:ext>
                   </a:extLst>
                 </a:gridCol>
-                <a:gridCol w="1612450">
+                <a:gridCol w="1618809">
                   <a:extLst>
                     <a:ext uri="{9D8B030D-6E8A-4147-A177-3AD203B41FA5}">
                       <a16:colId xmlns:a16="http://schemas.microsoft.com/office/drawing/2014/main" val="20003"/>
                     </a:ext>
                   </a:extLst>
                 </a:gridCol>
-                <a:gridCol w="1715425">
+                <a:gridCol w="1722189">
                   <a:extLst>
                     <a:ext uri="{9D8B030D-6E8A-4147-A177-3AD203B41FA5}">
                       <a16:colId xmlns:a16="http://schemas.microsoft.com/office/drawing/2014/main" val="20004"/>
@@ -10659,7 +10768,7 @@
                   </a:extLst>
                 </a:gridCol>
               </a:tblGrid>
-              <a:tr h="723975">
+              <a:tr h="975975">
                 <a:tc>
                   <a:txBody>
                     <a:bodyPr/>
@@ -10859,7 +10968,7 @@
                   </a:ext>
                 </a:extLst>
               </a:tr>
-              <a:tr h="426575">
+              <a:tr h="563047">
                 <a:tc>
                   <a:txBody>
                     <a:bodyPr/>
@@ -10984,7 +11093,7 @@
                       </a:pPr>
                       <a:r>
                         <a:rPr lang="en" dirty="0"/>
-                        <a:t>COMPLETED</a:t>
+                        <a:t>PLANNED</a:t>
                       </a:r>
                       <a:endParaRPr dirty="0"/>
                     </a:p>
@@ -11001,7 +11110,7 @@
                   </a:ext>
                 </a:extLst>
               </a:tr>
-              <a:tr h="426575">
+              <a:tr h="563047">
                 <a:tc>
                   <a:txBody>
                     <a:bodyPr/>
@@ -11126,7 +11235,7 @@
                       </a:pPr>
                       <a:r>
                         <a:rPr lang="en" dirty="0"/>
-                        <a:t>COMPLETED</a:t>
+                        <a:t>PLANNED</a:t>
                       </a:r>
                       <a:endParaRPr dirty="0"/>
                     </a:p>
@@ -11143,7 +11252,7 @@
                   </a:ext>
                 </a:extLst>
               </a:tr>
-              <a:tr h="814475">
+              <a:tr h="1003101">
                 <a:tc>
                   <a:txBody>
                     <a:bodyPr/>
@@ -11186,24 +11295,8 @@
                         <a:buNone/>
                       </a:pPr>
                       <a:r>
-                        <a:rPr lang="en" dirty="0"/>
-                        <a:t>CRUD(Course,Student,University)</a:t>
-                      </a:r>
-                      <a:endParaRPr dirty="0"/>
-                    </a:p>
-                    <a:p>
-                      <a:pPr marL="0" lvl="0" indent="0" algn="ctr" rtl="0">
-                        <a:spcBef>
-                          <a:spcPts val="0"/>
-                        </a:spcBef>
-                        <a:spcAft>
-                          <a:spcPts val="0"/>
-                        </a:spcAft>
-                        <a:buNone/>
-                      </a:pPr>
-                      <a:r>
-                        <a:rPr lang="en" dirty="0"/>
-                        <a:t>OPERATIONS</a:t>
+                        <a:rPr lang="en-IN" dirty="0"/>
+                        <a:t>MARTIAL MART</a:t>
                       </a:r>
                       <a:endParaRPr dirty="0"/>
                     </a:p>
@@ -11284,7 +11377,7 @@
                       </a:pPr>
                       <a:r>
                         <a:rPr lang="en" dirty="0"/>
-                        <a:t>COMPLETED</a:t>
+                        <a:t>PLANNED</a:t>
                       </a:r>
                       <a:endParaRPr dirty="0"/>
                     </a:p>
@@ -11301,7 +11394,7 @@
                   </a:ext>
                 </a:extLst>
               </a:tr>
-              <a:tr h="603325">
+              <a:tr h="900896">
                 <a:tc>
                   <a:txBody>
                     <a:bodyPr/>
@@ -11344,35 +11437,35 @@
                         <a:buNone/>
                       </a:pPr>
                       <a:r>
-                        <a:rPr lang="en"/>
-                        <a:t>STUDENT ENROLLMENT</a:t>
-                      </a:r>
-                      <a:endParaRPr/>
-                    </a:p>
-                  </a:txBody>
-                  <a:tcPr marL="91425" marR="91425" marT="91425" marB="91425" anchor="ctr">
-                    <a:solidFill>
-                      <a:schemeClr val="bg1"/>
-                    </a:solidFill>
-                  </a:tcPr>
-                </a:tc>
-                <a:tc>
-                  <a:txBody>
-                    <a:bodyPr/>
-                    <a:lstStyle/>
-                    <a:p>
-                      <a:pPr marL="0" lvl="0" indent="0" algn="ctr" rtl="0">
-                        <a:spcBef>
-                          <a:spcPts val="0"/>
-                        </a:spcBef>
-                        <a:spcAft>
-                          <a:spcPts val="0"/>
-                        </a:spcAft>
-                        <a:buNone/>
-                      </a:pPr>
-                      <a:r>
                         <a:rPr lang="en" dirty="0"/>
-                        <a:t>High</a:t>
+                        <a:t>MARTIAL CONNECT</a:t>
+                      </a:r>
+                      <a:endParaRPr dirty="0"/>
+                    </a:p>
+                  </a:txBody>
+                  <a:tcPr marL="91425" marR="91425" marT="91425" marB="91425" anchor="ctr">
+                    <a:solidFill>
+                      <a:schemeClr val="bg1"/>
+                    </a:solidFill>
+                  </a:tcPr>
+                </a:tc>
+                <a:tc>
+                  <a:txBody>
+                    <a:bodyPr/>
+                    <a:lstStyle/>
+                    <a:p>
+                      <a:pPr marL="0" lvl="0" indent="0" algn="ctr" rtl="0">
+                        <a:spcBef>
+                          <a:spcPts val="0"/>
+                        </a:spcBef>
+                        <a:spcAft>
+                          <a:spcPts val="0"/>
+                        </a:spcAft>
+                        <a:buNone/>
+                      </a:pPr>
+                      <a:r>
+                        <a:rPr lang="en" dirty="0"/>
+                        <a:t>Medium</a:t>
                       </a:r>
                       <a:endParaRPr dirty="0"/>
                     </a:p>
@@ -11426,7 +11519,7 @@
                       </a:pPr>
                       <a:r>
                         <a:rPr lang="en" dirty="0"/>
-                        <a:t>COMPLETED</a:t>
+                        <a:t>PLANNED</a:t>
                       </a:r>
                       <a:endParaRPr dirty="0"/>
                     </a:p>
@@ -11443,7 +11536,7 @@
                   </a:ext>
                 </a:extLst>
               </a:tr>
-              <a:tr h="603325">
+              <a:tr h="900896">
                 <a:tc>
                   <a:txBody>
                     <a:bodyPr/>
@@ -11466,33 +11559,15 @@
                     </a:p>
                   </a:txBody>
                   <a:tcPr marL="91425" marR="91425" marT="91425" marB="91425" anchor="ctr">
-                    <a:solidFill>
-                      <a:schemeClr val="bg1"/>
-                    </a:solidFill>
-                  </a:tcPr>
-                </a:tc>
-                <a:tc>
-                  <a:txBody>
-                    <a:bodyPr/>
-                    <a:lstStyle/>
-                    <a:p>
-                      <a:pPr marL="0" lvl="0" indent="0" algn="ctr" rtl="0">
-                        <a:spcBef>
-                          <a:spcPts val="0"/>
-                        </a:spcBef>
-                        <a:spcAft>
-                          <a:spcPts val="0"/>
-                        </a:spcAft>
-                        <a:buNone/>
-                      </a:pPr>
-                      <a:r>
-                        <a:rPr lang="en"/>
-                        <a:t>CERTIFICATE GENERATION</a:t>
-                      </a:r>
-                      <a:endParaRPr/>
-                    </a:p>
-                  </a:txBody>
-                  <a:tcPr marL="91425" marR="91425" marT="91425" marB="91425" anchor="ctr">
+                    <a:lnB w="12700" cap="flat" cmpd="sng" algn="ctr">
+                      <a:solidFill>
+                        <a:schemeClr val="tx1"/>
+                      </a:solidFill>
+                      <a:prstDash val="solid"/>
+                      <a:round/>
+                      <a:headEnd type="none" w="med" len="med"/>
+                      <a:tailEnd type="none" w="med" len="med"/>
+                    </a:lnB>
                     <a:solidFill>
                       <a:schemeClr val="bg1"/>
                     </a:solidFill>
@@ -11514,7 +11589,43 @@
                       </a:pPr>
                       <a:r>
                         <a:rPr lang="en" dirty="0"/>
-                        <a:t>MEDIUM</a:t>
+                        <a:t>MARTIAL TRACK</a:t>
+                      </a:r>
+                      <a:endParaRPr dirty="0"/>
+                    </a:p>
+                  </a:txBody>
+                  <a:tcPr marL="91425" marR="91425" marT="91425" marB="91425" anchor="ctr">
+                    <a:lnB w="12700" cap="flat" cmpd="sng" algn="ctr">
+                      <a:solidFill>
+                        <a:schemeClr val="tx1"/>
+                      </a:solidFill>
+                      <a:prstDash val="solid"/>
+                      <a:round/>
+                      <a:headEnd type="none" w="med" len="med"/>
+                      <a:tailEnd type="none" w="med" len="med"/>
+                    </a:lnB>
+                    <a:solidFill>
+                      <a:schemeClr val="bg1"/>
+                    </a:solidFill>
+                  </a:tcPr>
+                </a:tc>
+                <a:tc>
+                  <a:txBody>
+                    <a:bodyPr/>
+                    <a:lstStyle/>
+                    <a:p>
+                      <a:pPr marL="0" lvl="0" indent="0" algn="ctr" rtl="0">
+                        <a:spcBef>
+                          <a:spcPts val="0"/>
+                        </a:spcBef>
+                        <a:spcAft>
+                          <a:spcPts val="0"/>
+                        </a:spcAft>
+                        <a:buNone/>
+                      </a:pPr>
+                      <a:r>
+                        <a:rPr lang="en" dirty="0"/>
+                        <a:t>Low</a:t>
                       </a:r>
                       <a:endParaRPr dirty="0"/>
                     </a:p>
@@ -11568,9 +11679,8 @@
                       </a:pPr>
                       <a:r>
                         <a:rPr lang="en" dirty="0"/>
-                        <a:t>COMPLETED</a:t>
-                      </a:r>
-                      <a:endParaRPr dirty="0"/>
+                        <a:t>PLANNED</a:t>
+                      </a:r>
                     </a:p>
                   </a:txBody>
                   <a:tcPr marL="91425" marR="91425" marT="91425" marB="91425" anchor="ctr">
@@ -11589,35 +11699,6 @@
           </a:graphicData>
         </a:graphic>
       </p:graphicFrame>
-      <p:sp>
-        <p:nvSpPr>
-          <p:cNvPr id="7" name="TextBox 6"/>
-          <p:cNvSpPr txBox="1"/>
-          <p:nvPr/>
-        </p:nvSpPr>
-        <p:spPr>
-          <a:xfrm>
-            <a:off x="609600" y="5726668"/>
-            <a:ext cx="7848600" cy="369332"/>
-          </a:xfrm>
-          <a:prstGeom prst="rect">
-            <a:avLst/>
-          </a:prstGeom>
-          <a:noFill/>
-        </p:spPr>
-        <p:txBody>
-          <a:bodyPr wrap="square" rtlCol="0">
-            <a:spAutoFit/>
-          </a:bodyPr>
-          <a:lstStyle/>
-          <a:p>
-            <a:r>
-              <a:rPr lang="en-US" dirty="0"/>
-              <a:t>The table given above is for reference only. Update/create a table with your data. </a:t>
-            </a:r>
-          </a:p>
-        </p:txBody>
-      </p:sp>
     </p:spTree>
     <p:extLst>
       <p:ext uri="{BB962C8B-B14F-4D97-AF65-F5344CB8AC3E}">
@@ -11636,7 +11717,13 @@
   <p:cSld>
     <p:spTree>
       <p:nvGrpSpPr>
-        <p:cNvPr id="1" name=""/>
+        <p:cNvPr id="1" name="">
+          <a:extLst>
+            <a:ext uri="{FF2B5EF4-FFF2-40B4-BE49-F238E27FC236}">
+              <a16:creationId xmlns:a16="http://schemas.microsoft.com/office/drawing/2014/main" id="{E4655CDE-9157-D5F6-748E-3C7A47B6A6C7}"/>
+            </a:ext>
+          </a:extLst>
+        </p:cNvPr>
         <p:cNvGrpSpPr/>
         <p:nvPr/>
       </p:nvGrpSpPr>
@@ -11650,7 +11737,13 @@
       </p:grpSpPr>
       <p:sp>
         <p:nvSpPr>
-          <p:cNvPr id="2" name="Title 1"/>
+          <p:cNvPr id="2" name="Title 1">
+            <a:extLst>
+              <a:ext uri="{FF2B5EF4-FFF2-40B4-BE49-F238E27FC236}">
+                <a16:creationId xmlns:a16="http://schemas.microsoft.com/office/drawing/2014/main" id="{DF923810-CD3B-6124-FF39-5ABCA1D78139}"/>
+              </a:ext>
+            </a:extLst>
+          </p:cNvPr>
           <p:cNvSpPr>
             <a:spLocks noGrp="1"/>
           </p:cNvSpPr>
@@ -11672,7 +11765,13 @@
       </p:sp>
       <p:sp>
         <p:nvSpPr>
-          <p:cNvPr id="3" name="Content Placeholder 2"/>
+          <p:cNvPr id="3" name="Content Placeholder 2">
+            <a:extLst>
+              <a:ext uri="{FF2B5EF4-FFF2-40B4-BE49-F238E27FC236}">
+                <a16:creationId xmlns:a16="http://schemas.microsoft.com/office/drawing/2014/main" id="{FBA63651-4FB3-F0DE-BABA-3938BE5A1151}"/>
+              </a:ext>
+            </a:extLst>
+          </p:cNvPr>
           <p:cNvSpPr>
             <a:spLocks noGrp="1"/>
           </p:cNvSpPr>
@@ -11691,7 +11790,13 @@
       </p:sp>
       <p:sp>
         <p:nvSpPr>
-          <p:cNvPr id="4" name="Footer Placeholder 3"/>
+          <p:cNvPr id="4" name="Footer Placeholder 3">
+            <a:extLst>
+              <a:ext uri="{FF2B5EF4-FFF2-40B4-BE49-F238E27FC236}">
+                <a16:creationId xmlns:a16="http://schemas.microsoft.com/office/drawing/2014/main" id="{D4792B25-967C-FBCF-C90F-7EBD2B7958A8}"/>
+              </a:ext>
+            </a:extLst>
+          </p:cNvPr>
           <p:cNvSpPr>
             <a:spLocks noGrp="1"/>
           </p:cNvSpPr>
@@ -11714,7 +11819,13 @@
       </p:sp>
       <p:sp>
         <p:nvSpPr>
-          <p:cNvPr id="5" name="Slide Number Placeholder 4"/>
+          <p:cNvPr id="5" name="Slide Number Placeholder 4">
+            <a:extLst>
+              <a:ext uri="{FF2B5EF4-FFF2-40B4-BE49-F238E27FC236}">
+                <a16:creationId xmlns:a16="http://schemas.microsoft.com/office/drawing/2014/main" id="{08EDF25C-266B-F46F-33EE-B1A548D63CB9}"/>
+              </a:ext>
+            </a:extLst>
+          </p:cNvPr>
           <p:cNvSpPr>
             <a:spLocks noGrp="1"/>
           </p:cNvSpPr>
@@ -11738,19 +11849,25 @@
       </p:sp>
       <p:graphicFrame>
         <p:nvGraphicFramePr>
-          <p:cNvPr id="6" name="Google Shape;381;p28"/>
+          <p:cNvPr id="6" name="Google Shape;381;p28">
+            <a:extLst>
+              <a:ext uri="{FF2B5EF4-FFF2-40B4-BE49-F238E27FC236}">
+                <a16:creationId xmlns:a16="http://schemas.microsoft.com/office/drawing/2014/main" id="{DD2FA8DD-C248-AF60-BB00-B7B48C45E000}"/>
+              </a:ext>
+            </a:extLst>
+          </p:cNvPr>
           <p:cNvGraphicFramePr/>
           <p:nvPr>
             <p:extLst>
               <p:ext uri="{D42A27DB-BD31-4B8C-83A1-F6EECF244321}">
-                <p14:modId xmlns:p14="http://schemas.microsoft.com/office/powerpoint/2010/main" val="4059172709"/>
+                <p14:modId xmlns:p14="http://schemas.microsoft.com/office/powerpoint/2010/main" val="248500749"/>
               </p:ext>
             </p:extLst>
           </p:nvPr>
         </p:nvGraphicFramePr>
         <p:xfrm>
-          <a:off x="515964" y="1247240"/>
-          <a:ext cx="8143125" cy="4330265"/>
+          <a:off x="515964" y="1177232"/>
+          <a:ext cx="8229600" cy="4948930"/>
         </p:xfrm>
         <a:graphic>
           <a:graphicData uri="http://schemas.openxmlformats.org/drawingml/2006/table">
@@ -11759,28 +11876,28 @@
                 <a:noFill/>
               </a:tblPr>
               <a:tblGrid>
-                <a:gridCol w="1828770">
+                <a:gridCol w="1848190">
                   <a:extLst>
                     <a:ext uri="{9D8B030D-6E8A-4147-A177-3AD203B41FA5}">
                       <a16:colId xmlns:a16="http://schemas.microsoft.com/office/drawing/2014/main" val="20000"/>
                     </a:ext>
                   </a:extLst>
                 </a:gridCol>
-                <a:gridCol w="1964497">
+                <a:gridCol w="1985359">
                   <a:extLst>
                     <a:ext uri="{9D8B030D-6E8A-4147-A177-3AD203B41FA5}">
                       <a16:colId xmlns:a16="http://schemas.microsoft.com/office/drawing/2014/main" val="20001"/>
                     </a:ext>
                   </a:extLst>
                 </a:gridCol>
-                <a:gridCol w="1797278">
+                <a:gridCol w="1816364">
                   <a:extLst>
                     <a:ext uri="{9D8B030D-6E8A-4147-A177-3AD203B41FA5}">
                       <a16:colId xmlns:a16="http://schemas.microsoft.com/office/drawing/2014/main" val="20002"/>
                     </a:ext>
                   </a:extLst>
                 </a:gridCol>
-                <a:gridCol w="2552580">
+                <a:gridCol w="2579687">
                   <a:extLst>
                     <a:ext uri="{9D8B030D-6E8A-4147-A177-3AD203B41FA5}">
                       <a16:colId xmlns:a16="http://schemas.microsoft.com/office/drawing/2014/main" val="20003"/>
@@ -11788,7 +11905,7 @@
                   </a:extLst>
                 </a:gridCol>
               </a:tblGrid>
-              <a:tr h="566400">
+              <a:tr h="713491">
                 <a:tc>
                   <a:txBody>
                     <a:bodyPr/>
@@ -11935,7 +12052,7 @@
                   </a:ext>
                 </a:extLst>
               </a:tr>
-              <a:tr h="618750">
+              <a:tr h="713491">
                 <a:tc>
                   <a:txBody>
                     <a:bodyPr/>
@@ -12068,7 +12185,7 @@
                   </a:ext>
                 </a:extLst>
               </a:tr>
-              <a:tr h="688875">
+              <a:tr h="522058">
                 <a:tc>
                   <a:txBody>
                     <a:bodyPr/>
@@ -12138,63 +12255,37 @@
                         <a:buNone/>
                       </a:pPr>
                       <a:r>
-                        <a:rPr lang="en" sz="1800" kern="1200" dirty="0">
-                          <a:solidFill>
-                            <a:schemeClr val="tx1"/>
-                          </a:solidFill>
-                          <a:latin typeface="+mn-lt"/>
-                          <a:ea typeface="+mn-ea"/>
-                          <a:cs typeface="+mn-cs"/>
-                        </a:rPr>
-                        <a:t>View and Manage</a:t>
-                      </a:r>
-                      <a:endParaRPr sz="1800" kern="1200" dirty="0">
-                        <a:solidFill>
-                          <a:schemeClr val="tx1"/>
-                        </a:solidFill>
-                        <a:latin typeface="+mn-lt"/>
-                        <a:ea typeface="+mn-ea"/>
-                        <a:cs typeface="+mn-cs"/>
-                      </a:endParaRPr>
-                    </a:p>
-                  </a:txBody>
-                  <a:tcPr marL="91425" marR="91425" marT="91425" marB="91425" anchor="ctr">
-                    <a:solidFill>
-                      <a:schemeClr val="bg1"/>
-                    </a:solidFill>
-                  </a:tcPr>
-                </a:tc>
-                <a:tc>
-                  <a:txBody>
-                    <a:bodyPr/>
-                    <a:lstStyle/>
-                    <a:p>
-                      <a:pPr marL="0" lvl="0" indent="0" algn="ctr" rtl="0">
-                        <a:spcBef>
-                          <a:spcPts val="0"/>
-                        </a:spcBef>
-                        <a:spcAft>
-                          <a:spcPts val="0"/>
-                        </a:spcAft>
-                        <a:buNone/>
-                      </a:pPr>
-                      <a:r>
-                        <a:rPr lang="en" sz="1100"/>
-                        <a:t>Can view and Manage registered users,Faculties and Universities</a:t>
-                      </a:r>
-                      <a:endParaRPr sz="1100"/>
-                    </a:p>
-                    <a:p>
-                      <a:pPr marL="0" lvl="0" indent="0" algn="ctr" rtl="0">
-                        <a:spcBef>
-                          <a:spcPts val="0"/>
-                        </a:spcBef>
-                        <a:spcAft>
-                          <a:spcPts val="0"/>
-                        </a:spcAft>
-                        <a:buNone/>
-                      </a:pPr>
-                      <a:endParaRPr sz="1100"/>
+                        <a:rPr lang="en-IN" dirty="0"/>
+                        <a:t>Upload contents</a:t>
+                      </a:r>
+                      <a:endParaRPr dirty="0"/>
+                    </a:p>
+                  </a:txBody>
+                  <a:tcPr marL="91425" marR="91425" marT="91425" marB="91425" anchor="ctr">
+                    <a:solidFill>
+                      <a:schemeClr val="bg1"/>
+                    </a:solidFill>
+                  </a:tcPr>
+                </a:tc>
+                <a:tc>
+                  <a:txBody>
+                    <a:bodyPr/>
+                    <a:lstStyle/>
+                    <a:p>
+                      <a:pPr marL="0" lvl="0" indent="0" algn="ctr" rtl="0">
+                        <a:spcBef>
+                          <a:spcPts val="0"/>
+                        </a:spcBef>
+                        <a:spcAft>
+                          <a:spcPts val="0"/>
+                        </a:spcAft>
+                        <a:buNone/>
+                      </a:pPr>
+                      <a:r>
+                        <a:rPr lang="en-IN" sz="1100" dirty="0"/>
+                        <a:t>Make item available in the system</a:t>
+                      </a:r>
+                      <a:endParaRPr sz="1100" dirty="0"/>
                     </a:p>
                   </a:txBody>
                   <a:tcPr marL="91425" marR="91425" marT="91425" marB="91425" anchor="ctr">
@@ -12209,7 +12300,7 @@
                   </a:ext>
                 </a:extLst>
               </a:tr>
-              <a:tr h="398000">
+              <a:tr h="835313">
                 <a:tc>
                   <a:txBody>
                     <a:bodyPr/>
@@ -12279,8 +12370,8 @@
                         <a:buNone/>
                       </a:pPr>
                       <a:r>
-                        <a:rPr lang="en" dirty="0"/>
-                        <a:t>Verification</a:t>
+                        <a:rPr lang="en-IN" dirty="0"/>
+                        <a:t>View and manage</a:t>
                       </a:r>
                       <a:endParaRPr dirty="0"/>
                     </a:p>
@@ -12306,10 +12397,10 @@
                         <a:buNone/>
                       </a:pPr>
                       <a:r>
-                        <a:rPr lang="en" sz="1100"/>
-                        <a:t>Verify Courses</a:t>
-                      </a:r>
-                      <a:endParaRPr sz="1100"/>
+                        <a:rPr lang="en-IN" sz="1100" dirty="0"/>
+                        <a:t>View contents and manage users</a:t>
+                      </a:r>
+                      <a:endParaRPr sz="1100" dirty="0"/>
                     </a:p>
                   </a:txBody>
                   <a:tcPr marL="91425" marR="91425" marT="91425" marB="91425" anchor="ctr">
@@ -12324,53 +12415,26 @@
                   </a:ext>
                 </a:extLst>
               </a:tr>
-              <a:tr h="398000">
-                <a:tc>
-                  <a:txBody>
-                    <a:bodyPr/>
-                    <a:lstStyle/>
-                    <a:p>
-                      <a:pPr marL="0" lvl="0" indent="0" algn="ctr" rtl="0">
-                        <a:spcBef>
-                          <a:spcPts val="0"/>
-                        </a:spcBef>
-                        <a:spcAft>
-                          <a:spcPts val="0"/>
-                        </a:spcAft>
-                        <a:buNone/>
-                      </a:pPr>
-                      <a:r>
-                        <a:rPr lang="en"/>
+              <a:tr h="522058">
+                <a:tc>
+                  <a:txBody>
+                    <a:bodyPr/>
+                    <a:lstStyle/>
+                    <a:p>
+                      <a:pPr marL="0" lvl="0" indent="0" algn="ctr" rtl="0">
+                        <a:spcBef>
+                          <a:spcPts val="0"/>
+                        </a:spcBef>
+                        <a:spcAft>
+                          <a:spcPts val="0"/>
+                        </a:spcAft>
+                        <a:buNone/>
+                      </a:pPr>
+                      <a:r>
+                        <a:rPr lang="en" dirty="0"/>
                         <a:t>4</a:t>
                       </a:r>
-                      <a:endParaRPr/>
-                    </a:p>
-                  </a:txBody>
-                  <a:tcPr marL="91425" marR="91425" marT="91425" marB="91425" anchor="ctr">
-                    <a:solidFill>
-                      <a:schemeClr val="bg1"/>
-                    </a:solidFill>
-                  </a:tcPr>
-                </a:tc>
-                <a:tc>
-                  <a:txBody>
-                    <a:bodyPr/>
-                    <a:lstStyle/>
-                    <a:p>
-                      <a:pPr marL="0" lvl="0" indent="0" algn="ctr" rtl="0">
-                        <a:spcBef>
-                          <a:spcPts val="0"/>
-                        </a:spcBef>
-                        <a:spcAft>
-                          <a:spcPts val="0"/>
-                        </a:spcAft>
-                        <a:buNone/>
-                      </a:pPr>
-                      <a:r>
-                        <a:rPr lang="en"/>
-                        <a:t>USER</a:t>
-                      </a:r>
-                      <a:endParaRPr/>
+                      <a:endParaRPr dirty="0"/>
                     </a:p>
                   </a:txBody>
                   <a:tcPr marL="91425" marR="91425" marT="91425" marB="91425" anchor="ctr">
@@ -12395,7 +12459,7 @@
                       </a:pPr>
                       <a:r>
                         <a:rPr lang="en" dirty="0"/>
-                        <a:t>Register</a:t>
+                        <a:t>ADMIN</a:t>
                       </a:r>
                       <a:endParaRPr dirty="0"/>
                     </a:p>
@@ -12421,14 +12485,37 @@
                         <a:buNone/>
                       </a:pPr>
                       <a:r>
-                        <a:rPr lang="en" sz="1100" dirty="0"/>
-                        <a:t>Can users register</a:t>
-                      </a:r>
-                      <a:r>
-                        <a:rPr lang="en" sz="1300" dirty="0"/>
-                        <a:t> </a:t>
-                      </a:r>
-                      <a:endParaRPr sz="1300" dirty="0"/>
+                        <a:rPr lang="en-IN" dirty="0"/>
+                        <a:t>List items</a:t>
+                      </a:r>
+                      <a:endParaRPr dirty="0"/>
+                    </a:p>
+                  </a:txBody>
+                  <a:tcPr marL="91425" marR="91425" marT="91425" marB="91425" anchor="ctr">
+                    <a:solidFill>
+                      <a:schemeClr val="bg1"/>
+                    </a:solidFill>
+                  </a:tcPr>
+                </a:tc>
+                <a:tc>
+                  <a:txBody>
+                    <a:bodyPr/>
+                    <a:lstStyle/>
+                    <a:p>
+                      <a:pPr marL="0" lvl="0" indent="0" algn="ctr" rtl="0">
+                        <a:spcBef>
+                          <a:spcPts val="0"/>
+                        </a:spcBef>
+                        <a:spcAft>
+                          <a:spcPts val="0"/>
+                        </a:spcAft>
+                        <a:buNone/>
+                      </a:pPr>
+                      <a:r>
+                        <a:rPr lang="en-IN" sz="1100" dirty="0"/>
+                        <a:t>Sell the products to buyers</a:t>
+                      </a:r>
+                      <a:endParaRPr sz="1100" dirty="0"/>
                     </a:p>
                   </a:txBody>
                   <a:tcPr marL="91425" marR="91425" marT="91425" marB="91425" anchor="ctr">
@@ -12443,7 +12530,7 @@
                   </a:ext>
                 </a:extLst>
               </a:tr>
-              <a:tr h="520475">
+              <a:tr h="591671">
                 <a:tc>
                   <a:txBody>
                     <a:bodyPr/>
@@ -12514,7 +12601,7 @@
                       </a:pPr>
                       <a:r>
                         <a:rPr lang="en" dirty="0"/>
-                        <a:t>Login</a:t>
+                        <a:t>Register</a:t>
                       </a:r>
                       <a:endParaRPr dirty="0"/>
                     </a:p>
@@ -12541,9 +12628,13 @@
                       </a:pPr>
                       <a:r>
                         <a:rPr lang="en" sz="1100" dirty="0"/>
-                        <a:t>login successful with correct username and password</a:t>
-                      </a:r>
-                      <a:endParaRPr dirty="0"/>
+                        <a:t>Can users register</a:t>
+                      </a:r>
+                      <a:r>
+                        <a:rPr lang="en" sz="1300" dirty="0"/>
+                        <a:t> </a:t>
+                      </a:r>
+                      <a:endParaRPr sz="1300" dirty="0"/>
                     </a:p>
                   </a:txBody>
                   <a:tcPr marL="91425" marR="91425" marT="91425" marB="91425" anchor="ctr">
@@ -12558,7 +12649,7 @@
                   </a:ext>
                 </a:extLst>
               </a:tr>
-              <a:tr h="433750">
+              <a:tr h="528790">
                 <a:tc>
                   <a:txBody>
                     <a:bodyPr/>
@@ -12628,10 +12719,10 @@
                         <a:buNone/>
                       </a:pPr>
                       <a:r>
-                        <a:rPr lang="en"/>
-                        <a:t>Enrollment</a:t>
-                      </a:r>
-                      <a:endParaRPr/>
+                        <a:rPr lang="en" dirty="0"/>
+                        <a:t>Login</a:t>
+                      </a:r>
+                      <a:endParaRPr dirty="0"/>
                     </a:p>
                   </a:txBody>
                   <a:tcPr marL="91425" marR="91425" marT="91425" marB="91425" anchor="ctr">
@@ -12656,9 +12747,9 @@
                       </a:pPr>
                       <a:r>
                         <a:rPr lang="en" sz="1100" dirty="0"/>
-                        <a:t>Can enroll in  any Courses</a:t>
-                      </a:r>
-                      <a:endParaRPr sz="1100" dirty="0"/>
+                        <a:t>login successful with correct username and password</a:t>
+                      </a:r>
+                      <a:endParaRPr dirty="0"/>
                     </a:p>
                   </a:txBody>
                   <a:tcPr marL="91425" marR="91425" marT="91425" marB="91425" anchor="ctr">
@@ -12673,7 +12764,7 @@
                   </a:ext>
                 </a:extLst>
               </a:tr>
-              <a:tr h="398000">
+              <a:tr h="522058">
                 <a:tc>
                   <a:txBody>
                     <a:bodyPr/>
@@ -12743,10 +12834,10 @@
                         <a:buNone/>
                       </a:pPr>
                       <a:r>
-                        <a:rPr lang="en"/>
+                        <a:rPr lang="en" dirty="0"/>
                         <a:t>View Profile</a:t>
                       </a:r>
-                      <a:endParaRPr/>
+                      <a:endParaRPr dirty="0"/>
                     </a:p>
                   </a:txBody>
                   <a:tcPr marL="91425" marR="91425" marT="91425" marB="91425" anchor="ctr">
@@ -12792,39 +12883,10 @@
           </a:graphicData>
         </a:graphic>
       </p:graphicFrame>
-      <p:sp>
-        <p:nvSpPr>
-          <p:cNvPr id="7" name="TextBox 6"/>
-          <p:cNvSpPr txBox="1"/>
-          <p:nvPr/>
-        </p:nvSpPr>
-        <p:spPr>
-          <a:xfrm>
-            <a:off x="609600" y="5638800"/>
-            <a:ext cx="7848600" cy="369332"/>
-          </a:xfrm>
-          <a:prstGeom prst="rect">
-            <a:avLst/>
-          </a:prstGeom>
-          <a:noFill/>
-        </p:spPr>
-        <p:txBody>
-          <a:bodyPr wrap="square" rtlCol="0">
-            <a:spAutoFit/>
-          </a:bodyPr>
-          <a:lstStyle/>
-          <a:p>
-            <a:r>
-              <a:rPr lang="en-US" dirty="0"/>
-              <a:t>The table given above is for reference only. Update/create a table with your data. </a:t>
-            </a:r>
-          </a:p>
-        </p:txBody>
-      </p:sp>
     </p:spTree>
     <p:extLst>
       <p:ext uri="{BB962C8B-B14F-4D97-AF65-F5344CB8AC3E}">
-        <p14:creationId xmlns:p14="http://schemas.microsoft.com/office/powerpoint/2010/main" val="3480335941"/>
+        <p14:creationId xmlns:p14="http://schemas.microsoft.com/office/powerpoint/2010/main" val="3055859685"/>
       </p:ext>
     </p:extLst>
   </p:cSld>
@@ -12868,7 +12930,7 @@
           <a:p>
             <a:r>
               <a:rPr lang="en-US" dirty="0"/>
-              <a:t>PROJECT PLAN</a:t>
+              <a:t>USER STORY</a:t>
             </a:r>
           </a:p>
         </p:txBody>
@@ -12888,7 +12950,7 @@
           <a:bodyPr/>
           <a:lstStyle/>
           <a:p>
-            <a:endParaRPr lang="en-US"/>
+            <a:endParaRPr lang="en-US" dirty="0"/>
           </a:p>
         </p:txBody>
       </p:sp>
@@ -12939,50 +13001,21 @@
           </a:p>
         </p:txBody>
       </p:sp>
-      <p:sp>
-        <p:nvSpPr>
-          <p:cNvPr id="6" name="TextBox 5"/>
-          <p:cNvSpPr txBox="1"/>
-          <p:nvPr/>
-        </p:nvSpPr>
-        <p:spPr>
-          <a:xfrm>
-            <a:off x="609600" y="5726668"/>
-            <a:ext cx="7848600" cy="369332"/>
-          </a:xfrm>
-          <a:prstGeom prst="rect">
-            <a:avLst/>
-          </a:prstGeom>
-          <a:noFill/>
-        </p:spPr>
-        <p:txBody>
-          <a:bodyPr wrap="square" rtlCol="0">
-            <a:spAutoFit/>
-          </a:bodyPr>
-          <a:lstStyle/>
-          <a:p>
-            <a:r>
-              <a:rPr lang="en-US" dirty="0"/>
-              <a:t>The table given above is for reference only. Update/create a table with your data. </a:t>
-            </a:r>
-          </a:p>
-        </p:txBody>
-      </p:sp>
       <p:graphicFrame>
         <p:nvGraphicFramePr>
-          <p:cNvPr id="7" name="Google Shape;395;p30"/>
+          <p:cNvPr id="6" name="Google Shape;381;p28"/>
           <p:cNvGraphicFramePr/>
           <p:nvPr>
             <p:extLst>
               <p:ext uri="{D42A27DB-BD31-4B8C-83A1-F6EECF244321}">
-                <p14:modId xmlns:p14="http://schemas.microsoft.com/office/powerpoint/2010/main" val="2944679008"/>
+                <p14:modId xmlns:p14="http://schemas.microsoft.com/office/powerpoint/2010/main" val="344807206"/>
               </p:ext>
             </p:extLst>
           </p:nvPr>
         </p:nvGraphicFramePr>
         <p:xfrm>
-          <a:off x="519390" y="1249950"/>
-          <a:ext cx="8139700" cy="4388850"/>
+          <a:off x="515964" y="1177232"/>
+          <a:ext cx="7942234" cy="2162088"/>
         </p:xfrm>
         <a:graphic>
           <a:graphicData uri="http://schemas.openxmlformats.org/drawingml/2006/table">
@@ -12991,50 +13024,36 @@
                 <a:noFill/>
               </a:tblPr>
               <a:tblGrid>
-                <a:gridCol w="1311235">
+                <a:gridCol w="1783654">
                   <a:extLst>
                     <a:ext uri="{9D8B030D-6E8A-4147-A177-3AD203B41FA5}">
                       <a16:colId xmlns:a16="http://schemas.microsoft.com/office/drawing/2014/main" val="20000"/>
                     </a:ext>
                   </a:extLst>
                 </a:gridCol>
-                <a:gridCol w="1365693">
+                <a:gridCol w="1916033">
                   <a:extLst>
                     <a:ext uri="{9D8B030D-6E8A-4147-A177-3AD203B41FA5}">
                       <a16:colId xmlns:a16="http://schemas.microsoft.com/office/drawing/2014/main" val="20001"/>
                     </a:ext>
                   </a:extLst>
                 </a:gridCol>
-                <a:gridCol w="1365693">
+                <a:gridCol w="1752939">
                   <a:extLst>
                     <a:ext uri="{9D8B030D-6E8A-4147-A177-3AD203B41FA5}">
                       <a16:colId xmlns:a16="http://schemas.microsoft.com/office/drawing/2014/main" val="20002"/>
                     </a:ext>
                   </a:extLst>
                 </a:gridCol>
-                <a:gridCol w="1365693">
+                <a:gridCol w="2489608">
                   <a:extLst>
                     <a:ext uri="{9D8B030D-6E8A-4147-A177-3AD203B41FA5}">
                       <a16:colId xmlns:a16="http://schemas.microsoft.com/office/drawing/2014/main" val="20003"/>
                     </a:ext>
                   </a:extLst>
                 </a:gridCol>
-                <a:gridCol w="1365693">
-                  <a:extLst>
-                    <a:ext uri="{9D8B030D-6E8A-4147-A177-3AD203B41FA5}">
-                      <a16:colId xmlns:a16="http://schemas.microsoft.com/office/drawing/2014/main" val="20004"/>
-                    </a:ext>
-                  </a:extLst>
-                </a:gridCol>
-                <a:gridCol w="1365693">
-                  <a:extLst>
-                    <a:ext uri="{9D8B030D-6E8A-4147-A177-3AD203B41FA5}">
-                      <a16:colId xmlns:a16="http://schemas.microsoft.com/office/drawing/2014/main" val="20005"/>
-                    </a:ext>
-                  </a:extLst>
-                </a:gridCol>
               </a:tblGrid>
-              <a:tr h="469325">
+              <a:tr h="699108">
                 <a:tc>
                   <a:txBody>
                     <a:bodyPr/>
@@ -13051,10 +13070,21 @@
                       </a:pPr>
                       <a:r>
                         <a:rPr lang="en" b="1" dirty="0"/>
-                        <a:t>User</a:t>
+                        <a:t> User Story ID</a:t>
                       </a:r>
                       <a:endParaRPr b="1" dirty="0"/>
                     </a:p>
+                  </a:txBody>
+                  <a:tcPr marL="91425" marR="91425" marT="91425" marB="91425" anchor="ctr">
+                    <a:solidFill>
+                      <a:schemeClr val="bg1"/>
+                    </a:solidFill>
+                  </a:tcPr>
+                </a:tc>
+                <a:tc>
+                  <a:txBody>
+                    <a:bodyPr/>
+                    <a:lstStyle/>
                     <a:p>
                       <a:pPr marL="0" lvl="0" indent="0" algn="ctr" rtl="0">
                         <a:spcBef>
@@ -13067,7 +13097,7 @@
                       </a:pPr>
                       <a:r>
                         <a:rPr lang="en" b="1" dirty="0"/>
-                        <a:t>StoryID</a:t>
+                        <a:t>As a type of User</a:t>
                       </a:r>
                       <a:endParaRPr b="1" dirty="0"/>
                     </a:p>
@@ -13094,10 +13124,26 @@
                       </a:pPr>
                       <a:r>
                         <a:rPr lang="en" b="1" dirty="0"/>
-                        <a:t>Task Name</a:t>
+                        <a:t>I want to </a:t>
                       </a:r>
                       <a:endParaRPr b="1" dirty="0"/>
                     </a:p>
+                    <a:p>
+                      <a:pPr marL="0" lvl="0" indent="0" algn="ctr" rtl="0">
+                        <a:spcBef>
+                          <a:spcPts val="0"/>
+                        </a:spcBef>
+                        <a:spcAft>
+                          <a:spcPts val="0"/>
+                        </a:spcAft>
+                        <a:buNone/>
+                      </a:pPr>
+                      <a:r>
+                        <a:rPr lang="en" sz="1100" b="1" dirty="0"/>
+                        <a:t>&lt;Perform some task&gt;</a:t>
+                      </a:r>
+                      <a:endParaRPr sz="1100" b="1" dirty="0"/>
+                    </a:p>
                   </a:txBody>
                   <a:tcPr marL="91425" marR="91425" marT="91425" marB="91425" anchor="ctr">
                     <a:solidFill>
@@ -13121,90 +13167,25 @@
                       </a:pPr>
                       <a:r>
                         <a:rPr lang="en" b="1" dirty="0"/>
-                        <a:t>Start Date</a:t>
+                        <a:t>So that i can</a:t>
                       </a:r>
                       <a:endParaRPr b="1" dirty="0"/>
                     </a:p>
-                  </a:txBody>
-                  <a:tcPr marL="91425" marR="91425" marT="91425" marB="91425" anchor="ctr">
-                    <a:solidFill>
-                      <a:schemeClr val="bg1"/>
-                    </a:solidFill>
-                  </a:tcPr>
-                </a:tc>
-                <a:tc>
-                  <a:txBody>
-                    <a:bodyPr/>
-                    <a:lstStyle/>
-                    <a:p>
-                      <a:pPr marL="0" lvl="0" indent="0" algn="ctr" rtl="0">
-                        <a:spcBef>
-                          <a:spcPts val="0"/>
-                        </a:spcBef>
-                        <a:spcAft>
-                          <a:spcPts val="0"/>
-                        </a:spcAft>
-                        <a:buNone/>
-                      </a:pPr>
-                      <a:r>
-                        <a:rPr lang="en" b="1" dirty="0"/>
-                        <a:t>End Date</a:t>
-                      </a:r>
-                      <a:endParaRPr b="1" dirty="0"/>
-                    </a:p>
-                  </a:txBody>
-                  <a:tcPr marL="91425" marR="91425" marT="91425" marB="91425" anchor="ctr">
-                    <a:solidFill>
-                      <a:schemeClr val="bg1"/>
-                    </a:solidFill>
-                  </a:tcPr>
-                </a:tc>
-                <a:tc>
-                  <a:txBody>
-                    <a:bodyPr/>
-                    <a:lstStyle/>
-                    <a:p>
-                      <a:pPr marL="0" lvl="0" indent="0" algn="ctr" rtl="0">
-                        <a:spcBef>
-                          <a:spcPts val="0"/>
-                        </a:spcBef>
-                        <a:spcAft>
-                          <a:spcPts val="0"/>
-                        </a:spcAft>
-                        <a:buNone/>
-                      </a:pPr>
-                      <a:r>
-                        <a:rPr lang="en" b="1" dirty="0"/>
-                        <a:t>   Days </a:t>
-                      </a:r>
-                      <a:endParaRPr b="1" dirty="0"/>
-                    </a:p>
-                  </a:txBody>
-                  <a:tcPr marL="91425" marR="91425" marT="91425" marB="91425" anchor="ctr">
-                    <a:solidFill>
-                      <a:schemeClr val="bg1"/>
-                    </a:solidFill>
-                  </a:tcPr>
-                </a:tc>
-                <a:tc>
-                  <a:txBody>
-                    <a:bodyPr/>
-                    <a:lstStyle/>
-                    <a:p>
-                      <a:pPr marL="0" lvl="0" indent="0" algn="ctr" rtl="0">
-                        <a:spcBef>
-                          <a:spcPts val="0"/>
-                        </a:spcBef>
-                        <a:spcAft>
-                          <a:spcPts val="0"/>
-                        </a:spcAft>
-                        <a:buNone/>
-                      </a:pPr>
-                      <a:r>
-                        <a:rPr lang="en" b="1" dirty="0"/>
-                        <a:t>  Status</a:t>
-                      </a:r>
-                      <a:endParaRPr b="1" dirty="0"/>
+                    <a:p>
+                      <a:pPr marL="0" lvl="0" indent="0" algn="ctr" rtl="0">
+                        <a:spcBef>
+                          <a:spcPts val="0"/>
+                        </a:spcBef>
+                        <a:spcAft>
+                          <a:spcPts val="0"/>
+                        </a:spcAft>
+                        <a:buNone/>
+                      </a:pPr>
+                      <a:r>
+                        <a:rPr lang="en" sz="1100" b="1" dirty="0"/>
+                        <a:t>&lt;Achieve Some Goal&gt; </a:t>
+                      </a:r>
+                      <a:endParaRPr sz="1100" b="1" dirty="0"/>
                     </a:p>
                   </a:txBody>
                   <a:tcPr marL="91425" marR="91425" marT="91425" marB="91425" anchor="ctr">
@@ -13219,7 +13200,7 @@
                   </a:ext>
                 </a:extLst>
               </a:tr>
-              <a:tr h="404200">
+              <a:tr h="699108">
                 <a:tc>
                   <a:txBody>
                     <a:bodyPr/>
@@ -13236,7 +13217,7 @@
                       </a:pPr>
                       <a:r>
                         <a:rPr lang="en" dirty="0"/>
-                        <a:t>1</a:t>
+                        <a:t>8  </a:t>
                       </a:r>
                       <a:endParaRPr dirty="0"/>
                     </a:p>
@@ -13247,161 +13228,115 @@
                     </a:solidFill>
                   </a:tcPr>
                 </a:tc>
-                <a:tc rowSpan="5">
-                  <a:txBody>
-                    <a:bodyPr/>
-                    <a:lstStyle/>
-                    <a:p>
-                      <a:pPr marL="0" lvl="0" indent="0" algn="ctr" rtl="0">
-                        <a:spcBef>
-                          <a:spcPts val="0"/>
-                        </a:spcBef>
-                        <a:spcAft>
-                          <a:spcPts val="0"/>
-                        </a:spcAft>
-                        <a:buNone/>
-                      </a:pPr>
-                      <a:r>
-                        <a:rPr lang="en" dirty="0"/>
-                        <a:t> Sprint 1</a:t>
+                <a:tc>
+                  <a:txBody>
+                    <a:bodyPr/>
+                    <a:lstStyle/>
+                    <a:p>
+                      <a:pPr marL="0" lvl="0" indent="0" algn="ctr" rtl="0">
+                        <a:spcBef>
+                          <a:spcPts val="0"/>
+                        </a:spcBef>
+                        <a:spcAft>
+                          <a:spcPts val="0"/>
+                        </a:spcAft>
+                        <a:buNone/>
+                      </a:pPr>
+                      <a:r>
+                        <a:rPr lang="en-IN" dirty="0"/>
+                        <a:t>User</a:t>
                       </a:r>
                       <a:endParaRPr dirty="0"/>
                     </a:p>
-                    <a:p>
-                      <a:pPr marL="0" lvl="0" indent="0" algn="ctr" rtl="0">
-                        <a:spcBef>
-                          <a:spcPts val="0"/>
-                        </a:spcBef>
-                        <a:spcAft>
-                          <a:spcPts val="0"/>
-                        </a:spcAft>
-                        <a:buNone/>
-                      </a:pPr>
-                      <a:r>
-                        <a:rPr lang="en" dirty="0"/>
-                        <a:t>     </a:t>
-                      </a:r>
-                      <a:endParaRPr dirty="0"/>
-                    </a:p>
-                  </a:txBody>
-                  <a:tcPr marL="91425" marR="91425" marT="91425" marB="91425" anchor="ctr">
-                    <a:solidFill>
-                      <a:schemeClr val="bg1"/>
-                    </a:solidFill>
-                  </a:tcPr>
-                </a:tc>
-                <a:tc>
-                  <a:txBody>
-                    <a:bodyPr/>
-                    <a:lstStyle/>
-                    <a:p>
-                      <a:pPr marL="0" lvl="0" indent="0" algn="ctr" rtl="0">
-                        <a:spcBef>
-                          <a:spcPts val="0"/>
-                        </a:spcBef>
-                        <a:spcAft>
-                          <a:spcPts val="0"/>
-                        </a:spcAft>
-                        <a:buNone/>
-                      </a:pPr>
-                      <a:r>
-                        <a:rPr lang="en"/>
-                        <a:t>16/08/2022</a:t>
-                      </a:r>
-                      <a:endParaRPr/>
-                    </a:p>
-                  </a:txBody>
-                  <a:tcPr marL="91425" marR="91425" marT="91425" marB="91425" anchor="ctr">
-                    <a:solidFill>
-                      <a:schemeClr val="bg1"/>
-                    </a:solidFill>
-                  </a:tcPr>
-                </a:tc>
-                <a:tc>
-                  <a:txBody>
-                    <a:bodyPr/>
-                    <a:lstStyle/>
-                    <a:p>
-                      <a:pPr marL="0" lvl="0" indent="0" algn="ctr" rtl="0">
-                        <a:spcBef>
-                          <a:spcPts val="0"/>
-                        </a:spcBef>
-                        <a:spcAft>
-                          <a:spcPts val="0"/>
-                        </a:spcAft>
-                        <a:buNone/>
-                      </a:pPr>
-                      <a:r>
-                        <a:rPr lang="en"/>
-                        <a:t>17/08/2022</a:t>
-                      </a:r>
-                      <a:endParaRPr/>
-                    </a:p>
-                  </a:txBody>
-                  <a:tcPr marL="91425" marR="91425" marT="91425" marB="91425" anchor="ctr">
-                    <a:solidFill>
-                      <a:schemeClr val="bg1"/>
-                    </a:solidFill>
-                  </a:tcPr>
-                </a:tc>
-                <a:tc rowSpan="5">
-                  <a:txBody>
-                    <a:bodyPr/>
-                    <a:lstStyle/>
-                    <a:p>
-                      <a:pPr marL="0" lvl="0" indent="0" algn="ctr" rtl="0">
-                        <a:spcBef>
-                          <a:spcPts val="0"/>
-                        </a:spcBef>
-                        <a:spcAft>
-                          <a:spcPts val="0"/>
-                        </a:spcAft>
-                        <a:buNone/>
-                      </a:pPr>
-                      <a:r>
-                        <a:rPr lang="en" dirty="0"/>
-                        <a:t>10</a:t>
-                      </a:r>
-                      <a:endParaRPr dirty="0"/>
-                    </a:p>
-                    <a:p>
-                      <a:pPr marL="0" lvl="0" indent="0" algn="ctr" rtl="0">
-                        <a:spcBef>
-                          <a:spcPts val="0"/>
-                        </a:spcBef>
-                        <a:spcAft>
-                          <a:spcPts val="0"/>
-                        </a:spcAft>
-                        <a:buNone/>
-                      </a:pPr>
-                      <a:endParaRPr dirty="0"/>
-                    </a:p>
-                  </a:txBody>
-                  <a:tcPr marL="91425" marR="91425" marT="91425" marB="91425" anchor="ctr">
-                    <a:solidFill>
-                      <a:schemeClr val="bg1"/>
-                    </a:solidFill>
-                  </a:tcPr>
-                </a:tc>
-                <a:tc>
-                  <a:txBody>
-                    <a:bodyPr/>
-                    <a:lstStyle/>
-                    <a:p>
-                      <a:pPr marL="0" lvl="0" indent="0" algn="ctr" rtl="0">
-                        <a:spcBef>
-                          <a:spcPts val="0"/>
-                        </a:spcBef>
-                        <a:spcAft>
-                          <a:spcPts val="0"/>
-                        </a:spcAft>
-                        <a:buNone/>
-                      </a:pPr>
-                      <a:r>
-                        <a:rPr lang="en"/>
-                        <a:t>Completed</a:t>
-                      </a:r>
-                      <a:endParaRPr/>
+                  </a:txBody>
+                  <a:tcPr marL="91425" marR="91425" marT="91425" marB="91425" anchor="ctr">
+                    <a:solidFill>
+                      <a:schemeClr val="bg1"/>
+                    </a:solidFill>
+                  </a:tcPr>
+                </a:tc>
+                <a:tc>
+                  <a:txBody>
+                    <a:bodyPr/>
+                    <a:lstStyle/>
+                    <a:p>
+                      <a:pPr marL="0" lvl="0" indent="0" algn="ctr" defTabSz="914400" rtl="0" eaLnBrk="1" latinLnBrk="0" hangingPunct="1">
+                        <a:spcBef>
+                          <a:spcPts val="0"/>
+                        </a:spcBef>
+                        <a:spcAft>
+                          <a:spcPts val="0"/>
+                        </a:spcAft>
+                        <a:buNone/>
+                      </a:pPr>
+                      <a:r>
+                        <a:rPr lang="en-IN" sz="1800" kern="1200" dirty="0">
+                          <a:solidFill>
+                            <a:schemeClr val="tx1"/>
+                          </a:solidFill>
+                          <a:latin typeface="+mn-lt"/>
+                          <a:ea typeface="+mn-ea"/>
+                          <a:cs typeface="+mn-cs"/>
+                        </a:rPr>
+                        <a:t>Browse and </a:t>
+                      </a:r>
+                      <a:r>
+                        <a:rPr lang="en-IN" sz="1800" kern="1200" dirty="0" err="1">
+                          <a:solidFill>
+                            <a:schemeClr val="tx1"/>
+                          </a:solidFill>
+                          <a:latin typeface="+mn-lt"/>
+                          <a:ea typeface="+mn-ea"/>
+                          <a:cs typeface="+mn-cs"/>
+                        </a:rPr>
+                        <a:t>purchace</a:t>
+                      </a:r>
+                      <a:r>
+                        <a:rPr lang="en-IN" sz="1800" kern="1200" dirty="0">
+                          <a:solidFill>
+                            <a:schemeClr val="tx1"/>
+                          </a:solidFill>
+                          <a:latin typeface="+mn-lt"/>
+                          <a:ea typeface="+mn-ea"/>
+                          <a:cs typeface="+mn-cs"/>
+                        </a:rPr>
+                        <a:t> gear</a:t>
+                      </a:r>
+                      <a:endParaRPr sz="1800" kern="1200" dirty="0">
+                        <a:solidFill>
+                          <a:schemeClr val="tx1"/>
+                        </a:solidFill>
+                        <a:latin typeface="+mn-lt"/>
+                        <a:ea typeface="+mn-ea"/>
+                        <a:cs typeface="+mn-cs"/>
+                      </a:endParaRPr>
+                    </a:p>
+                  </a:txBody>
+                  <a:tcPr marL="91425" marR="91425" marT="91425" marB="91425" anchor="ctr">
+                    <a:solidFill>
+                      <a:schemeClr val="bg1"/>
+                    </a:solidFill>
+                  </a:tcPr>
+                </a:tc>
+                <a:tc>
+                  <a:txBody>
+                    <a:bodyPr/>
+                    <a:lstStyle/>
+                    <a:p>
+                      <a:pPr marL="0" lvl="0" indent="0" algn="ctr" rtl="0">
+                        <a:spcBef>
+                          <a:spcPts val="0"/>
+                        </a:spcBef>
+                        <a:spcAft>
+                          <a:spcPts val="0"/>
+                        </a:spcAft>
+                        <a:buNone/>
+                      </a:pPr>
+                      <a:r>
+                        <a:rPr lang="en-IN" sz="1100" dirty="0"/>
+                        <a:t>Get quality equipment from trusted sellers</a:t>
+                      </a:r>
+                      <a:endParaRPr sz="1100" dirty="0"/>
                     </a:p>
                   </a:txBody>
                   <a:tcPr marL="91425" marR="91425" marT="91425" marB="91425" anchor="ctr">
@@ -13416,24 +13351,24 @@
                   </a:ext>
                 </a:extLst>
               </a:tr>
-              <a:tr h="404200">
-                <a:tc>
-                  <a:txBody>
-                    <a:bodyPr/>
-                    <a:lstStyle/>
-                    <a:p>
-                      <a:pPr marL="0" lvl="0" indent="0" algn="ctr" rtl="0">
-                        <a:spcBef>
-                          <a:spcPts val="0"/>
-                        </a:spcBef>
-                        <a:spcAft>
-                          <a:spcPts val="0"/>
-                        </a:spcAft>
-                        <a:buNone/>
-                      </a:pPr>
-                      <a:r>
-                        <a:rPr lang="en" dirty="0"/>
-                        <a:t>4</a:t>
+              <a:tr h="511534">
+                <a:tc>
+                  <a:txBody>
+                    <a:bodyPr/>
+                    <a:lstStyle/>
+                    <a:p>
+                      <a:pPr marL="0" lvl="0" indent="0" algn="ctr" rtl="0">
+                        <a:spcBef>
+                          <a:spcPts val="0"/>
+                        </a:spcBef>
+                        <a:spcAft>
+                          <a:spcPts val="0"/>
+                        </a:spcAft>
+                        <a:buNone/>
+                      </a:pPr>
+                      <a:r>
+                        <a:rPr lang="en-IN" dirty="0"/>
+                        <a:t>9</a:t>
                       </a:r>
                       <a:endParaRPr dirty="0"/>
                     </a:p>
@@ -13444,33 +13379,23 @@
                     </a:solidFill>
                   </a:tcPr>
                 </a:tc>
-                <a:tc vMerge="1">
-                  <a:txBody>
-                    <a:bodyPr/>
-                    <a:lstStyle/>
-                    <a:p>
-                      <a:endParaRPr lang="en-US"/>
-                    </a:p>
-                  </a:txBody>
-                  <a:tcPr/>
-                </a:tc>
-                <a:tc>
-                  <a:txBody>
-                    <a:bodyPr/>
-                    <a:lstStyle/>
-                    <a:p>
-                      <a:pPr marL="0" lvl="0" indent="0" algn="ctr" rtl="0">
-                        <a:spcBef>
-                          <a:spcPts val="0"/>
-                        </a:spcBef>
-                        <a:spcAft>
-                          <a:spcPts val="0"/>
-                        </a:spcAft>
-                        <a:buNone/>
-                      </a:pPr>
-                      <a:r>
-                        <a:rPr lang="en" dirty="0"/>
-                        <a:t>18/08/2022</a:t>
+                <a:tc>
+                  <a:txBody>
+                    <a:bodyPr/>
+                    <a:lstStyle/>
+                    <a:p>
+                      <a:pPr marL="0" lvl="0" indent="0" algn="ctr" rtl="0">
+                        <a:spcBef>
+                          <a:spcPts val="0"/>
+                        </a:spcBef>
+                        <a:spcAft>
+                          <a:spcPts val="0"/>
+                        </a:spcAft>
+                        <a:buNone/>
+                      </a:pPr>
+                      <a:r>
+                        <a:rPr lang="en-IN" dirty="0"/>
+                        <a:t>Martial Artists</a:t>
                       </a:r>
                       <a:endParaRPr dirty="0"/>
                     </a:p>
@@ -13496,47 +13421,37 @@
                         <a:buNone/>
                       </a:pPr>
                       <a:r>
-                        <a:rPr lang="en"/>
-                        <a:t>19/08/2022</a:t>
-                      </a:r>
-                      <a:endParaRPr/>
-                    </a:p>
-                  </a:txBody>
-                  <a:tcPr marL="91425" marR="91425" marT="91425" marB="91425" anchor="ctr">
-                    <a:solidFill>
-                      <a:schemeClr val="bg1"/>
-                    </a:solidFill>
-                  </a:tcPr>
-                </a:tc>
-                <a:tc vMerge="1">
-                  <a:txBody>
-                    <a:bodyPr/>
-                    <a:lstStyle/>
-                    <a:p>
-                      <a:endParaRPr lang="en-US"/>
-                    </a:p>
-                  </a:txBody>
-                  <a:tcPr/>
-                </a:tc>
-                <a:tc>
-                  <a:txBody>
-                    <a:bodyPr/>
-                    <a:lstStyle/>
-                    <a:p>
-                      <a:pPr marL="0" lvl="0" indent="0" algn="ctr" rtl="0">
-                        <a:spcBef>
-                          <a:spcPts val="0"/>
-                        </a:spcBef>
-                        <a:spcAft>
-                          <a:spcPts val="0"/>
-                        </a:spcAft>
-                        <a:buNone/>
-                      </a:pPr>
-                      <a:r>
-                        <a:rPr lang="en"/>
-                        <a:t>Completed</a:t>
-                      </a:r>
-                      <a:endParaRPr/>
+                        <a:rPr lang="en-IN" dirty="0"/>
+                        <a:t>Track my training progress</a:t>
+                      </a:r>
+                      <a:endParaRPr dirty="0"/>
+                    </a:p>
+                  </a:txBody>
+                  <a:tcPr marL="91425" marR="91425" marT="91425" marB="91425" anchor="ctr">
+                    <a:solidFill>
+                      <a:schemeClr val="bg1"/>
+                    </a:solidFill>
+                  </a:tcPr>
+                </a:tc>
+                <a:tc>
+                  <a:txBody>
+                    <a:bodyPr/>
+                    <a:lstStyle/>
+                    <a:p>
+                      <a:pPr marL="0" lvl="0" indent="0" algn="ctr" rtl="0">
+                        <a:spcBef>
+                          <a:spcPts val="0"/>
+                        </a:spcBef>
+                        <a:spcAft>
+                          <a:spcPts val="0"/>
+                        </a:spcAft>
+                        <a:buNone/>
+                      </a:pPr>
+                      <a:r>
+                        <a:rPr lang="en-IN" sz="1100" dirty="0"/>
+                        <a:t>Stay motivated and measure improvement</a:t>
+                      </a:r>
+                      <a:endParaRPr sz="1100" dirty="0"/>
                     </a:p>
                   </a:txBody>
                   <a:tcPr marL="91425" marR="91425" marT="91425" marB="91425" anchor="ctr">
@@ -13548,850 +13463,6 @@
                 <a:extLst>
                   <a:ext uri="{0D108BD9-81ED-4DB2-BD59-A6C34878D82A}">
                     <a16:rowId xmlns:a16="http://schemas.microsoft.com/office/drawing/2014/main" val="10002"/>
-                  </a:ext>
-                </a:extLst>
-              </a:tr>
-              <a:tr h="391175">
-                <a:tc>
-                  <a:txBody>
-                    <a:bodyPr/>
-                    <a:lstStyle/>
-                    <a:p>
-                      <a:pPr marL="0" lvl="0" indent="0" algn="ctr" rtl="0">
-                        <a:spcBef>
-                          <a:spcPts val="0"/>
-                        </a:spcBef>
-                        <a:spcAft>
-                          <a:spcPts val="0"/>
-                        </a:spcAft>
-                        <a:buNone/>
-                      </a:pPr>
-                      <a:r>
-                        <a:rPr lang="en" dirty="0"/>
-                        <a:t>5</a:t>
-                      </a:r>
-                      <a:endParaRPr dirty="0"/>
-                    </a:p>
-                  </a:txBody>
-                  <a:tcPr marL="91425" marR="91425" marT="91425" marB="91425" anchor="ctr">
-                    <a:solidFill>
-                      <a:schemeClr val="bg1"/>
-                    </a:solidFill>
-                  </a:tcPr>
-                </a:tc>
-                <a:tc vMerge="1">
-                  <a:txBody>
-                    <a:bodyPr/>
-                    <a:lstStyle/>
-                    <a:p>
-                      <a:endParaRPr lang="en-US"/>
-                    </a:p>
-                  </a:txBody>
-                  <a:tcPr/>
-                </a:tc>
-                <a:tc>
-                  <a:txBody>
-                    <a:bodyPr/>
-                    <a:lstStyle/>
-                    <a:p>
-                      <a:pPr marL="0" lvl="0" indent="0" algn="ctr" rtl="0">
-                        <a:spcBef>
-                          <a:spcPts val="0"/>
-                        </a:spcBef>
-                        <a:spcAft>
-                          <a:spcPts val="0"/>
-                        </a:spcAft>
-                        <a:buNone/>
-                      </a:pPr>
-                      <a:r>
-                        <a:rPr lang="en" dirty="0"/>
-                        <a:t>20/08/2022</a:t>
-                      </a:r>
-                      <a:endParaRPr dirty="0"/>
-                    </a:p>
-                  </a:txBody>
-                  <a:tcPr marL="91425" marR="91425" marT="91425" marB="91425" anchor="ctr">
-                    <a:solidFill>
-                      <a:schemeClr val="bg1"/>
-                    </a:solidFill>
-                  </a:tcPr>
-                </a:tc>
-                <a:tc>
-                  <a:txBody>
-                    <a:bodyPr/>
-                    <a:lstStyle/>
-                    <a:p>
-                      <a:pPr marL="0" lvl="0" indent="0" algn="ctr" rtl="0">
-                        <a:spcBef>
-                          <a:spcPts val="0"/>
-                        </a:spcBef>
-                        <a:spcAft>
-                          <a:spcPts val="0"/>
-                        </a:spcAft>
-                        <a:buNone/>
-                      </a:pPr>
-                      <a:r>
-                        <a:rPr lang="en" dirty="0"/>
-                        <a:t>22/08/2022</a:t>
-                      </a:r>
-                      <a:endParaRPr dirty="0"/>
-                    </a:p>
-                  </a:txBody>
-                  <a:tcPr marL="91425" marR="91425" marT="91425" marB="91425" anchor="ctr">
-                    <a:solidFill>
-                      <a:schemeClr val="bg1"/>
-                    </a:solidFill>
-                  </a:tcPr>
-                </a:tc>
-                <a:tc vMerge="1">
-                  <a:txBody>
-                    <a:bodyPr/>
-                    <a:lstStyle/>
-                    <a:p>
-                      <a:endParaRPr lang="en-US"/>
-                    </a:p>
-                  </a:txBody>
-                  <a:tcPr/>
-                </a:tc>
-                <a:tc>
-                  <a:txBody>
-                    <a:bodyPr/>
-                    <a:lstStyle/>
-                    <a:p>
-                      <a:pPr marL="0" lvl="0" indent="0" algn="ctr" rtl="0">
-                        <a:spcBef>
-                          <a:spcPts val="0"/>
-                        </a:spcBef>
-                        <a:spcAft>
-                          <a:spcPts val="0"/>
-                        </a:spcAft>
-                        <a:buNone/>
-                      </a:pPr>
-                      <a:r>
-                        <a:rPr lang="en"/>
-                        <a:t>Completed</a:t>
-                      </a:r>
-                      <a:endParaRPr/>
-                    </a:p>
-                  </a:txBody>
-                  <a:tcPr marL="91425" marR="91425" marT="91425" marB="91425" anchor="ctr">
-                    <a:solidFill>
-                      <a:schemeClr val="bg1"/>
-                    </a:solidFill>
-                  </a:tcPr>
-                </a:tc>
-                <a:extLst>
-                  <a:ext uri="{0D108BD9-81ED-4DB2-BD59-A6C34878D82A}">
-                    <a16:rowId xmlns:a16="http://schemas.microsoft.com/office/drawing/2014/main" val="10003"/>
-                  </a:ext>
-                </a:extLst>
-              </a:tr>
-              <a:tr h="378150">
-                <a:tc>
-                  <a:txBody>
-                    <a:bodyPr/>
-                    <a:lstStyle/>
-                    <a:p>
-                      <a:pPr marL="0" lvl="0" indent="0" algn="ctr" rtl="0">
-                        <a:spcBef>
-                          <a:spcPts val="0"/>
-                        </a:spcBef>
-                        <a:spcAft>
-                          <a:spcPts val="0"/>
-                        </a:spcAft>
-                        <a:buNone/>
-                      </a:pPr>
-                      <a:r>
-                        <a:rPr lang="en"/>
-                        <a:t>10</a:t>
-                      </a:r>
-                      <a:endParaRPr/>
-                    </a:p>
-                  </a:txBody>
-                  <a:tcPr marL="91425" marR="91425" marT="91425" marB="91425" anchor="ctr">
-                    <a:solidFill>
-                      <a:schemeClr val="bg1"/>
-                    </a:solidFill>
-                  </a:tcPr>
-                </a:tc>
-                <a:tc vMerge="1">
-                  <a:txBody>
-                    <a:bodyPr/>
-                    <a:lstStyle/>
-                    <a:p>
-                      <a:endParaRPr lang="en-US"/>
-                    </a:p>
-                  </a:txBody>
-                  <a:tcPr/>
-                </a:tc>
-                <a:tc>
-                  <a:txBody>
-                    <a:bodyPr/>
-                    <a:lstStyle/>
-                    <a:p>
-                      <a:pPr marL="0" lvl="0" indent="0" algn="ctr" rtl="0">
-                        <a:spcBef>
-                          <a:spcPts val="0"/>
-                        </a:spcBef>
-                        <a:spcAft>
-                          <a:spcPts val="0"/>
-                        </a:spcAft>
-                        <a:buNone/>
-                      </a:pPr>
-                      <a:r>
-                        <a:rPr lang="en" dirty="0"/>
-                        <a:t>23/08/2022</a:t>
-                      </a:r>
-                      <a:endParaRPr dirty="0"/>
-                    </a:p>
-                  </a:txBody>
-                  <a:tcPr marL="91425" marR="91425" marT="91425" marB="91425" anchor="ctr">
-                    <a:solidFill>
-                      <a:schemeClr val="bg1"/>
-                    </a:solidFill>
-                  </a:tcPr>
-                </a:tc>
-                <a:tc>
-                  <a:txBody>
-                    <a:bodyPr/>
-                    <a:lstStyle/>
-                    <a:p>
-                      <a:pPr marL="0" lvl="0" indent="0" algn="ctr" rtl="0">
-                        <a:spcBef>
-                          <a:spcPts val="0"/>
-                        </a:spcBef>
-                        <a:spcAft>
-                          <a:spcPts val="0"/>
-                        </a:spcAft>
-                        <a:buNone/>
-                      </a:pPr>
-                      <a:r>
-                        <a:rPr lang="en" dirty="0"/>
-                        <a:t>24/08/2022</a:t>
-                      </a:r>
-                      <a:endParaRPr dirty="0"/>
-                    </a:p>
-                  </a:txBody>
-                  <a:tcPr marL="91425" marR="91425" marT="91425" marB="91425" anchor="ctr">
-                    <a:solidFill>
-                      <a:schemeClr val="bg1"/>
-                    </a:solidFill>
-                  </a:tcPr>
-                </a:tc>
-                <a:tc vMerge="1">
-                  <a:txBody>
-                    <a:bodyPr/>
-                    <a:lstStyle/>
-                    <a:p>
-                      <a:endParaRPr lang="en-US"/>
-                    </a:p>
-                  </a:txBody>
-                  <a:tcPr/>
-                </a:tc>
-                <a:tc>
-                  <a:txBody>
-                    <a:bodyPr/>
-                    <a:lstStyle/>
-                    <a:p>
-                      <a:pPr marL="0" lvl="0" indent="0" algn="ctr" rtl="0">
-                        <a:spcBef>
-                          <a:spcPts val="0"/>
-                        </a:spcBef>
-                        <a:spcAft>
-                          <a:spcPts val="0"/>
-                        </a:spcAft>
-                        <a:buNone/>
-                      </a:pPr>
-                      <a:r>
-                        <a:rPr lang="en"/>
-                        <a:t>Completed</a:t>
-                      </a:r>
-                      <a:endParaRPr/>
-                    </a:p>
-                  </a:txBody>
-                  <a:tcPr marL="91425" marR="91425" marT="91425" marB="91425" anchor="ctr">
-                    <a:solidFill>
-                      <a:schemeClr val="bg1"/>
-                    </a:solidFill>
-                  </a:tcPr>
-                </a:tc>
-                <a:extLst>
-                  <a:ext uri="{0D108BD9-81ED-4DB2-BD59-A6C34878D82A}">
-                    <a16:rowId xmlns:a16="http://schemas.microsoft.com/office/drawing/2014/main" val="10004"/>
-                  </a:ext>
-                </a:extLst>
-              </a:tr>
-              <a:tr h="404200">
-                <a:tc>
-                  <a:txBody>
-                    <a:bodyPr/>
-                    <a:lstStyle/>
-                    <a:p>
-                      <a:pPr marL="0" lvl="0" indent="0" algn="ctr" rtl="0">
-                        <a:spcBef>
-                          <a:spcPts val="0"/>
-                        </a:spcBef>
-                        <a:spcAft>
-                          <a:spcPts val="0"/>
-                        </a:spcAft>
-                        <a:buNone/>
-                      </a:pPr>
-                      <a:r>
-                        <a:rPr lang="en"/>
-                        <a:t>11</a:t>
-                      </a:r>
-                      <a:endParaRPr/>
-                    </a:p>
-                  </a:txBody>
-                  <a:tcPr marL="91425" marR="91425" marT="91425" marB="91425" anchor="ctr">
-                    <a:solidFill>
-                      <a:schemeClr val="bg1"/>
-                    </a:solidFill>
-                  </a:tcPr>
-                </a:tc>
-                <a:tc vMerge="1">
-                  <a:txBody>
-                    <a:bodyPr/>
-                    <a:lstStyle/>
-                    <a:p>
-                      <a:endParaRPr lang="en-US"/>
-                    </a:p>
-                  </a:txBody>
-                  <a:tcPr/>
-                </a:tc>
-                <a:tc>
-                  <a:txBody>
-                    <a:bodyPr/>
-                    <a:lstStyle/>
-                    <a:p>
-                      <a:pPr marL="0" lvl="0" indent="0" algn="ctr" rtl="0">
-                        <a:spcBef>
-                          <a:spcPts val="0"/>
-                        </a:spcBef>
-                        <a:spcAft>
-                          <a:spcPts val="0"/>
-                        </a:spcAft>
-                        <a:buNone/>
-                      </a:pPr>
-                      <a:r>
-                        <a:rPr lang="en" dirty="0"/>
-                        <a:t>25/08/2022</a:t>
-                      </a:r>
-                      <a:endParaRPr dirty="0"/>
-                    </a:p>
-                  </a:txBody>
-                  <a:tcPr marL="91425" marR="91425" marT="91425" marB="91425" anchor="ctr">
-                    <a:solidFill>
-                      <a:schemeClr val="bg1"/>
-                    </a:solidFill>
-                  </a:tcPr>
-                </a:tc>
-                <a:tc>
-                  <a:txBody>
-                    <a:bodyPr/>
-                    <a:lstStyle/>
-                    <a:p>
-                      <a:pPr marL="0" lvl="0" indent="0" algn="ctr" rtl="0">
-                        <a:spcBef>
-                          <a:spcPts val="0"/>
-                        </a:spcBef>
-                        <a:spcAft>
-                          <a:spcPts val="0"/>
-                        </a:spcAft>
-                        <a:buNone/>
-                      </a:pPr>
-                      <a:r>
-                        <a:rPr lang="en" dirty="0"/>
-                        <a:t>27/08/2022</a:t>
-                      </a:r>
-                      <a:endParaRPr dirty="0"/>
-                    </a:p>
-                  </a:txBody>
-                  <a:tcPr marL="91425" marR="91425" marT="91425" marB="91425" anchor="ctr">
-                    <a:solidFill>
-                      <a:schemeClr val="bg1"/>
-                    </a:solidFill>
-                  </a:tcPr>
-                </a:tc>
-                <a:tc vMerge="1">
-                  <a:txBody>
-                    <a:bodyPr/>
-                    <a:lstStyle/>
-                    <a:p>
-                      <a:endParaRPr lang="en-US"/>
-                    </a:p>
-                  </a:txBody>
-                  <a:tcPr/>
-                </a:tc>
-                <a:tc>
-                  <a:txBody>
-                    <a:bodyPr/>
-                    <a:lstStyle/>
-                    <a:p>
-                      <a:pPr marL="0" lvl="0" indent="0" algn="ctr" rtl="0">
-                        <a:spcBef>
-                          <a:spcPts val="0"/>
-                        </a:spcBef>
-                        <a:spcAft>
-                          <a:spcPts val="0"/>
-                        </a:spcAft>
-                        <a:buNone/>
-                      </a:pPr>
-                      <a:r>
-                        <a:rPr lang="en"/>
-                        <a:t>Completed</a:t>
-                      </a:r>
-                      <a:endParaRPr/>
-                    </a:p>
-                  </a:txBody>
-                  <a:tcPr marL="91425" marR="91425" marT="91425" marB="91425" anchor="ctr">
-                    <a:solidFill>
-                      <a:schemeClr val="bg1"/>
-                    </a:solidFill>
-                  </a:tcPr>
-                </a:tc>
-                <a:extLst>
-                  <a:ext uri="{0D108BD9-81ED-4DB2-BD59-A6C34878D82A}">
-                    <a16:rowId xmlns:a16="http://schemas.microsoft.com/office/drawing/2014/main" val="10005"/>
-                  </a:ext>
-                </a:extLst>
-              </a:tr>
-              <a:tr h="352100">
-                <a:tc>
-                  <a:txBody>
-                    <a:bodyPr/>
-                    <a:lstStyle/>
-                    <a:p>
-                      <a:pPr marL="0" lvl="0" indent="0" algn="ctr" rtl="0">
-                        <a:spcBef>
-                          <a:spcPts val="0"/>
-                        </a:spcBef>
-                        <a:spcAft>
-                          <a:spcPts val="0"/>
-                        </a:spcAft>
-                        <a:buNone/>
-                      </a:pPr>
-                      <a:r>
-                        <a:rPr lang="en"/>
-                        <a:t>2</a:t>
-                      </a:r>
-                      <a:endParaRPr/>
-                    </a:p>
-                  </a:txBody>
-                  <a:tcPr marL="91425" marR="91425" marT="91425" marB="91425" anchor="ctr">
-                    <a:solidFill>
-                      <a:schemeClr val="bg1"/>
-                    </a:solidFill>
-                  </a:tcPr>
-                </a:tc>
-                <a:tc rowSpan="3">
-                  <a:txBody>
-                    <a:bodyPr/>
-                    <a:lstStyle/>
-                    <a:p>
-                      <a:pPr marL="0" lvl="0" indent="0" algn="ctr" rtl="0">
-                        <a:spcBef>
-                          <a:spcPts val="0"/>
-                        </a:spcBef>
-                        <a:spcAft>
-                          <a:spcPts val="0"/>
-                        </a:spcAft>
-                        <a:buNone/>
-                      </a:pPr>
-                      <a:r>
-                        <a:rPr lang="en" dirty="0"/>
-                        <a:t>Sprint 2</a:t>
-                      </a:r>
-                      <a:endParaRPr dirty="0"/>
-                    </a:p>
-                  </a:txBody>
-                  <a:tcPr marL="91425" marR="91425" marT="91425" marB="91425" anchor="ctr">
-                    <a:solidFill>
-                      <a:schemeClr val="bg1"/>
-                    </a:solidFill>
-                  </a:tcPr>
-                </a:tc>
-                <a:tc>
-                  <a:txBody>
-                    <a:bodyPr/>
-                    <a:lstStyle/>
-                    <a:p>
-                      <a:pPr marL="0" lvl="0" indent="0" algn="ctr" rtl="0">
-                        <a:spcBef>
-                          <a:spcPts val="0"/>
-                        </a:spcBef>
-                        <a:spcAft>
-                          <a:spcPts val="0"/>
-                        </a:spcAft>
-                        <a:buNone/>
-                      </a:pPr>
-                      <a:r>
-                        <a:rPr lang="en"/>
-                        <a:t>13/09/2022</a:t>
-                      </a:r>
-                      <a:endParaRPr/>
-                    </a:p>
-                  </a:txBody>
-                  <a:tcPr marL="91425" marR="91425" marT="91425" marB="91425" anchor="ctr">
-                    <a:solidFill>
-                      <a:schemeClr val="bg1"/>
-                    </a:solidFill>
-                  </a:tcPr>
-                </a:tc>
-                <a:tc>
-                  <a:txBody>
-                    <a:bodyPr/>
-                    <a:lstStyle/>
-                    <a:p>
-                      <a:pPr marL="0" lvl="0" indent="0" algn="ctr" rtl="0">
-                        <a:spcBef>
-                          <a:spcPts val="0"/>
-                        </a:spcBef>
-                        <a:spcAft>
-                          <a:spcPts val="0"/>
-                        </a:spcAft>
-                        <a:buNone/>
-                      </a:pPr>
-                      <a:r>
-                        <a:rPr lang="en" dirty="0"/>
-                        <a:t>23/09/2022</a:t>
-                      </a:r>
-                      <a:endParaRPr dirty="0"/>
-                    </a:p>
-                  </a:txBody>
-                  <a:tcPr marL="91425" marR="91425" marT="91425" marB="91425" anchor="ctr">
-                    <a:solidFill>
-                      <a:schemeClr val="bg1"/>
-                    </a:solidFill>
-                  </a:tcPr>
-                </a:tc>
-                <a:tc rowSpan="3">
-                  <a:txBody>
-                    <a:bodyPr/>
-                    <a:lstStyle/>
-                    <a:p>
-                      <a:pPr marL="0" lvl="0" indent="0" algn="ctr" rtl="0">
-                        <a:spcBef>
-                          <a:spcPts val="0"/>
-                        </a:spcBef>
-                        <a:spcAft>
-                          <a:spcPts val="0"/>
-                        </a:spcAft>
-                        <a:buNone/>
-                      </a:pPr>
-                      <a:r>
-                        <a:rPr lang="en" dirty="0"/>
-                        <a:t>16</a:t>
-                      </a:r>
-                      <a:endParaRPr dirty="0"/>
-                    </a:p>
-                  </a:txBody>
-                  <a:tcPr marL="91425" marR="91425" marT="91425" marB="91425" anchor="ctr">
-                    <a:solidFill>
-                      <a:schemeClr val="bg1"/>
-                    </a:solidFill>
-                  </a:tcPr>
-                </a:tc>
-                <a:tc>
-                  <a:txBody>
-                    <a:bodyPr/>
-                    <a:lstStyle/>
-                    <a:p>
-                      <a:pPr marL="0" lvl="0" indent="0" algn="ctr" rtl="0">
-                        <a:spcBef>
-                          <a:spcPts val="0"/>
-                        </a:spcBef>
-                        <a:spcAft>
-                          <a:spcPts val="0"/>
-                        </a:spcAft>
-                        <a:buNone/>
-                      </a:pPr>
-                      <a:r>
-                        <a:rPr lang="en"/>
-                        <a:t>Completed</a:t>
-                      </a:r>
-                      <a:endParaRPr/>
-                    </a:p>
-                  </a:txBody>
-                  <a:tcPr marL="91425" marR="91425" marT="91425" marB="91425" anchor="ctr">
-                    <a:solidFill>
-                      <a:schemeClr val="bg1"/>
-                    </a:solidFill>
-                  </a:tcPr>
-                </a:tc>
-                <a:extLst>
-                  <a:ext uri="{0D108BD9-81ED-4DB2-BD59-A6C34878D82A}">
-                    <a16:rowId xmlns:a16="http://schemas.microsoft.com/office/drawing/2014/main" val="10006"/>
-                  </a:ext>
-                </a:extLst>
-              </a:tr>
-              <a:tr h="417225">
-                <a:tc>
-                  <a:txBody>
-                    <a:bodyPr/>
-                    <a:lstStyle/>
-                    <a:p>
-                      <a:pPr marL="0" lvl="0" indent="0" algn="ctr" rtl="0">
-                        <a:spcBef>
-                          <a:spcPts val="0"/>
-                        </a:spcBef>
-                        <a:spcAft>
-                          <a:spcPts val="0"/>
-                        </a:spcAft>
-                        <a:buNone/>
-                      </a:pPr>
-                      <a:r>
-                        <a:rPr lang="en"/>
-                        <a:t>7</a:t>
-                      </a:r>
-                      <a:endParaRPr/>
-                    </a:p>
-                  </a:txBody>
-                  <a:tcPr marL="91425" marR="91425" marT="91425" marB="91425" anchor="ctr">
-                    <a:solidFill>
-                      <a:schemeClr val="bg1"/>
-                    </a:solidFill>
-                  </a:tcPr>
-                </a:tc>
-                <a:tc vMerge="1">
-                  <a:txBody>
-                    <a:bodyPr/>
-                    <a:lstStyle/>
-                    <a:p>
-                      <a:endParaRPr lang="en-US"/>
-                    </a:p>
-                  </a:txBody>
-                  <a:tcPr/>
-                </a:tc>
-                <a:tc>
-                  <a:txBody>
-                    <a:bodyPr/>
-                    <a:lstStyle/>
-                    <a:p>
-                      <a:pPr marL="0" lvl="0" indent="0" algn="ctr" rtl="0">
-                        <a:spcBef>
-                          <a:spcPts val="0"/>
-                        </a:spcBef>
-                        <a:spcAft>
-                          <a:spcPts val="0"/>
-                        </a:spcAft>
-                        <a:buNone/>
-                      </a:pPr>
-                      <a:r>
-                        <a:rPr lang="en"/>
-                        <a:t>23/09/2022</a:t>
-                      </a:r>
-                      <a:endParaRPr/>
-                    </a:p>
-                  </a:txBody>
-                  <a:tcPr marL="91425" marR="91425" marT="91425" marB="91425" anchor="ctr">
-                    <a:solidFill>
-                      <a:schemeClr val="bg1"/>
-                    </a:solidFill>
-                  </a:tcPr>
-                </a:tc>
-                <a:tc>
-                  <a:txBody>
-                    <a:bodyPr/>
-                    <a:lstStyle/>
-                    <a:p>
-                      <a:pPr marL="0" lvl="0" indent="0" algn="ctr" rtl="0">
-                        <a:spcBef>
-                          <a:spcPts val="0"/>
-                        </a:spcBef>
-                        <a:spcAft>
-                          <a:spcPts val="0"/>
-                        </a:spcAft>
-                        <a:buNone/>
-                      </a:pPr>
-                      <a:r>
-                        <a:rPr lang="en" dirty="0"/>
-                        <a:t>24/09/2022</a:t>
-                      </a:r>
-                      <a:endParaRPr dirty="0"/>
-                    </a:p>
-                  </a:txBody>
-                  <a:tcPr marL="91425" marR="91425" marT="91425" marB="91425" anchor="ctr">
-                    <a:solidFill>
-                      <a:schemeClr val="bg1"/>
-                    </a:solidFill>
-                  </a:tcPr>
-                </a:tc>
-                <a:tc vMerge="1">
-                  <a:txBody>
-                    <a:bodyPr/>
-                    <a:lstStyle/>
-                    <a:p>
-                      <a:endParaRPr lang="en-US"/>
-                    </a:p>
-                  </a:txBody>
-                  <a:tcPr/>
-                </a:tc>
-                <a:tc>
-                  <a:txBody>
-                    <a:bodyPr/>
-                    <a:lstStyle/>
-                    <a:p>
-                      <a:pPr marL="0" lvl="0" indent="0" algn="ctr" rtl="0">
-                        <a:spcBef>
-                          <a:spcPts val="0"/>
-                        </a:spcBef>
-                        <a:spcAft>
-                          <a:spcPts val="0"/>
-                        </a:spcAft>
-                        <a:buNone/>
-                      </a:pPr>
-                      <a:r>
-                        <a:rPr lang="en" dirty="0"/>
-                        <a:t>Completed</a:t>
-                      </a:r>
-                      <a:endParaRPr dirty="0"/>
-                    </a:p>
-                  </a:txBody>
-                  <a:tcPr marL="91425" marR="91425" marT="91425" marB="91425" anchor="ctr">
-                    <a:solidFill>
-                      <a:schemeClr val="bg1"/>
-                    </a:solidFill>
-                  </a:tcPr>
-                </a:tc>
-                <a:extLst>
-                  <a:ext uri="{0D108BD9-81ED-4DB2-BD59-A6C34878D82A}">
-                    <a16:rowId xmlns:a16="http://schemas.microsoft.com/office/drawing/2014/main" val="10007"/>
-                  </a:ext>
-                </a:extLst>
-              </a:tr>
-              <a:tr h="391175">
-                <a:tc>
-                  <a:txBody>
-                    <a:bodyPr/>
-                    <a:lstStyle/>
-                    <a:p>
-                      <a:pPr marL="0" lvl="0" indent="0" algn="ctr" rtl="0">
-                        <a:spcBef>
-                          <a:spcPts val="0"/>
-                        </a:spcBef>
-                        <a:spcAft>
-                          <a:spcPts val="0"/>
-                        </a:spcAft>
-                        <a:buNone/>
-                      </a:pPr>
-                      <a:r>
-                        <a:rPr lang="en"/>
-                        <a:t>12</a:t>
-                      </a:r>
-                      <a:endParaRPr/>
-                    </a:p>
-                  </a:txBody>
-                  <a:tcPr marL="91425" marR="91425" marT="91425" marB="91425" anchor="ctr">
-                    <a:solidFill>
-                      <a:schemeClr val="bg1"/>
-                    </a:solidFill>
-                  </a:tcPr>
-                </a:tc>
-                <a:tc vMerge="1">
-                  <a:txBody>
-                    <a:bodyPr/>
-                    <a:lstStyle/>
-                    <a:p>
-                      <a:endParaRPr lang="en-US"/>
-                    </a:p>
-                  </a:txBody>
-                  <a:tcPr/>
-                </a:tc>
-                <a:tc>
-                  <a:txBody>
-                    <a:bodyPr/>
-                    <a:lstStyle/>
-                    <a:p>
-                      <a:pPr marL="0" lvl="0" indent="0" algn="ctr" rtl="0">
-                        <a:spcBef>
-                          <a:spcPts val="0"/>
-                        </a:spcBef>
-                        <a:spcAft>
-                          <a:spcPts val="0"/>
-                        </a:spcAft>
-                        <a:buNone/>
-                      </a:pPr>
-                      <a:r>
-                        <a:rPr lang="en"/>
-                        <a:t>24/09/2022</a:t>
-                      </a:r>
-                      <a:endParaRPr/>
-                    </a:p>
-                  </a:txBody>
-                  <a:tcPr marL="91425" marR="91425" marT="91425" marB="91425" anchor="ctr">
-                    <a:solidFill>
-                      <a:schemeClr val="bg1"/>
-                    </a:solidFill>
-                  </a:tcPr>
-                </a:tc>
-                <a:tc>
-                  <a:txBody>
-                    <a:bodyPr/>
-                    <a:lstStyle/>
-                    <a:p>
-                      <a:pPr marL="0" lvl="0" indent="0" algn="ctr" rtl="0">
-                        <a:spcBef>
-                          <a:spcPts val="0"/>
-                        </a:spcBef>
-                        <a:spcAft>
-                          <a:spcPts val="0"/>
-                        </a:spcAft>
-                        <a:buNone/>
-                      </a:pPr>
-                      <a:r>
-                        <a:rPr lang="en" dirty="0"/>
-                        <a:t>29/09/2022</a:t>
-                      </a:r>
-                      <a:endParaRPr dirty="0"/>
-                    </a:p>
-                  </a:txBody>
-                  <a:tcPr marL="91425" marR="91425" marT="91425" marB="91425" anchor="ctr">
-                    <a:solidFill>
-                      <a:schemeClr val="bg1"/>
-                    </a:solidFill>
-                  </a:tcPr>
-                </a:tc>
-                <a:tc vMerge="1">
-                  <a:txBody>
-                    <a:bodyPr/>
-                    <a:lstStyle/>
-                    <a:p>
-                      <a:endParaRPr lang="en-US"/>
-                    </a:p>
-                  </a:txBody>
-                  <a:tcPr/>
-                </a:tc>
-                <a:tc>
-                  <a:txBody>
-                    <a:bodyPr/>
-                    <a:lstStyle/>
-                    <a:p>
-                      <a:pPr marL="0" lvl="0" indent="0" algn="ctr" rtl="0">
-                        <a:spcBef>
-                          <a:spcPts val="0"/>
-                        </a:spcBef>
-                        <a:spcAft>
-                          <a:spcPts val="0"/>
-                        </a:spcAft>
-                        <a:buNone/>
-                      </a:pPr>
-                      <a:r>
-                        <a:rPr lang="en" dirty="0"/>
-                        <a:t>Completed</a:t>
-                      </a:r>
-                      <a:endParaRPr dirty="0"/>
-                    </a:p>
-                  </a:txBody>
-                  <a:tcPr marL="91425" marR="91425" marT="91425" marB="91425" anchor="ctr">
-                    <a:solidFill>
-                      <a:schemeClr val="bg1"/>
-                    </a:solidFill>
-                  </a:tcPr>
-                </a:tc>
-                <a:extLst>
-                  <a:ext uri="{0D108BD9-81ED-4DB2-BD59-A6C34878D82A}">
-                    <a16:rowId xmlns:a16="http://schemas.microsoft.com/office/drawing/2014/main" val="10008"/>
                   </a:ext>
                 </a:extLst>
               </a:tr>
@@ -14402,7 +13473,7 @@
     </p:spTree>
     <p:extLst>
       <p:ext uri="{BB962C8B-B14F-4D97-AF65-F5344CB8AC3E}">
-        <p14:creationId xmlns:p14="http://schemas.microsoft.com/office/powerpoint/2010/main" val="3929722202"/>
+        <p14:creationId xmlns:p14="http://schemas.microsoft.com/office/powerpoint/2010/main" val="3480335941"/>
       </p:ext>
     </p:extLst>
   </p:cSld>
@@ -14466,7 +13537,7 @@
           <a:bodyPr/>
           <a:lstStyle/>
           <a:p>
-            <a:endParaRPr lang="en-US"/>
+            <a:endParaRPr lang="en-US" dirty="0"/>
           </a:p>
         </p:txBody>
       </p:sp>
@@ -14519,19 +13590,19 @@
       </p:sp>
       <p:graphicFrame>
         <p:nvGraphicFramePr>
-          <p:cNvPr id="6" name="Google Shape;402;p31"/>
+          <p:cNvPr id="7" name="Google Shape;395;p30"/>
           <p:cNvGraphicFramePr/>
           <p:nvPr>
             <p:extLst>
               <p:ext uri="{D42A27DB-BD31-4B8C-83A1-F6EECF244321}">
-                <p14:modId xmlns:p14="http://schemas.microsoft.com/office/powerpoint/2010/main" val="56936155"/>
+                <p14:modId xmlns:p14="http://schemas.microsoft.com/office/powerpoint/2010/main" val="930763484"/>
               </p:ext>
             </p:extLst>
           </p:nvPr>
         </p:nvGraphicFramePr>
         <p:xfrm>
-          <a:off x="505690" y="1219200"/>
-          <a:ext cx="8137449" cy="4301568"/>
+          <a:off x="533400" y="1244861"/>
+          <a:ext cx="8091210" cy="4368278"/>
         </p:xfrm>
         <a:graphic>
           <a:graphicData uri="http://schemas.openxmlformats.org/drawingml/2006/table">
@@ -14540,42 +13611,42 @@
                 <a:noFill/>
               </a:tblPr>
               <a:tblGrid>
-                <a:gridCol w="1345114">
+                <a:gridCol w="1315699">
                   <a:extLst>
                     <a:ext uri="{9D8B030D-6E8A-4147-A177-3AD203B41FA5}">
                       <a16:colId xmlns:a16="http://schemas.microsoft.com/office/drawing/2014/main" val="20000"/>
                     </a:ext>
                   </a:extLst>
                 </a:gridCol>
-                <a:gridCol w="1358467">
+                <a:gridCol w="1370342">
                   <a:extLst>
                     <a:ext uri="{9D8B030D-6E8A-4147-A177-3AD203B41FA5}">
                       <a16:colId xmlns:a16="http://schemas.microsoft.com/office/drawing/2014/main" val="20001"/>
                     </a:ext>
                   </a:extLst>
                 </a:gridCol>
-                <a:gridCol w="1358467">
+                <a:gridCol w="1370342">
                   <a:extLst>
                     <a:ext uri="{9D8B030D-6E8A-4147-A177-3AD203B41FA5}">
                       <a16:colId xmlns:a16="http://schemas.microsoft.com/office/drawing/2014/main" val="20002"/>
                     </a:ext>
                   </a:extLst>
                 </a:gridCol>
-                <a:gridCol w="1358467">
+                <a:gridCol w="1370342">
                   <a:extLst>
                     <a:ext uri="{9D8B030D-6E8A-4147-A177-3AD203B41FA5}">
                       <a16:colId xmlns:a16="http://schemas.microsoft.com/office/drawing/2014/main" val="20003"/>
                     </a:ext>
                   </a:extLst>
                 </a:gridCol>
-                <a:gridCol w="1358467">
+                <a:gridCol w="1370342">
                   <a:extLst>
                     <a:ext uri="{9D8B030D-6E8A-4147-A177-3AD203B41FA5}">
                       <a16:colId xmlns:a16="http://schemas.microsoft.com/office/drawing/2014/main" val="20004"/>
                     </a:ext>
                   </a:extLst>
                 </a:gridCol>
-                <a:gridCol w="1358467">
+                <a:gridCol w="1294143">
                   <a:extLst>
                     <a:ext uri="{9D8B030D-6E8A-4147-A177-3AD203B41FA5}">
                       <a16:colId xmlns:a16="http://schemas.microsoft.com/office/drawing/2014/main" val="20005"/>
@@ -14583,7 +13654,7 @@
                   </a:extLst>
                 </a:gridCol>
               </a:tblGrid>
-              <a:tr h="750846">
+              <a:tr h="812719">
                 <a:tc>
                   <a:txBody>
                     <a:bodyPr/>
@@ -14622,357 +13693,141 @@
                     </a:p>
                   </a:txBody>
                   <a:tcPr marL="91425" marR="91425" marT="91425" marB="91425" anchor="ctr">
-                    <a:lnL w="12700" cap="flat" cmpd="sng" algn="ctr">
-                      <a:solidFill>
-                        <a:schemeClr val="tx1"/>
-                      </a:solidFill>
-                      <a:prstDash val="solid"/>
-                      <a:round/>
-                      <a:headEnd type="none" w="med" len="med"/>
-                      <a:tailEnd type="none" w="med" len="med"/>
-                    </a:lnL>
-                    <a:lnR w="12700" cap="flat" cmpd="sng" algn="ctr">
-                      <a:solidFill>
-                        <a:schemeClr val="tx1"/>
-                      </a:solidFill>
-                      <a:prstDash val="solid"/>
-                      <a:round/>
-                      <a:headEnd type="none" w="med" len="med"/>
-                      <a:tailEnd type="none" w="med" len="med"/>
-                    </a:lnR>
-                    <a:lnT w="12700" cap="flat" cmpd="sng" algn="ctr">
-                      <a:solidFill>
-                        <a:schemeClr val="tx1"/>
-                      </a:solidFill>
-                      <a:prstDash val="solid"/>
-                      <a:round/>
-                      <a:headEnd type="none" w="med" len="med"/>
-                      <a:tailEnd type="none" w="med" len="med"/>
-                    </a:lnT>
-                    <a:lnB w="12700" cap="flat" cmpd="sng" algn="ctr">
-                      <a:solidFill>
-                        <a:schemeClr val="tx1"/>
-                      </a:solidFill>
-                      <a:prstDash val="solid"/>
-                      <a:round/>
-                      <a:headEnd type="none" w="med" len="med"/>
-                      <a:tailEnd type="none" w="med" len="med"/>
-                    </a:lnB>
-                    <a:solidFill>
-                      <a:schemeClr val="bg1"/>
-                    </a:solidFill>
-                  </a:tcPr>
-                </a:tc>
-                <a:tc>
-                  <a:txBody>
-                    <a:bodyPr/>
-                    <a:lstStyle/>
-                    <a:p>
-                      <a:pPr marL="0" lvl="0" indent="0" algn="ctr" rtl="0">
-                        <a:spcBef>
-                          <a:spcPts val="0"/>
-                        </a:spcBef>
-                        <a:spcAft>
-                          <a:spcPts val="0"/>
-                        </a:spcAft>
-                        <a:buNone/>
-                      </a:pPr>
-                      <a:r>
-                        <a:rPr lang="en" b="1"/>
+                    <a:solidFill>
+                      <a:schemeClr val="bg1"/>
+                    </a:solidFill>
+                  </a:tcPr>
+                </a:tc>
+                <a:tc>
+                  <a:txBody>
+                    <a:bodyPr/>
+                    <a:lstStyle/>
+                    <a:p>
+                      <a:pPr marL="0" lvl="0" indent="0" algn="ctr" rtl="0">
+                        <a:spcBef>
+                          <a:spcPts val="0"/>
+                        </a:spcBef>
+                        <a:spcAft>
+                          <a:spcPts val="0"/>
+                        </a:spcAft>
+                        <a:buNone/>
+                      </a:pPr>
+                      <a:r>
+                        <a:rPr lang="en" b="1" dirty="0"/>
                         <a:t>Task Name</a:t>
                       </a:r>
-                      <a:endParaRPr b="1"/>
-                    </a:p>
-                  </a:txBody>
-                  <a:tcPr marL="91425" marR="91425" marT="91425" marB="91425" anchor="ctr">
-                    <a:lnL w="12700" cap="flat" cmpd="sng" algn="ctr">
-                      <a:solidFill>
-                        <a:schemeClr val="tx1"/>
-                      </a:solidFill>
-                      <a:prstDash val="solid"/>
-                      <a:round/>
-                      <a:headEnd type="none" w="med" len="med"/>
-                      <a:tailEnd type="none" w="med" len="med"/>
-                    </a:lnL>
-                    <a:lnR w="12700" cap="flat" cmpd="sng" algn="ctr">
-                      <a:solidFill>
-                        <a:schemeClr val="tx1"/>
-                      </a:solidFill>
-                      <a:prstDash val="solid"/>
-                      <a:round/>
-                      <a:headEnd type="none" w="med" len="med"/>
-                      <a:tailEnd type="none" w="med" len="med"/>
-                    </a:lnR>
-                    <a:lnT w="12700" cap="flat" cmpd="sng" algn="ctr">
-                      <a:solidFill>
-                        <a:schemeClr val="tx1"/>
-                      </a:solidFill>
-                      <a:prstDash val="solid"/>
-                      <a:round/>
-                      <a:headEnd type="none" w="med" len="med"/>
-                      <a:tailEnd type="none" w="med" len="med"/>
-                    </a:lnT>
-                    <a:lnB w="12700" cap="flat" cmpd="sng" algn="ctr">
-                      <a:solidFill>
-                        <a:schemeClr val="tx1"/>
-                      </a:solidFill>
-                      <a:prstDash val="solid"/>
-                      <a:round/>
-                      <a:headEnd type="none" w="med" len="med"/>
-                      <a:tailEnd type="none" w="med" len="med"/>
-                    </a:lnB>
-                    <a:solidFill>
-                      <a:schemeClr val="bg1"/>
-                    </a:solidFill>
-                  </a:tcPr>
-                </a:tc>
-                <a:tc>
-                  <a:txBody>
-                    <a:bodyPr/>
-                    <a:lstStyle/>
-                    <a:p>
-                      <a:pPr marL="0" lvl="0" indent="0" algn="ctr" rtl="0">
-                        <a:spcBef>
-                          <a:spcPts val="0"/>
-                        </a:spcBef>
-                        <a:spcAft>
-                          <a:spcPts val="0"/>
-                        </a:spcAft>
-                        <a:buNone/>
-                      </a:pPr>
-                      <a:r>
-                        <a:rPr lang="en" b="1"/>
+                      <a:endParaRPr b="1" dirty="0"/>
+                    </a:p>
+                  </a:txBody>
+                  <a:tcPr marL="91425" marR="91425" marT="91425" marB="91425" anchor="ctr">
+                    <a:solidFill>
+                      <a:schemeClr val="bg1"/>
+                    </a:solidFill>
+                  </a:tcPr>
+                </a:tc>
+                <a:tc>
+                  <a:txBody>
+                    <a:bodyPr/>
+                    <a:lstStyle/>
+                    <a:p>
+                      <a:pPr marL="0" lvl="0" indent="0" algn="ctr" rtl="0">
+                        <a:spcBef>
+                          <a:spcPts val="0"/>
+                        </a:spcBef>
+                        <a:spcAft>
+                          <a:spcPts val="0"/>
+                        </a:spcAft>
+                        <a:buNone/>
+                      </a:pPr>
+                      <a:r>
+                        <a:rPr lang="en" b="1" dirty="0"/>
                         <a:t>Start Date</a:t>
                       </a:r>
-                      <a:endParaRPr b="1"/>
-                    </a:p>
-                  </a:txBody>
-                  <a:tcPr marL="91425" marR="91425" marT="91425" marB="91425" anchor="ctr">
-                    <a:lnL w="12700" cap="flat" cmpd="sng" algn="ctr">
-                      <a:solidFill>
-                        <a:schemeClr val="tx1"/>
-                      </a:solidFill>
-                      <a:prstDash val="solid"/>
-                      <a:round/>
-                      <a:headEnd type="none" w="med" len="med"/>
-                      <a:tailEnd type="none" w="med" len="med"/>
-                    </a:lnL>
-                    <a:lnR w="12700" cap="flat" cmpd="sng" algn="ctr">
-                      <a:solidFill>
-                        <a:schemeClr val="tx1"/>
-                      </a:solidFill>
-                      <a:prstDash val="solid"/>
-                      <a:round/>
-                      <a:headEnd type="none" w="med" len="med"/>
-                      <a:tailEnd type="none" w="med" len="med"/>
-                    </a:lnR>
-                    <a:lnT w="12700" cap="flat" cmpd="sng" algn="ctr">
-                      <a:solidFill>
-                        <a:schemeClr val="tx1"/>
-                      </a:solidFill>
-                      <a:prstDash val="solid"/>
-                      <a:round/>
-                      <a:headEnd type="none" w="med" len="med"/>
-                      <a:tailEnd type="none" w="med" len="med"/>
-                    </a:lnT>
-                    <a:lnB w="12700" cap="flat" cmpd="sng" algn="ctr">
-                      <a:solidFill>
-                        <a:schemeClr val="tx1"/>
-                      </a:solidFill>
-                      <a:prstDash val="solid"/>
-                      <a:round/>
-                      <a:headEnd type="none" w="med" len="med"/>
-                      <a:tailEnd type="none" w="med" len="med"/>
-                    </a:lnB>
-                    <a:solidFill>
-                      <a:schemeClr val="bg1"/>
-                    </a:solidFill>
-                  </a:tcPr>
-                </a:tc>
-                <a:tc>
-                  <a:txBody>
-                    <a:bodyPr/>
-                    <a:lstStyle/>
-                    <a:p>
-                      <a:pPr marL="0" lvl="0" indent="0" algn="ctr" rtl="0">
-                        <a:spcBef>
-                          <a:spcPts val="0"/>
-                        </a:spcBef>
-                        <a:spcAft>
-                          <a:spcPts val="0"/>
-                        </a:spcAft>
-                        <a:buNone/>
-                      </a:pPr>
-                      <a:r>
-                        <a:rPr lang="en" b="1"/>
+                      <a:endParaRPr b="1" dirty="0"/>
+                    </a:p>
+                  </a:txBody>
+                  <a:tcPr marL="91425" marR="91425" marT="91425" marB="91425" anchor="ctr">
+                    <a:solidFill>
+                      <a:schemeClr val="bg1"/>
+                    </a:solidFill>
+                  </a:tcPr>
+                </a:tc>
+                <a:tc>
+                  <a:txBody>
+                    <a:bodyPr/>
+                    <a:lstStyle/>
+                    <a:p>
+                      <a:pPr marL="0" lvl="0" indent="0" algn="ctr" rtl="0">
+                        <a:spcBef>
+                          <a:spcPts val="0"/>
+                        </a:spcBef>
+                        <a:spcAft>
+                          <a:spcPts val="0"/>
+                        </a:spcAft>
+                        <a:buNone/>
+                      </a:pPr>
+                      <a:r>
+                        <a:rPr lang="en" b="1" dirty="0"/>
                         <a:t>End Date</a:t>
                       </a:r>
-                      <a:endParaRPr b="1"/>
-                    </a:p>
-                  </a:txBody>
-                  <a:tcPr marL="91425" marR="91425" marT="91425" marB="91425" anchor="ctr">
-                    <a:lnL w="12700" cap="flat" cmpd="sng" algn="ctr">
-                      <a:solidFill>
-                        <a:schemeClr val="tx1"/>
-                      </a:solidFill>
-                      <a:prstDash val="solid"/>
-                      <a:round/>
-                      <a:headEnd type="none" w="med" len="med"/>
-                      <a:tailEnd type="none" w="med" len="med"/>
-                    </a:lnL>
-                    <a:lnR w="12700" cap="flat" cmpd="sng" algn="ctr">
-                      <a:solidFill>
-                        <a:schemeClr val="tx1"/>
-                      </a:solidFill>
-                      <a:prstDash val="solid"/>
-                      <a:round/>
-                      <a:headEnd type="none" w="med" len="med"/>
-                      <a:tailEnd type="none" w="med" len="med"/>
-                    </a:lnR>
-                    <a:lnT w="12700" cap="flat" cmpd="sng" algn="ctr">
-                      <a:solidFill>
-                        <a:schemeClr val="tx1"/>
-                      </a:solidFill>
-                      <a:prstDash val="solid"/>
-                      <a:round/>
-                      <a:headEnd type="none" w="med" len="med"/>
-                      <a:tailEnd type="none" w="med" len="med"/>
-                    </a:lnT>
-                    <a:lnB w="12700" cap="flat" cmpd="sng" algn="ctr">
-                      <a:solidFill>
-                        <a:schemeClr val="tx1"/>
-                      </a:solidFill>
-                      <a:prstDash val="solid"/>
-                      <a:round/>
-                      <a:headEnd type="none" w="med" len="med"/>
-                      <a:tailEnd type="none" w="med" len="med"/>
-                    </a:lnB>
-                    <a:solidFill>
-                      <a:schemeClr val="bg1"/>
-                    </a:solidFill>
-                  </a:tcPr>
-                </a:tc>
-                <a:tc>
-                  <a:txBody>
-                    <a:bodyPr/>
-                    <a:lstStyle/>
-                    <a:p>
-                      <a:pPr marL="0" lvl="0" indent="0" algn="ctr" rtl="0">
-                        <a:spcBef>
-                          <a:spcPts val="0"/>
-                        </a:spcBef>
-                        <a:spcAft>
-                          <a:spcPts val="0"/>
-                        </a:spcAft>
-                        <a:buNone/>
-                      </a:pPr>
-                      <a:r>
-                        <a:rPr lang="en" b="1"/>
+                      <a:endParaRPr b="1" dirty="0"/>
+                    </a:p>
+                  </a:txBody>
+                  <a:tcPr marL="91425" marR="91425" marT="91425" marB="91425" anchor="ctr">
+                    <a:solidFill>
+                      <a:schemeClr val="bg1"/>
+                    </a:solidFill>
+                  </a:tcPr>
+                </a:tc>
+                <a:tc>
+                  <a:txBody>
+                    <a:bodyPr/>
+                    <a:lstStyle/>
+                    <a:p>
+                      <a:pPr marL="0" lvl="0" indent="0" algn="ctr" rtl="0">
+                        <a:spcBef>
+                          <a:spcPts val="0"/>
+                        </a:spcBef>
+                        <a:spcAft>
+                          <a:spcPts val="0"/>
+                        </a:spcAft>
+                        <a:buNone/>
+                      </a:pPr>
+                      <a:r>
+                        <a:rPr lang="en" b="1" dirty="0"/>
                         <a:t>   Days </a:t>
                       </a:r>
-                      <a:endParaRPr b="1"/>
-                    </a:p>
-                  </a:txBody>
-                  <a:tcPr marL="91425" marR="91425" marT="91425" marB="91425" anchor="ctr">
-                    <a:lnL w="12700" cap="flat" cmpd="sng" algn="ctr">
-                      <a:solidFill>
-                        <a:schemeClr val="tx1"/>
-                      </a:solidFill>
-                      <a:prstDash val="solid"/>
-                      <a:round/>
-                      <a:headEnd type="none" w="med" len="med"/>
-                      <a:tailEnd type="none" w="med" len="med"/>
-                    </a:lnL>
-                    <a:lnR w="12700" cap="flat" cmpd="sng" algn="ctr">
-                      <a:solidFill>
-                        <a:schemeClr val="tx1"/>
-                      </a:solidFill>
-                      <a:prstDash val="solid"/>
-                      <a:round/>
-                      <a:headEnd type="none" w="med" len="med"/>
-                      <a:tailEnd type="none" w="med" len="med"/>
-                    </a:lnR>
-                    <a:lnT w="12700" cap="flat" cmpd="sng" algn="ctr">
-                      <a:solidFill>
-                        <a:schemeClr val="tx1"/>
-                      </a:solidFill>
-                      <a:prstDash val="solid"/>
-                      <a:round/>
-                      <a:headEnd type="none" w="med" len="med"/>
-                      <a:tailEnd type="none" w="med" len="med"/>
-                    </a:lnT>
-                    <a:lnB w="12700" cap="flat" cmpd="sng" algn="ctr">
-                      <a:solidFill>
-                        <a:schemeClr val="tx1"/>
-                      </a:solidFill>
-                      <a:prstDash val="solid"/>
-                      <a:round/>
-                      <a:headEnd type="none" w="med" len="med"/>
-                      <a:tailEnd type="none" w="med" len="med"/>
-                    </a:lnB>
-                    <a:solidFill>
-                      <a:schemeClr val="bg1"/>
-                    </a:solidFill>
-                  </a:tcPr>
-                </a:tc>
-                <a:tc>
-                  <a:txBody>
-                    <a:bodyPr/>
-                    <a:lstStyle/>
-                    <a:p>
-                      <a:pPr marL="0" lvl="0" indent="0" algn="ctr" rtl="0">
-                        <a:spcBef>
-                          <a:spcPts val="0"/>
-                        </a:spcBef>
-                        <a:spcAft>
-                          <a:spcPts val="0"/>
-                        </a:spcAft>
-                        <a:buNone/>
-                      </a:pPr>
-                      <a:r>
-                        <a:rPr lang="en" b="1"/>
+                      <a:endParaRPr b="1" dirty="0"/>
+                    </a:p>
+                  </a:txBody>
+                  <a:tcPr marL="91425" marR="91425" marT="91425" marB="91425" anchor="ctr">
+                    <a:solidFill>
+                      <a:schemeClr val="bg1"/>
+                    </a:solidFill>
+                  </a:tcPr>
+                </a:tc>
+                <a:tc>
+                  <a:txBody>
+                    <a:bodyPr/>
+                    <a:lstStyle/>
+                    <a:p>
+                      <a:pPr marL="0" lvl="0" indent="0" algn="ctr" rtl="0">
+                        <a:spcBef>
+                          <a:spcPts val="0"/>
+                        </a:spcBef>
+                        <a:spcAft>
+                          <a:spcPts val="0"/>
+                        </a:spcAft>
+                        <a:buNone/>
+                      </a:pPr>
+                      <a:r>
+                        <a:rPr lang="en" b="1" dirty="0"/>
                         <a:t>  Status</a:t>
                       </a:r>
-                      <a:endParaRPr b="1"/>
-                    </a:p>
-                  </a:txBody>
-                  <a:tcPr marL="91425" marR="91425" marT="91425" marB="91425" anchor="ctr">
-                    <a:lnL w="12700" cap="flat" cmpd="sng" algn="ctr">
-                      <a:solidFill>
-                        <a:schemeClr val="tx1"/>
-                      </a:solidFill>
-                      <a:prstDash val="solid"/>
-                      <a:round/>
-                      <a:headEnd type="none" w="med" len="med"/>
-                      <a:tailEnd type="none" w="med" len="med"/>
-                    </a:lnL>
-                    <a:lnR w="12700" cap="flat" cmpd="sng" algn="ctr">
-                      <a:solidFill>
-                        <a:schemeClr val="tx1"/>
-                      </a:solidFill>
-                      <a:prstDash val="solid"/>
-                      <a:round/>
-                      <a:headEnd type="none" w="med" len="med"/>
-                      <a:tailEnd type="none" w="med" len="med"/>
-                    </a:lnR>
-                    <a:lnT w="12700" cap="flat" cmpd="sng" algn="ctr">
-                      <a:solidFill>
-                        <a:schemeClr val="tx1"/>
-                      </a:solidFill>
-                      <a:prstDash val="solid"/>
-                      <a:round/>
-                      <a:headEnd type="none" w="med" len="med"/>
-                      <a:tailEnd type="none" w="med" len="med"/>
-                    </a:lnT>
-                    <a:lnB w="12700" cap="flat" cmpd="sng" algn="ctr">
-                      <a:solidFill>
-                        <a:schemeClr val="tx1"/>
-                      </a:solidFill>
-                      <a:prstDash val="solid"/>
-                      <a:round/>
-                      <a:headEnd type="none" w="med" len="med"/>
-                      <a:tailEnd type="none" w="med" len="med"/>
-                    </a:lnB>
+                      <a:endParaRPr b="1" dirty="0"/>
+                    </a:p>
+                  </a:txBody>
+                  <a:tcPr marL="91425" marR="91425" marT="91425" marB="91425" anchor="ctr">
                     <a:solidFill>
                       <a:schemeClr val="bg1"/>
                     </a:solidFill>
@@ -14984,8 +13839,132 @@
                   </a:ext>
                 </a:extLst>
               </a:tr>
-              <a:tr h="591787">
-                <a:tc>
+              <a:tr h="507937">
+                <a:tc>
+                  <a:txBody>
+                    <a:bodyPr/>
+                    <a:lstStyle/>
+                    <a:p>
+                      <a:pPr marL="0" lvl="0" indent="0" algn="ctr" rtl="0">
+                        <a:spcBef>
+                          <a:spcPts val="0"/>
+                        </a:spcBef>
+                        <a:spcAft>
+                          <a:spcPts val="0"/>
+                        </a:spcAft>
+                        <a:buNone/>
+                      </a:pPr>
+                      <a:r>
+                        <a:rPr lang="en" dirty="0"/>
+                        <a:t>1</a:t>
+                      </a:r>
+                      <a:endParaRPr dirty="0"/>
+                    </a:p>
+                  </a:txBody>
+                  <a:tcPr marL="91425" marR="91425" marT="91425" marB="91425" anchor="ctr">
+                    <a:solidFill>
+                      <a:schemeClr val="bg1"/>
+                    </a:solidFill>
+                  </a:tcPr>
+                </a:tc>
+                <a:tc rowSpan="3">
+                  <a:txBody>
+                    <a:bodyPr/>
+                    <a:lstStyle/>
+                    <a:p>
+                      <a:pPr marL="0" lvl="0" indent="0" algn="ctr" rtl="0">
+                        <a:spcBef>
+                          <a:spcPts val="0"/>
+                        </a:spcBef>
+                        <a:spcAft>
+                          <a:spcPts val="0"/>
+                        </a:spcAft>
+                        <a:buNone/>
+                      </a:pPr>
+                      <a:r>
+                        <a:rPr lang="en" dirty="0"/>
+                        <a:t> Sprint 1</a:t>
+                      </a:r>
+                      <a:endParaRPr dirty="0"/>
+                    </a:p>
+                    <a:p>
+                      <a:pPr marL="0" lvl="0" indent="0" algn="ctr" rtl="0">
+                        <a:spcBef>
+                          <a:spcPts val="0"/>
+                        </a:spcBef>
+                        <a:spcAft>
+                          <a:spcPts val="0"/>
+                        </a:spcAft>
+                        <a:buNone/>
+                      </a:pPr>
+                      <a:r>
+                        <a:rPr lang="en" dirty="0"/>
+                        <a:t>     </a:t>
+                      </a:r>
+                      <a:endParaRPr dirty="0"/>
+                    </a:p>
+                  </a:txBody>
+                  <a:tcPr marL="91425" marR="91425" marT="91425" marB="91425" anchor="ctr">
+                    <a:solidFill>
+                      <a:schemeClr val="bg1"/>
+                    </a:solidFill>
+                  </a:tcPr>
+                </a:tc>
+                <a:tc>
+                  <a:txBody>
+                    <a:bodyPr/>
+                    <a:lstStyle/>
+                    <a:p>
+                      <a:pPr marL="0" lvl="0" indent="0" algn="ctr" rtl="0">
+                        <a:spcBef>
+                          <a:spcPts val="0"/>
+                        </a:spcBef>
+                        <a:spcAft>
+                          <a:spcPts val="0"/>
+                        </a:spcAft>
+                        <a:buNone/>
+                      </a:pPr>
+                      <a:r>
+                        <a:rPr lang="en" dirty="0"/>
+                        <a:t>22/08/2022</a:t>
+                      </a:r>
+                      <a:endParaRPr dirty="0"/>
+                    </a:p>
+                  </a:txBody>
+                  <a:tcPr marL="91425" marR="91425" marT="91425" marB="91425" anchor="ctr">
+                    <a:solidFill>
+                      <a:schemeClr val="bg1"/>
+                    </a:solidFill>
+                  </a:tcPr>
+                </a:tc>
+                <a:tc>
+                  <a:txBody>
+                    <a:bodyPr/>
+                    <a:lstStyle/>
+                    <a:p>
+                      <a:pPr marL="0" lvl="0" indent="0" algn="ctr" rtl="0">
+                        <a:spcBef>
+                          <a:spcPts val="0"/>
+                        </a:spcBef>
+                        <a:spcAft>
+                          <a:spcPts val="0"/>
+                        </a:spcAft>
+                        <a:buNone/>
+                      </a:pPr>
+                      <a:r>
+                        <a:rPr lang="en" dirty="0"/>
+                        <a:t>24/08/2022</a:t>
+                      </a:r>
+                      <a:endParaRPr dirty="0"/>
+                    </a:p>
+                  </a:txBody>
+                  <a:tcPr marL="91425" marR="91425" marT="91425" marB="91425" anchor="ctr">
+                    <a:solidFill>
+                      <a:schemeClr val="bg1"/>
+                    </a:solidFill>
+                  </a:tcPr>
+                </a:tc>
+                <a:tc rowSpan="3">
                   <a:txBody>
                     <a:bodyPr/>
                     <a:lstStyle/>
@@ -15007,357 +13986,33 @@
                     </a:p>
                   </a:txBody>
                   <a:tcPr marL="91425" marR="91425" marT="91425" marB="91425" anchor="ctr">
-                    <a:lnL w="12700" cap="flat" cmpd="sng" algn="ctr">
-                      <a:solidFill>
-                        <a:schemeClr val="tx1"/>
-                      </a:solidFill>
-                      <a:prstDash val="solid"/>
-                      <a:round/>
-                      <a:headEnd type="none" w="med" len="med"/>
-                      <a:tailEnd type="none" w="med" len="med"/>
-                    </a:lnL>
-                    <a:lnR w="12700" cap="flat" cmpd="sng" algn="ctr">
-                      <a:solidFill>
-                        <a:schemeClr val="tx1"/>
-                      </a:solidFill>
-                      <a:prstDash val="solid"/>
-                      <a:round/>
-                      <a:headEnd type="none" w="med" len="med"/>
-                      <a:tailEnd type="none" w="med" len="med"/>
-                    </a:lnR>
-                    <a:lnT w="12700" cap="flat" cmpd="sng" algn="ctr">
-                      <a:solidFill>
-                        <a:schemeClr val="tx1"/>
-                      </a:solidFill>
-                      <a:prstDash val="solid"/>
-                      <a:round/>
-                      <a:headEnd type="none" w="med" len="med"/>
-                      <a:tailEnd type="none" w="med" len="med"/>
-                    </a:lnT>
-                    <a:lnB w="12700" cap="flat" cmpd="sng" algn="ctr">
-                      <a:solidFill>
-                        <a:schemeClr val="tx1"/>
-                      </a:solidFill>
-                      <a:prstDash val="solid"/>
-                      <a:round/>
-                      <a:headEnd type="none" w="med" len="med"/>
-                      <a:tailEnd type="none" w="med" len="med"/>
-                    </a:lnB>
-                    <a:solidFill>
-                      <a:schemeClr val="bg1"/>
-                    </a:solidFill>
-                  </a:tcPr>
-                </a:tc>
-                <a:tc rowSpan="3">
-                  <a:txBody>
-                    <a:bodyPr/>
-                    <a:lstStyle/>
-                    <a:p>
-                      <a:pPr marL="0" lvl="0" indent="0" algn="ctr" rtl="0">
-                        <a:spcBef>
-                          <a:spcPts val="0"/>
-                        </a:spcBef>
-                        <a:spcAft>
-                          <a:spcPts val="0"/>
-                        </a:spcAft>
-                        <a:buNone/>
-                      </a:pPr>
-                      <a:r>
-                        <a:rPr lang="en" dirty="0"/>
-                        <a:t>SPRINT 3</a:t>
+                    <a:solidFill>
+                      <a:schemeClr val="bg1"/>
+                    </a:solidFill>
+                  </a:tcPr>
+                </a:tc>
+                <a:tc>
+                  <a:txBody>
+                    <a:bodyPr/>
+                    <a:lstStyle/>
+                    <a:p>
+                      <a:pPr marL="0" lvl="0" indent="0" algn="ctr" rtl="0">
+                        <a:spcBef>
+                          <a:spcPts val="0"/>
+                        </a:spcBef>
+                        <a:spcAft>
+                          <a:spcPts val="0"/>
+                        </a:spcAft>
+                        <a:buNone/>
+                      </a:pPr>
+                      <a:r>
+                        <a:rPr lang="en-IN" dirty="0"/>
+                        <a:t>Planned</a:t>
                       </a:r>
                       <a:endParaRPr dirty="0"/>
                     </a:p>
                   </a:txBody>
                   <a:tcPr marL="91425" marR="91425" marT="91425" marB="91425" anchor="ctr">
-                    <a:lnL w="12700" cap="flat" cmpd="sng" algn="ctr">
-                      <a:solidFill>
-                        <a:schemeClr val="tx1"/>
-                      </a:solidFill>
-                      <a:prstDash val="solid"/>
-                      <a:round/>
-                      <a:headEnd type="none" w="med" len="med"/>
-                      <a:tailEnd type="none" w="med" len="med"/>
-                    </a:lnL>
-                    <a:lnR w="12700" cap="flat" cmpd="sng" algn="ctr">
-                      <a:solidFill>
-                        <a:schemeClr val="tx1"/>
-                      </a:solidFill>
-                      <a:prstDash val="solid"/>
-                      <a:round/>
-                      <a:headEnd type="none" w="med" len="med"/>
-                      <a:tailEnd type="none" w="med" len="med"/>
-                    </a:lnR>
-                    <a:lnT w="12700" cap="flat" cmpd="sng" algn="ctr">
-                      <a:solidFill>
-                        <a:schemeClr val="tx1"/>
-                      </a:solidFill>
-                      <a:prstDash val="solid"/>
-                      <a:round/>
-                      <a:headEnd type="none" w="med" len="med"/>
-                      <a:tailEnd type="none" w="med" len="med"/>
-                    </a:lnT>
-                    <a:lnB w="12700" cap="flat" cmpd="sng" algn="ctr">
-                      <a:solidFill>
-                        <a:schemeClr val="tx1"/>
-                      </a:solidFill>
-                      <a:prstDash val="solid"/>
-                      <a:round/>
-                      <a:headEnd type="none" w="med" len="med"/>
-                      <a:tailEnd type="none" w="med" len="med"/>
-                    </a:lnB>
-                    <a:solidFill>
-                      <a:schemeClr val="bg1"/>
-                    </a:solidFill>
-                  </a:tcPr>
-                </a:tc>
-                <a:tc>
-                  <a:txBody>
-                    <a:bodyPr/>
-                    <a:lstStyle/>
-                    <a:p>
-                      <a:pPr marL="0" lvl="0" indent="0" algn="ctr" rtl="0">
-                        <a:spcBef>
-                          <a:spcPts val="0"/>
-                        </a:spcBef>
-                        <a:spcAft>
-                          <a:spcPts val="0"/>
-                        </a:spcAft>
-                        <a:buNone/>
-                      </a:pPr>
-                      <a:r>
-                        <a:rPr lang="en"/>
-                        <a:t>03/10/2022</a:t>
-                      </a:r>
-                      <a:endParaRPr/>
-                    </a:p>
-                  </a:txBody>
-                  <a:tcPr marL="91425" marR="91425" marT="91425" marB="91425" anchor="ctr">
-                    <a:lnL w="12700" cap="flat" cmpd="sng" algn="ctr">
-                      <a:solidFill>
-                        <a:schemeClr val="tx1"/>
-                      </a:solidFill>
-                      <a:prstDash val="solid"/>
-                      <a:round/>
-                      <a:headEnd type="none" w="med" len="med"/>
-                      <a:tailEnd type="none" w="med" len="med"/>
-                    </a:lnL>
-                    <a:lnR w="12700" cap="flat" cmpd="sng" algn="ctr">
-                      <a:solidFill>
-                        <a:schemeClr val="tx1"/>
-                      </a:solidFill>
-                      <a:prstDash val="solid"/>
-                      <a:round/>
-                      <a:headEnd type="none" w="med" len="med"/>
-                      <a:tailEnd type="none" w="med" len="med"/>
-                    </a:lnR>
-                    <a:lnT w="12700" cap="flat" cmpd="sng" algn="ctr">
-                      <a:solidFill>
-                        <a:schemeClr val="tx1"/>
-                      </a:solidFill>
-                      <a:prstDash val="solid"/>
-                      <a:round/>
-                      <a:headEnd type="none" w="med" len="med"/>
-                      <a:tailEnd type="none" w="med" len="med"/>
-                    </a:lnT>
-                    <a:lnB w="12700" cap="flat" cmpd="sng" algn="ctr">
-                      <a:solidFill>
-                        <a:schemeClr val="tx1"/>
-                      </a:solidFill>
-                      <a:prstDash val="solid"/>
-                      <a:round/>
-                      <a:headEnd type="none" w="med" len="med"/>
-                      <a:tailEnd type="none" w="med" len="med"/>
-                    </a:lnB>
-                    <a:solidFill>
-                      <a:schemeClr val="bg1"/>
-                    </a:solidFill>
-                  </a:tcPr>
-                </a:tc>
-                <a:tc>
-                  <a:txBody>
-                    <a:bodyPr/>
-                    <a:lstStyle/>
-                    <a:p>
-                      <a:pPr marL="0" lvl="0" indent="0" algn="ctr" rtl="0">
-                        <a:spcBef>
-                          <a:spcPts val="0"/>
-                        </a:spcBef>
-                        <a:spcAft>
-                          <a:spcPts val="0"/>
-                        </a:spcAft>
-                        <a:buNone/>
-                      </a:pPr>
-                      <a:r>
-                        <a:rPr lang="en" dirty="0"/>
-                        <a:t>06/10/2022</a:t>
-                      </a:r>
-                      <a:endParaRPr dirty="0"/>
-                    </a:p>
-                  </a:txBody>
-                  <a:tcPr marL="91425" marR="91425" marT="91425" marB="91425" anchor="ctr">
-                    <a:lnL w="12700" cap="flat" cmpd="sng" algn="ctr">
-                      <a:solidFill>
-                        <a:schemeClr val="tx1"/>
-                      </a:solidFill>
-                      <a:prstDash val="solid"/>
-                      <a:round/>
-                      <a:headEnd type="none" w="med" len="med"/>
-                      <a:tailEnd type="none" w="med" len="med"/>
-                    </a:lnL>
-                    <a:lnR w="12700" cap="flat" cmpd="sng" algn="ctr">
-                      <a:solidFill>
-                        <a:schemeClr val="tx1"/>
-                      </a:solidFill>
-                      <a:prstDash val="solid"/>
-                      <a:round/>
-                      <a:headEnd type="none" w="med" len="med"/>
-                      <a:tailEnd type="none" w="med" len="med"/>
-                    </a:lnR>
-                    <a:lnT w="12700" cap="flat" cmpd="sng" algn="ctr">
-                      <a:solidFill>
-                        <a:schemeClr val="tx1"/>
-                      </a:solidFill>
-                      <a:prstDash val="solid"/>
-                      <a:round/>
-                      <a:headEnd type="none" w="med" len="med"/>
-                      <a:tailEnd type="none" w="med" len="med"/>
-                    </a:lnT>
-                    <a:lnB w="12700" cap="flat" cmpd="sng" algn="ctr">
-                      <a:solidFill>
-                        <a:schemeClr val="tx1"/>
-                      </a:solidFill>
-                      <a:prstDash val="solid"/>
-                      <a:round/>
-                      <a:headEnd type="none" w="med" len="med"/>
-                      <a:tailEnd type="none" w="med" len="med"/>
-                    </a:lnB>
-                    <a:solidFill>
-                      <a:schemeClr val="bg1"/>
-                    </a:solidFill>
-                  </a:tcPr>
-                </a:tc>
-                <a:tc rowSpan="3">
-                  <a:txBody>
-                    <a:bodyPr/>
-                    <a:lstStyle/>
-                    <a:p>
-                      <a:pPr marL="0" lvl="0" indent="0" algn="ctr" rtl="0">
-                        <a:spcBef>
-                          <a:spcPts val="0"/>
-                        </a:spcBef>
-                        <a:spcAft>
-                          <a:spcPts val="0"/>
-                        </a:spcAft>
-                        <a:buNone/>
-                      </a:pPr>
-                      <a:r>
-                        <a:rPr lang="en" dirty="0"/>
-                        <a:t>  14</a:t>
-                      </a:r>
-                      <a:endParaRPr dirty="0"/>
-                    </a:p>
-                  </a:txBody>
-                  <a:tcPr marL="91425" marR="91425" marT="91425" marB="91425" anchor="ctr">
-                    <a:lnL w="12700" cap="flat" cmpd="sng" algn="ctr">
-                      <a:solidFill>
-                        <a:schemeClr val="tx1"/>
-                      </a:solidFill>
-                      <a:prstDash val="solid"/>
-                      <a:round/>
-                      <a:headEnd type="none" w="med" len="med"/>
-                      <a:tailEnd type="none" w="med" len="med"/>
-                    </a:lnL>
-                    <a:lnR w="12700" cap="flat" cmpd="sng" algn="ctr">
-                      <a:solidFill>
-                        <a:schemeClr val="tx1"/>
-                      </a:solidFill>
-                      <a:prstDash val="solid"/>
-                      <a:round/>
-                      <a:headEnd type="none" w="med" len="med"/>
-                      <a:tailEnd type="none" w="med" len="med"/>
-                    </a:lnR>
-                    <a:lnT w="12700" cap="flat" cmpd="sng" algn="ctr">
-                      <a:solidFill>
-                        <a:schemeClr val="tx1"/>
-                      </a:solidFill>
-                      <a:prstDash val="solid"/>
-                      <a:round/>
-                      <a:headEnd type="none" w="med" len="med"/>
-                      <a:tailEnd type="none" w="med" len="med"/>
-                    </a:lnT>
-                    <a:lnB w="12700" cap="flat" cmpd="sng" algn="ctr">
-                      <a:solidFill>
-                        <a:schemeClr val="tx1"/>
-                      </a:solidFill>
-                      <a:prstDash val="solid"/>
-                      <a:round/>
-                      <a:headEnd type="none" w="med" len="med"/>
-                      <a:tailEnd type="none" w="med" len="med"/>
-                    </a:lnB>
-                    <a:solidFill>
-                      <a:schemeClr val="bg1"/>
-                    </a:solidFill>
-                  </a:tcPr>
-                </a:tc>
-                <a:tc>
-                  <a:txBody>
-                    <a:bodyPr/>
-                    <a:lstStyle/>
-                    <a:p>
-                      <a:pPr marL="0" lvl="0" indent="0" algn="ctr" rtl="0">
-                        <a:spcBef>
-                          <a:spcPts val="0"/>
-                        </a:spcBef>
-                        <a:spcAft>
-                          <a:spcPts val="0"/>
-                        </a:spcAft>
-                        <a:buNone/>
-                      </a:pPr>
-                      <a:r>
-                        <a:rPr lang="en"/>
-                        <a:t>Completed</a:t>
-                      </a:r>
-                      <a:endParaRPr/>
-                    </a:p>
-                  </a:txBody>
-                  <a:tcPr marL="91425" marR="91425" marT="91425" marB="91425" anchor="ctr">
-                    <a:lnL w="12700" cap="flat" cmpd="sng" algn="ctr">
-                      <a:solidFill>
-                        <a:schemeClr val="tx1"/>
-                      </a:solidFill>
-                      <a:prstDash val="solid"/>
-                      <a:round/>
-                      <a:headEnd type="none" w="med" len="med"/>
-                      <a:tailEnd type="none" w="med" len="med"/>
-                    </a:lnL>
-                    <a:lnR w="12700" cap="flat" cmpd="sng" algn="ctr">
-                      <a:solidFill>
-                        <a:schemeClr val="tx1"/>
-                      </a:solidFill>
-                      <a:prstDash val="solid"/>
-                      <a:round/>
-                      <a:headEnd type="none" w="med" len="med"/>
-                      <a:tailEnd type="none" w="med" len="med"/>
-                    </a:lnR>
-                    <a:lnT w="12700" cap="flat" cmpd="sng" algn="ctr">
-                      <a:solidFill>
-                        <a:schemeClr val="tx1"/>
-                      </a:solidFill>
-                      <a:prstDash val="solid"/>
-                      <a:round/>
-                      <a:headEnd type="none" w="med" len="med"/>
-                      <a:tailEnd type="none" w="med" len="med"/>
-                    </a:lnT>
-                    <a:lnB w="12700" cap="flat" cmpd="sng" algn="ctr">
-                      <a:solidFill>
-                        <a:schemeClr val="tx1"/>
-                      </a:solidFill>
-                      <a:prstDash val="solid"/>
-                      <a:round/>
-                      <a:headEnd type="none" w="med" len="med"/>
-                      <a:tailEnd type="none" w="med" len="med"/>
-                    </a:lnB>
                     <a:solidFill>
                       <a:schemeClr val="bg1"/>
                     </a:solidFill>
@@ -15369,7 +14024,7 @@
                   </a:ext>
                 </a:extLst>
               </a:tr>
-              <a:tr h="591787">
+              <a:tr h="507937">
                 <a:tc>
                   <a:txBody>
                     <a:bodyPr/>
@@ -15386,48 +14041,12 @@
                       </a:pPr>
                       <a:r>
                         <a:rPr lang="en" dirty="0"/>
-                        <a:t>6</a:t>
+                        <a:t>2</a:t>
                       </a:r>
                       <a:endParaRPr dirty="0"/>
                     </a:p>
                   </a:txBody>
                   <a:tcPr marL="91425" marR="91425" marT="91425" marB="91425" anchor="ctr">
-                    <a:lnL w="12700" cap="flat" cmpd="sng" algn="ctr">
-                      <a:solidFill>
-                        <a:schemeClr val="tx1"/>
-                      </a:solidFill>
-                      <a:prstDash val="solid"/>
-                      <a:round/>
-                      <a:headEnd type="none" w="med" len="med"/>
-                      <a:tailEnd type="none" w="med" len="med"/>
-                    </a:lnL>
-                    <a:lnR w="12700" cap="flat" cmpd="sng" algn="ctr">
-                      <a:solidFill>
-                        <a:schemeClr val="tx1"/>
-                      </a:solidFill>
-                      <a:prstDash val="solid"/>
-                      <a:round/>
-                      <a:headEnd type="none" w="med" len="med"/>
-                      <a:tailEnd type="none" w="med" len="med"/>
-                    </a:lnR>
-                    <a:lnT w="12700" cap="flat" cmpd="sng" algn="ctr">
-                      <a:solidFill>
-                        <a:schemeClr val="tx1"/>
-                      </a:solidFill>
-                      <a:prstDash val="solid"/>
-                      <a:round/>
-                      <a:headEnd type="none" w="med" len="med"/>
-                      <a:tailEnd type="none" w="med" len="med"/>
-                    </a:lnT>
-                    <a:lnB w="12700" cap="flat" cmpd="sng" algn="ctr">
-                      <a:solidFill>
-                        <a:schemeClr val="tx1"/>
-                      </a:solidFill>
-                      <a:prstDash val="solid"/>
-                      <a:round/>
-                      <a:headEnd type="none" w="med" len="med"/>
-                      <a:tailEnd type="none" w="med" len="med"/>
-                    </a:lnB>
                     <a:solidFill>
                       <a:schemeClr val="bg1"/>
                     </a:solidFill>
@@ -15459,111 +14078,39 @@
                       </a:pPr>
                       <a:r>
                         <a:rPr lang="en" dirty="0"/>
-                        <a:t>07/10/2022</a:t>
+                        <a:t>25/08/2022</a:t>
                       </a:r>
                       <a:endParaRPr dirty="0"/>
                     </a:p>
                   </a:txBody>
                   <a:tcPr marL="91425" marR="91425" marT="91425" marB="91425" anchor="ctr">
-                    <a:lnL w="12700" cap="flat" cmpd="sng" algn="ctr">
-                      <a:solidFill>
-                        <a:schemeClr val="tx1"/>
-                      </a:solidFill>
-                      <a:prstDash val="solid"/>
-                      <a:round/>
-                      <a:headEnd type="none" w="med" len="med"/>
-                      <a:tailEnd type="none" w="med" len="med"/>
-                    </a:lnL>
-                    <a:lnR w="12700" cap="flat" cmpd="sng" algn="ctr">
-                      <a:solidFill>
-                        <a:schemeClr val="tx1"/>
-                      </a:solidFill>
-                      <a:prstDash val="solid"/>
-                      <a:round/>
-                      <a:headEnd type="none" w="med" len="med"/>
-                      <a:tailEnd type="none" w="med" len="med"/>
-                    </a:lnR>
-                    <a:lnT w="12700" cap="flat" cmpd="sng" algn="ctr">
-                      <a:solidFill>
-                        <a:schemeClr val="tx1"/>
-                      </a:solidFill>
-                      <a:prstDash val="solid"/>
-                      <a:round/>
-                      <a:headEnd type="none" w="med" len="med"/>
-                      <a:tailEnd type="none" w="med" len="med"/>
-                    </a:lnT>
-                    <a:lnB w="12700" cap="flat" cmpd="sng" algn="ctr">
-                      <a:solidFill>
-                        <a:schemeClr val="tx1"/>
-                      </a:solidFill>
-                      <a:prstDash val="solid"/>
-                      <a:round/>
-                      <a:headEnd type="none" w="med" len="med"/>
-                      <a:tailEnd type="none" w="med" len="med"/>
-                    </a:lnB>
-                    <a:solidFill>
-                      <a:schemeClr val="bg1"/>
-                    </a:solidFill>
-                  </a:tcPr>
-                </a:tc>
-                <a:tc>
-                  <a:txBody>
-                    <a:bodyPr/>
-                    <a:lstStyle/>
-                    <a:p>
-                      <a:pPr marL="0" lvl="0" indent="0" algn="ctr" rtl="0">
-                        <a:spcBef>
-                          <a:spcPts val="0"/>
-                        </a:spcBef>
-                        <a:spcAft>
-                          <a:spcPts val="0"/>
-                        </a:spcAft>
-                        <a:buNone/>
-                      </a:pPr>
-                      <a:r>
-                        <a:rPr lang="en"/>
-                        <a:t>10/10/2022</a:t>
-                      </a:r>
-                      <a:endParaRPr/>
-                    </a:p>
-                  </a:txBody>
-                  <a:tcPr marL="91425" marR="91425" marT="91425" marB="91425" anchor="ctr">
-                    <a:lnL w="12700" cap="flat" cmpd="sng" algn="ctr">
-                      <a:solidFill>
-                        <a:schemeClr val="tx1"/>
-                      </a:solidFill>
-                      <a:prstDash val="solid"/>
-                      <a:round/>
-                      <a:headEnd type="none" w="med" len="med"/>
-                      <a:tailEnd type="none" w="med" len="med"/>
-                    </a:lnL>
-                    <a:lnR w="12700" cap="flat" cmpd="sng" algn="ctr">
-                      <a:solidFill>
-                        <a:schemeClr val="tx1"/>
-                      </a:solidFill>
-                      <a:prstDash val="solid"/>
-                      <a:round/>
-                      <a:headEnd type="none" w="med" len="med"/>
-                      <a:tailEnd type="none" w="med" len="med"/>
-                    </a:lnR>
-                    <a:lnT w="12700" cap="flat" cmpd="sng" algn="ctr">
-                      <a:solidFill>
-                        <a:schemeClr val="tx1"/>
-                      </a:solidFill>
-                      <a:prstDash val="solid"/>
-                      <a:round/>
-                      <a:headEnd type="none" w="med" len="med"/>
-                      <a:tailEnd type="none" w="med" len="med"/>
-                    </a:lnT>
-                    <a:lnB w="12700" cap="flat" cmpd="sng" algn="ctr">
-                      <a:solidFill>
-                        <a:schemeClr val="tx1"/>
-                      </a:solidFill>
-                      <a:prstDash val="solid"/>
-                      <a:round/>
-                      <a:headEnd type="none" w="med" len="med"/>
-                      <a:tailEnd type="none" w="med" len="med"/>
-                    </a:lnB>
+                    <a:solidFill>
+                      <a:schemeClr val="bg1"/>
+                    </a:solidFill>
+                  </a:tcPr>
+                </a:tc>
+                <a:tc>
+                  <a:txBody>
+                    <a:bodyPr/>
+                    <a:lstStyle/>
+                    <a:p>
+                      <a:pPr marL="0" lvl="0" indent="0" algn="ctr" rtl="0">
+                        <a:spcBef>
+                          <a:spcPts val="0"/>
+                        </a:spcBef>
+                        <a:spcAft>
+                          <a:spcPts val="0"/>
+                        </a:spcAft>
+                        <a:buNone/>
+                      </a:pPr>
+                      <a:r>
+                        <a:rPr lang="en" dirty="0"/>
+                        <a:t>28/08/2022</a:t>
+                      </a:r>
+                      <a:endParaRPr dirty="0"/>
+                    </a:p>
+                  </a:txBody>
+                  <a:tcPr marL="91425" marR="91425" marT="91425" marB="91425" anchor="ctr">
                     <a:solidFill>
                       <a:schemeClr val="bg1"/>
                     </a:solidFill>
@@ -15594,49 +14141,13 @@
                         <a:buNone/>
                       </a:pPr>
                       <a:r>
-                        <a:rPr lang="en"/>
-                        <a:t>Completed</a:t>
-                      </a:r>
-                      <a:endParaRPr/>
-                    </a:p>
-                  </a:txBody>
-                  <a:tcPr marL="91425" marR="91425" marT="91425" marB="91425" anchor="ctr">
-                    <a:lnL w="12700" cap="flat" cmpd="sng" algn="ctr">
-                      <a:solidFill>
-                        <a:schemeClr val="tx1"/>
-                      </a:solidFill>
-                      <a:prstDash val="solid"/>
-                      <a:round/>
-                      <a:headEnd type="none" w="med" len="med"/>
-                      <a:tailEnd type="none" w="med" len="med"/>
-                    </a:lnL>
-                    <a:lnR w="12700" cap="flat" cmpd="sng" algn="ctr">
-                      <a:solidFill>
-                        <a:schemeClr val="tx1"/>
-                      </a:solidFill>
-                      <a:prstDash val="solid"/>
-                      <a:round/>
-                      <a:headEnd type="none" w="med" len="med"/>
-                      <a:tailEnd type="none" w="med" len="med"/>
-                    </a:lnR>
-                    <a:lnT w="12700" cap="flat" cmpd="sng" algn="ctr">
-                      <a:solidFill>
-                        <a:schemeClr val="tx1"/>
-                      </a:solidFill>
-                      <a:prstDash val="solid"/>
-                      <a:round/>
-                      <a:headEnd type="none" w="med" len="med"/>
-                      <a:tailEnd type="none" w="med" len="med"/>
-                    </a:lnT>
-                    <a:lnB w="12700" cap="flat" cmpd="sng" algn="ctr">
-                      <a:solidFill>
-                        <a:schemeClr val="tx1"/>
-                      </a:solidFill>
-                      <a:prstDash val="solid"/>
-                      <a:round/>
-                      <a:headEnd type="none" w="med" len="med"/>
-                      <a:tailEnd type="none" w="med" len="med"/>
-                    </a:lnB>
+                        <a:rPr lang="en-IN" dirty="0"/>
+                        <a:t>Planned</a:t>
+                      </a:r>
+                      <a:endParaRPr dirty="0"/>
+                    </a:p>
+                  </a:txBody>
+                  <a:tcPr marL="91425" marR="91425" marT="91425" marB="91425" anchor="ctr">
                     <a:solidFill>
                       <a:schemeClr val="bg1"/>
                     </a:solidFill>
@@ -15648,65 +14159,29 @@
                   </a:ext>
                 </a:extLst>
               </a:tr>
-              <a:tr h="591787">
-                <a:tc>
-                  <a:txBody>
-                    <a:bodyPr/>
-                    <a:lstStyle/>
-                    <a:p>
-                      <a:pPr marL="0" lvl="0" indent="0" algn="ctr" rtl="0">
-                        <a:spcBef>
-                          <a:spcPts val="0"/>
-                        </a:spcBef>
-                        <a:spcAft>
-                          <a:spcPts val="0"/>
-                        </a:spcAft>
-                        <a:buNone/>
-                      </a:pPr>
-                      <a:r>
-                        <a:rPr lang="en"/>
-                        <a:t>13</a:t>
-                      </a:r>
-                      <a:endParaRPr/>
-                    </a:p>
-                  </a:txBody>
-                  <a:tcPr marL="91425" marR="91425" marT="91425" marB="91425" anchor="ctr">
-                    <a:lnL w="12700" cap="flat" cmpd="sng" algn="ctr">
-                      <a:solidFill>
-                        <a:schemeClr val="tx1"/>
-                      </a:solidFill>
-                      <a:prstDash val="solid"/>
-                      <a:round/>
-                      <a:headEnd type="none" w="med" len="med"/>
-                      <a:tailEnd type="none" w="med" len="med"/>
-                    </a:lnL>
-                    <a:lnR w="12700" cap="flat" cmpd="sng" algn="ctr">
-                      <a:solidFill>
-                        <a:schemeClr val="tx1"/>
-                      </a:solidFill>
-                      <a:prstDash val="solid"/>
-                      <a:round/>
-                      <a:headEnd type="none" w="med" len="med"/>
-                      <a:tailEnd type="none" w="med" len="med"/>
-                    </a:lnR>
-                    <a:lnT w="12700" cap="flat" cmpd="sng" algn="ctr">
-                      <a:solidFill>
-                        <a:schemeClr val="tx1"/>
-                      </a:solidFill>
-                      <a:prstDash val="solid"/>
-                      <a:round/>
-                      <a:headEnd type="none" w="med" len="med"/>
-                      <a:tailEnd type="none" w="med" len="med"/>
-                    </a:lnT>
-                    <a:lnB w="12700" cap="flat" cmpd="sng" algn="ctr">
-                      <a:solidFill>
-                        <a:schemeClr val="tx1"/>
-                      </a:solidFill>
-                      <a:prstDash val="solid"/>
-                      <a:round/>
-                      <a:headEnd type="none" w="med" len="med"/>
-                      <a:tailEnd type="none" w="med" len="med"/>
-                    </a:lnB>
+              <a:tr h="507937">
+                <a:tc>
+                  <a:txBody>
+                    <a:bodyPr/>
+                    <a:lstStyle/>
+                    <a:p>
+                      <a:pPr marL="0" lvl="0" indent="0" algn="ctr" rtl="0">
+                        <a:spcBef>
+                          <a:spcPts val="0"/>
+                        </a:spcBef>
+                        <a:spcAft>
+                          <a:spcPts val="0"/>
+                        </a:spcAft>
+                        <a:buNone/>
+                      </a:pPr>
+                      <a:r>
+                        <a:rPr lang="en" dirty="0"/>
+                        <a:t>3</a:t>
+                      </a:r>
+                      <a:endParaRPr dirty="0"/>
+                    </a:p>
+                  </a:txBody>
+                  <a:tcPr marL="91425" marR="91425" marT="91425" marB="91425" anchor="ctr">
                     <a:solidFill>
                       <a:schemeClr val="bg1"/>
                     </a:solidFill>
@@ -15738,48 +14213,12 @@
                       </a:pPr>
                       <a:r>
                         <a:rPr lang="en" dirty="0"/>
-                        <a:t>13/10/2022</a:t>
+                        <a:t>29/08/2022</a:t>
                       </a:r>
                       <a:endParaRPr dirty="0"/>
                     </a:p>
                   </a:txBody>
                   <a:tcPr marL="91425" marR="91425" marT="91425" marB="91425" anchor="ctr">
-                    <a:lnL w="12700" cap="flat" cmpd="sng" algn="ctr">
-                      <a:solidFill>
-                        <a:schemeClr val="tx1"/>
-                      </a:solidFill>
-                      <a:prstDash val="solid"/>
-                      <a:round/>
-                      <a:headEnd type="none" w="med" len="med"/>
-                      <a:tailEnd type="none" w="med" len="med"/>
-                    </a:lnL>
-                    <a:lnR w="12700" cap="flat" cmpd="sng" algn="ctr">
-                      <a:solidFill>
-                        <a:schemeClr val="tx1"/>
-                      </a:solidFill>
-                      <a:prstDash val="solid"/>
-                      <a:round/>
-                      <a:headEnd type="none" w="med" len="med"/>
-                      <a:tailEnd type="none" w="med" len="med"/>
-                    </a:lnR>
-                    <a:lnT w="12700" cap="flat" cmpd="sng" algn="ctr">
-                      <a:solidFill>
-                        <a:schemeClr val="tx1"/>
-                      </a:solidFill>
-                      <a:prstDash val="solid"/>
-                      <a:round/>
-                      <a:headEnd type="none" w="med" len="med"/>
-                      <a:tailEnd type="none" w="med" len="med"/>
-                    </a:lnT>
-                    <a:lnB w="12700" cap="flat" cmpd="sng" algn="ctr">
-                      <a:solidFill>
-                        <a:schemeClr val="tx1"/>
-                      </a:solidFill>
-                      <a:prstDash val="solid"/>
-                      <a:round/>
-                      <a:headEnd type="none" w="med" len="med"/>
-                      <a:tailEnd type="none" w="med" len="med"/>
-                    </a:lnB>
                     <a:solidFill>
                       <a:schemeClr val="bg1"/>
                     </a:solidFill>
@@ -15801,48 +14240,12 @@
                       </a:pPr>
                       <a:r>
                         <a:rPr lang="en" dirty="0"/>
-                        <a:t>20/10/2022</a:t>
+                        <a:t>01/09/2022</a:t>
                       </a:r>
                       <a:endParaRPr dirty="0"/>
                     </a:p>
                   </a:txBody>
                   <a:tcPr marL="91425" marR="91425" marT="91425" marB="91425" anchor="ctr">
-                    <a:lnL w="12700" cap="flat" cmpd="sng" algn="ctr">
-                      <a:solidFill>
-                        <a:schemeClr val="tx1"/>
-                      </a:solidFill>
-                      <a:prstDash val="solid"/>
-                      <a:round/>
-                      <a:headEnd type="none" w="med" len="med"/>
-                      <a:tailEnd type="none" w="med" len="med"/>
-                    </a:lnL>
-                    <a:lnR w="12700" cap="flat" cmpd="sng" algn="ctr">
-                      <a:solidFill>
-                        <a:schemeClr val="tx1"/>
-                      </a:solidFill>
-                      <a:prstDash val="solid"/>
-                      <a:round/>
-                      <a:headEnd type="none" w="med" len="med"/>
-                      <a:tailEnd type="none" w="med" len="med"/>
-                    </a:lnR>
-                    <a:lnT w="12700" cap="flat" cmpd="sng" algn="ctr">
-                      <a:solidFill>
-                        <a:schemeClr val="tx1"/>
-                      </a:solidFill>
-                      <a:prstDash val="solid"/>
-                      <a:round/>
-                      <a:headEnd type="none" w="med" len="med"/>
-                      <a:tailEnd type="none" w="med" len="med"/>
-                    </a:lnT>
-                    <a:lnB w="12700" cap="flat" cmpd="sng" algn="ctr">
-                      <a:solidFill>
-                        <a:schemeClr val="tx1"/>
-                      </a:solidFill>
-                      <a:prstDash val="solid"/>
-                      <a:round/>
-                      <a:headEnd type="none" w="med" len="med"/>
-                      <a:tailEnd type="none" w="med" len="med"/>
-                    </a:lnB>
                     <a:solidFill>
                       <a:schemeClr val="bg1"/>
                     </a:solidFill>
@@ -15873,49 +14276,13 @@
                         <a:buNone/>
                       </a:pPr>
                       <a:r>
-                        <a:rPr lang="en"/>
-                        <a:t>Completed</a:t>
-                      </a:r>
-                      <a:endParaRPr/>
-                    </a:p>
-                  </a:txBody>
-                  <a:tcPr marL="91425" marR="91425" marT="91425" marB="91425" anchor="ctr">
-                    <a:lnL w="12700" cap="flat" cmpd="sng" algn="ctr">
-                      <a:solidFill>
-                        <a:schemeClr val="tx1"/>
-                      </a:solidFill>
-                      <a:prstDash val="solid"/>
-                      <a:round/>
-                      <a:headEnd type="none" w="med" len="med"/>
-                      <a:tailEnd type="none" w="med" len="med"/>
-                    </a:lnL>
-                    <a:lnR w="12700" cap="flat" cmpd="sng" algn="ctr">
-                      <a:solidFill>
-                        <a:schemeClr val="tx1"/>
-                      </a:solidFill>
-                      <a:prstDash val="solid"/>
-                      <a:round/>
-                      <a:headEnd type="none" w="med" len="med"/>
-                      <a:tailEnd type="none" w="med" len="med"/>
-                    </a:lnR>
-                    <a:lnT w="12700" cap="flat" cmpd="sng" algn="ctr">
-                      <a:solidFill>
-                        <a:schemeClr val="tx1"/>
-                      </a:solidFill>
-                      <a:prstDash val="solid"/>
-                      <a:round/>
-                      <a:headEnd type="none" w="med" len="med"/>
-                      <a:tailEnd type="none" w="med" len="med"/>
-                    </a:lnT>
-                    <a:lnB w="12700" cap="flat" cmpd="sng" algn="ctr">
-                      <a:solidFill>
-                        <a:schemeClr val="tx1"/>
-                      </a:solidFill>
-                      <a:prstDash val="solid"/>
-                      <a:round/>
-                      <a:headEnd type="none" w="med" len="med"/>
-                      <a:tailEnd type="none" w="med" len="med"/>
-                    </a:lnB>
+                        <a:rPr lang="en-IN" dirty="0"/>
+                        <a:t>Planned</a:t>
+                      </a:r>
+                      <a:endParaRPr dirty="0"/>
+                    </a:p>
+                  </a:txBody>
+                  <a:tcPr marL="91425" marR="91425" marT="91425" marB="91425" anchor="ctr">
                     <a:solidFill>
                       <a:schemeClr val="bg1"/>
                     </a:solidFill>
@@ -15927,71 +14294,8 @@
                   </a:ext>
                 </a:extLst>
               </a:tr>
-              <a:tr h="591787">
-                <a:tc>
-                  <a:txBody>
-                    <a:bodyPr/>
-                    <a:lstStyle/>
-                    <a:p>
-                      <a:pPr marL="0" lvl="0" indent="0" algn="ctr" rtl="0">
-                        <a:spcBef>
-                          <a:spcPts val="0"/>
-                        </a:spcBef>
-                        <a:spcAft>
-                          <a:spcPts val="0"/>
-                        </a:spcAft>
-                        <a:buNone/>
-                      </a:pPr>
-                      <a:r>
-                        <a:rPr lang="en"/>
-                        <a:t>14</a:t>
-                      </a:r>
-                      <a:endParaRPr/>
-                    </a:p>
-                  </a:txBody>
-                  <a:tcPr marL="91425" marR="91425" marT="91425" marB="91425" anchor="ctr">
-                    <a:lnL w="12700" cap="flat" cmpd="sng" algn="ctr">
-                      <a:solidFill>
-                        <a:schemeClr val="tx1"/>
-                      </a:solidFill>
-                      <a:prstDash val="solid"/>
-                      <a:round/>
-                      <a:headEnd type="none" w="med" len="med"/>
-                      <a:tailEnd type="none" w="med" len="med"/>
-                    </a:lnL>
-                    <a:lnR w="12700" cap="flat" cmpd="sng" algn="ctr">
-                      <a:solidFill>
-                        <a:schemeClr val="tx1"/>
-                      </a:solidFill>
-                      <a:prstDash val="solid"/>
-                      <a:round/>
-                      <a:headEnd type="none" w="med" len="med"/>
-                      <a:tailEnd type="none" w="med" len="med"/>
-                    </a:lnR>
-                    <a:lnT w="12700" cap="flat" cmpd="sng" algn="ctr">
-                      <a:solidFill>
-                        <a:schemeClr val="tx1"/>
-                      </a:solidFill>
-                      <a:prstDash val="solid"/>
-                      <a:round/>
-                      <a:headEnd type="none" w="med" len="med"/>
-                      <a:tailEnd type="none" w="med" len="med"/>
-                    </a:lnT>
-                    <a:lnB w="12700" cap="flat" cmpd="sng" algn="ctr">
-                      <a:solidFill>
-                        <a:schemeClr val="tx1"/>
-                      </a:solidFill>
-                      <a:prstDash val="solid"/>
-                      <a:round/>
-                      <a:headEnd type="none" w="med" len="med"/>
-                      <a:tailEnd type="none" w="med" len="med"/>
-                    </a:lnB>
-                    <a:solidFill>
-                      <a:schemeClr val="bg1"/>
-                    </a:solidFill>
-                  </a:tcPr>
-                </a:tc>
-                <a:tc rowSpan="3">
+              <a:tr h="507937">
+                <a:tc>
                   <a:txBody>
                     <a:bodyPr/>
                     <a:lstStyle/>
@@ -16007,117 +14311,18 @@
                       </a:pPr>
                       <a:r>
                         <a:rPr lang="en" dirty="0"/>
-                        <a:t>SPRINT 4</a:t>
+                        <a:t>4</a:t>
                       </a:r>
                       <a:endParaRPr dirty="0"/>
                     </a:p>
                   </a:txBody>
                   <a:tcPr marL="91425" marR="91425" marT="91425" marB="91425" anchor="ctr">
-                    <a:lnL w="12700" cap="flat" cmpd="sng" algn="ctr">
-                      <a:solidFill>
-                        <a:schemeClr val="tx1"/>
-                      </a:solidFill>
-                      <a:prstDash val="solid"/>
-                      <a:round/>
-                      <a:headEnd type="none" w="med" len="med"/>
-                      <a:tailEnd type="none" w="med" len="med"/>
-                    </a:lnL>
-                    <a:lnR w="12700" cap="flat" cmpd="sng" algn="ctr">
-                      <a:solidFill>
-                        <a:schemeClr val="tx1"/>
-                      </a:solidFill>
-                      <a:prstDash val="solid"/>
-                      <a:round/>
-                      <a:headEnd type="none" w="med" len="med"/>
-                      <a:tailEnd type="none" w="med" len="med"/>
-                    </a:lnR>
-                    <a:lnT w="12700" cap="flat" cmpd="sng" algn="ctr">
-                      <a:solidFill>
-                        <a:schemeClr val="tx1"/>
-                      </a:solidFill>
-                      <a:prstDash val="solid"/>
-                      <a:round/>
-                      <a:headEnd type="none" w="med" len="med"/>
-                      <a:tailEnd type="none" w="med" len="med"/>
-                    </a:lnT>
-                    <a:lnB w="12700" cap="flat" cmpd="sng" algn="ctr">
-                      <a:solidFill>
-                        <a:schemeClr val="tx1"/>
-                      </a:solidFill>
-                      <a:prstDash val="solid"/>
-                      <a:round/>
-                      <a:headEnd type="none" w="med" len="med"/>
-                      <a:tailEnd type="none" w="med" len="med"/>
-                    </a:lnB>
-                    <a:solidFill>
-                      <a:schemeClr val="bg1"/>
-                    </a:solidFill>
-                  </a:tcPr>
-                </a:tc>
-                <a:tc>
-                  <a:txBody>
-                    <a:bodyPr/>
-                    <a:lstStyle/>
-                    <a:p>
-                      <a:pPr marL="0" lvl="0" indent="0" algn="ctr" rtl="0">
-                        <a:spcBef>
-                          <a:spcPts val="0"/>
-                        </a:spcBef>
-                        <a:spcAft>
-                          <a:spcPts val="0"/>
-                        </a:spcAft>
-                        <a:buNone/>
-                      </a:pPr>
-                      <a:r>
-                        <a:rPr lang="en"/>
-                        <a:t>28/10/2022</a:t>
-                      </a:r>
-                      <a:endParaRPr/>
-                    </a:p>
-                  </a:txBody>
-                  <a:tcPr marL="91425" marR="91425" marT="91425" marB="91425" anchor="ctr">
-                    <a:lnL w="12700" cap="flat" cmpd="sng" algn="ctr">
-                      <a:solidFill>
-                        <a:schemeClr val="tx1"/>
-                      </a:solidFill>
-                      <a:prstDash val="solid"/>
-                      <a:round/>
-                      <a:headEnd type="none" w="med" len="med"/>
-                      <a:tailEnd type="none" w="med" len="med"/>
-                    </a:lnL>
-                    <a:lnR w="12700" cap="flat" cmpd="sng" algn="ctr">
-                      <a:solidFill>
-                        <a:schemeClr val="tx1"/>
-                      </a:solidFill>
-                      <a:prstDash val="solid"/>
-                      <a:round/>
-                      <a:headEnd type="none" w="med" len="med"/>
-                      <a:tailEnd type="none" w="med" len="med"/>
-                    </a:lnR>
-                    <a:lnT w="12700" cap="flat" cmpd="sng" algn="ctr">
-                      <a:solidFill>
-                        <a:schemeClr val="tx1"/>
-                      </a:solidFill>
-                      <a:prstDash val="solid"/>
-                      <a:round/>
-                      <a:headEnd type="none" w="med" len="med"/>
-                      <a:tailEnd type="none" w="med" len="med"/>
-                    </a:lnT>
-                    <a:lnB w="12700" cap="flat" cmpd="sng" algn="ctr">
-                      <a:solidFill>
-                        <a:schemeClr val="tx1"/>
-                      </a:solidFill>
-                      <a:prstDash val="solid"/>
-                      <a:round/>
-                      <a:headEnd type="none" w="med" len="med"/>
-                      <a:tailEnd type="none" w="med" len="med"/>
-                    </a:lnB>
-                    <a:solidFill>
-                      <a:schemeClr val="bg1"/>
-                    </a:solidFill>
-                  </a:tcPr>
-                </a:tc>
-                <a:tc>
+                    <a:solidFill>
+                      <a:schemeClr val="bg1"/>
+                    </a:solidFill>
+                  </a:tcPr>
+                </a:tc>
+                <a:tc rowSpan="2">
                   <a:txBody>
                     <a:bodyPr/>
                     <a:lstStyle/>
@@ -16133,54 +14338,18 @@
                       </a:pPr>
                       <a:r>
                         <a:rPr lang="en" dirty="0"/>
-                        <a:t>5/11/2022</a:t>
+                        <a:t>Sprint 2</a:t>
                       </a:r>
                       <a:endParaRPr dirty="0"/>
                     </a:p>
                   </a:txBody>
                   <a:tcPr marL="91425" marR="91425" marT="91425" marB="91425" anchor="ctr">
-                    <a:lnL w="12700" cap="flat" cmpd="sng" algn="ctr">
-                      <a:solidFill>
-                        <a:schemeClr val="tx1"/>
-                      </a:solidFill>
-                      <a:prstDash val="solid"/>
-                      <a:round/>
-                      <a:headEnd type="none" w="med" len="med"/>
-                      <a:tailEnd type="none" w="med" len="med"/>
-                    </a:lnL>
-                    <a:lnR w="12700" cap="flat" cmpd="sng" algn="ctr">
-                      <a:solidFill>
-                        <a:schemeClr val="tx1"/>
-                      </a:solidFill>
-                      <a:prstDash val="solid"/>
-                      <a:round/>
-                      <a:headEnd type="none" w="med" len="med"/>
-                      <a:tailEnd type="none" w="med" len="med"/>
-                    </a:lnR>
-                    <a:lnT w="12700" cap="flat" cmpd="sng" algn="ctr">
-                      <a:solidFill>
-                        <a:schemeClr val="tx1"/>
-                      </a:solidFill>
-                      <a:prstDash val="solid"/>
-                      <a:round/>
-                      <a:headEnd type="none" w="med" len="med"/>
-                      <a:tailEnd type="none" w="med" len="med"/>
-                    </a:lnT>
-                    <a:lnB w="12700" cap="flat" cmpd="sng" algn="ctr">
-                      <a:solidFill>
-                        <a:schemeClr val="tx1"/>
-                      </a:solidFill>
-                      <a:prstDash val="solid"/>
-                      <a:round/>
-                      <a:headEnd type="none" w="med" len="med"/>
-                      <a:tailEnd type="none" w="med" len="med"/>
-                    </a:lnB>
-                    <a:solidFill>
-                      <a:schemeClr val="bg1"/>
-                    </a:solidFill>
-                  </a:tcPr>
-                </a:tc>
-                <a:tc rowSpan="3">
+                    <a:solidFill>
+                      <a:schemeClr val="bg1"/>
+                    </a:solidFill>
+                  </a:tcPr>
+                </a:tc>
+                <a:tc>
                   <a:txBody>
                     <a:bodyPr/>
                     <a:lstStyle/>
@@ -16196,111 +14365,93 @@
                       </a:pPr>
                       <a:r>
                         <a:rPr lang="en" dirty="0"/>
-                        <a:t>10</a:t>
+                        <a:t>02/09/2022</a:t>
                       </a:r>
                       <a:endParaRPr dirty="0"/>
                     </a:p>
                   </a:txBody>
                   <a:tcPr marL="91425" marR="91425" marT="91425" marB="91425" anchor="ctr">
-                    <a:lnL w="12700" cap="flat" cmpd="sng" algn="ctr">
-                      <a:solidFill>
-                        <a:schemeClr val="tx1"/>
-                      </a:solidFill>
-                      <a:prstDash val="solid"/>
-                      <a:round/>
-                      <a:headEnd type="none" w="med" len="med"/>
-                      <a:tailEnd type="none" w="med" len="med"/>
-                    </a:lnL>
-                    <a:lnR w="12700" cap="flat" cmpd="sng" algn="ctr">
-                      <a:solidFill>
-                        <a:schemeClr val="tx1"/>
-                      </a:solidFill>
-                      <a:prstDash val="solid"/>
-                      <a:round/>
-                      <a:headEnd type="none" w="med" len="med"/>
-                      <a:tailEnd type="none" w="med" len="med"/>
-                    </a:lnR>
-                    <a:lnT w="12700" cap="flat" cmpd="sng" algn="ctr">
-                      <a:solidFill>
-                        <a:schemeClr val="tx1"/>
-                      </a:solidFill>
-                      <a:prstDash val="solid"/>
-                      <a:round/>
-                      <a:headEnd type="none" w="med" len="med"/>
-                      <a:tailEnd type="none" w="med" len="med"/>
-                    </a:lnT>
-                    <a:lnB w="12700" cap="flat" cmpd="sng" algn="ctr">
-                      <a:solidFill>
-                        <a:schemeClr val="tx1"/>
-                      </a:solidFill>
-                      <a:prstDash val="solid"/>
-                      <a:round/>
-                      <a:headEnd type="none" w="med" len="med"/>
-                      <a:tailEnd type="none" w="med" len="med"/>
-                    </a:lnB>
-                    <a:solidFill>
-                      <a:schemeClr val="bg1"/>
-                    </a:solidFill>
-                  </a:tcPr>
-                </a:tc>
-                <a:tc>
-                  <a:txBody>
-                    <a:bodyPr/>
-                    <a:lstStyle/>
-                    <a:p>
-                      <a:pPr marL="0" lvl="0" indent="0" algn="ctr" rtl="0">
-                        <a:spcBef>
-                          <a:spcPts val="0"/>
-                        </a:spcBef>
-                        <a:spcAft>
-                          <a:spcPts val="0"/>
-                        </a:spcAft>
-                        <a:buNone/>
-                      </a:pPr>
-                      <a:r>
-                        <a:rPr lang="en"/>
-                        <a:t>Completed</a:t>
-                      </a:r>
-                      <a:endParaRPr/>
-                    </a:p>
-                  </a:txBody>
-                  <a:tcPr marL="91425" marR="91425" marT="91425" marB="91425" anchor="ctr">
-                    <a:lnL w="12700" cap="flat" cmpd="sng" algn="ctr">
-                      <a:solidFill>
-                        <a:schemeClr val="tx1"/>
-                      </a:solidFill>
-                      <a:prstDash val="solid"/>
-                      <a:round/>
-                      <a:headEnd type="none" w="med" len="med"/>
-                      <a:tailEnd type="none" w="med" len="med"/>
-                    </a:lnL>
-                    <a:lnR w="12700" cap="flat" cmpd="sng" algn="ctr">
-                      <a:solidFill>
-                        <a:schemeClr val="tx1"/>
-                      </a:solidFill>
-                      <a:prstDash val="solid"/>
-                      <a:round/>
-                      <a:headEnd type="none" w="med" len="med"/>
-                      <a:tailEnd type="none" w="med" len="med"/>
-                    </a:lnR>
-                    <a:lnT w="12700" cap="flat" cmpd="sng" algn="ctr">
-                      <a:solidFill>
-                        <a:schemeClr val="tx1"/>
-                      </a:solidFill>
-                      <a:prstDash val="solid"/>
-                      <a:round/>
-                      <a:headEnd type="none" w="med" len="med"/>
-                      <a:tailEnd type="none" w="med" len="med"/>
-                    </a:lnT>
-                    <a:lnB w="12700" cap="flat" cmpd="sng" algn="ctr">
-                      <a:solidFill>
-                        <a:schemeClr val="tx1"/>
-                      </a:solidFill>
-                      <a:prstDash val="solid"/>
-                      <a:round/>
-                      <a:headEnd type="none" w="med" len="med"/>
-                      <a:tailEnd type="none" w="med" len="med"/>
-                    </a:lnB>
+                    <a:solidFill>
+                      <a:schemeClr val="bg1"/>
+                    </a:solidFill>
+                  </a:tcPr>
+                </a:tc>
+                <a:tc>
+                  <a:txBody>
+                    <a:bodyPr/>
+                    <a:lstStyle/>
+                    <a:p>
+                      <a:pPr marL="0" lvl="0" indent="0" algn="ctr" rtl="0">
+                        <a:spcBef>
+                          <a:spcPts val="0"/>
+                        </a:spcBef>
+                        <a:spcAft>
+                          <a:spcPts val="0"/>
+                        </a:spcAft>
+                        <a:buNone/>
+                      </a:pPr>
+                      <a:r>
+                        <a:rPr lang="en" dirty="0"/>
+                        <a:t>08/09/2022</a:t>
+                      </a:r>
+                      <a:endParaRPr dirty="0"/>
+                    </a:p>
+                  </a:txBody>
+                  <a:tcPr marL="91425" marR="91425" marT="91425" marB="91425" anchor="ctr">
+                    <a:solidFill>
+                      <a:schemeClr val="bg1"/>
+                    </a:solidFill>
+                  </a:tcPr>
+                </a:tc>
+                <a:tc rowSpan="2">
+                  <a:txBody>
+                    <a:bodyPr/>
+                    <a:lstStyle/>
+                    <a:p>
+                      <a:pPr marL="0" lvl="0" indent="0" algn="ctr" rtl="0">
+                        <a:spcBef>
+                          <a:spcPts val="0"/>
+                        </a:spcBef>
+                        <a:spcAft>
+                          <a:spcPts val="0"/>
+                        </a:spcAft>
+                        <a:buNone/>
+                      </a:pPr>
+                      <a:r>
+                        <a:rPr lang="en" dirty="0"/>
+                        <a:t>7</a:t>
+                      </a:r>
+                      <a:endParaRPr dirty="0"/>
+                    </a:p>
+                  </a:txBody>
+                  <a:tcPr marL="91425" marR="91425" marT="91425" marB="91425" anchor="ctr">
+                    <a:solidFill>
+                      <a:schemeClr val="bg1"/>
+                    </a:solidFill>
+                  </a:tcPr>
+                </a:tc>
+                <a:tc>
+                  <a:txBody>
+                    <a:bodyPr/>
+                    <a:lstStyle/>
+                    <a:p>
+                      <a:pPr marL="0" lvl="0" indent="0" algn="ctr" rtl="0">
+                        <a:spcBef>
+                          <a:spcPts val="0"/>
+                        </a:spcBef>
+                        <a:spcAft>
+                          <a:spcPts val="0"/>
+                        </a:spcAft>
+                        <a:buNone/>
+                      </a:pPr>
+                      <a:r>
+                        <a:rPr lang="en-IN" dirty="0"/>
+                        <a:t>Planned</a:t>
+                      </a:r>
+                      <a:endParaRPr dirty="0"/>
+                    </a:p>
+                  </a:txBody>
+                  <a:tcPr marL="91425" marR="91425" marT="91425" marB="91425" anchor="ctr">
                     <a:solidFill>
                       <a:schemeClr val="bg1"/>
                     </a:solidFill>
@@ -16308,69 +14459,33 @@
                 </a:tc>
                 <a:extLst>
                   <a:ext uri="{0D108BD9-81ED-4DB2-BD59-A6C34878D82A}">
-                    <a16:rowId xmlns:a16="http://schemas.microsoft.com/office/drawing/2014/main" val="10004"/>
+                    <a16:rowId xmlns:a16="http://schemas.microsoft.com/office/drawing/2014/main" val="10006"/>
                   </a:ext>
                 </a:extLst>
               </a:tr>
-              <a:tr h="591787">
-                <a:tc>
-                  <a:txBody>
-                    <a:bodyPr/>
-                    <a:lstStyle/>
-                    <a:p>
-                      <a:pPr marL="0" lvl="0" indent="0" algn="ctr" rtl="0">
-                        <a:spcBef>
-                          <a:spcPts val="0"/>
-                        </a:spcBef>
-                        <a:spcAft>
-                          <a:spcPts val="0"/>
-                        </a:spcAft>
-                        <a:buNone/>
-                      </a:pPr>
-                      <a:r>
-                        <a:rPr lang="en"/>
-                        <a:t>8</a:t>
-                      </a:r>
-                      <a:endParaRPr/>
-                    </a:p>
-                  </a:txBody>
-                  <a:tcPr marL="91425" marR="91425" marT="91425" marB="91425" anchor="ctr">
-                    <a:lnL w="12700" cap="flat" cmpd="sng" algn="ctr">
-                      <a:solidFill>
-                        <a:schemeClr val="tx1"/>
-                      </a:solidFill>
-                      <a:prstDash val="solid"/>
-                      <a:round/>
-                      <a:headEnd type="none" w="med" len="med"/>
-                      <a:tailEnd type="none" w="med" len="med"/>
-                    </a:lnL>
-                    <a:lnR w="12700" cap="flat" cmpd="sng" algn="ctr">
-                      <a:solidFill>
-                        <a:schemeClr val="tx1"/>
-                      </a:solidFill>
-                      <a:prstDash val="solid"/>
-                      <a:round/>
-                      <a:headEnd type="none" w="med" len="med"/>
-                      <a:tailEnd type="none" w="med" len="med"/>
-                    </a:lnR>
-                    <a:lnT w="12700" cap="flat" cmpd="sng" algn="ctr">
-                      <a:solidFill>
-                        <a:schemeClr val="tx1"/>
-                      </a:solidFill>
-                      <a:prstDash val="solid"/>
-                      <a:round/>
-                      <a:headEnd type="none" w="med" len="med"/>
-                      <a:tailEnd type="none" w="med" len="med"/>
-                    </a:lnT>
-                    <a:lnB w="12700" cap="flat" cmpd="sng" algn="ctr">
-                      <a:solidFill>
-                        <a:schemeClr val="tx1"/>
-                      </a:solidFill>
-                      <a:prstDash val="solid"/>
-                      <a:round/>
-                      <a:headEnd type="none" w="med" len="med"/>
-                      <a:tailEnd type="none" w="med" len="med"/>
-                    </a:lnB>
+              <a:tr h="507937">
+                <a:tc>
+                  <a:txBody>
+                    <a:bodyPr/>
+                    <a:lstStyle/>
+                    <a:p>
+                      <a:pPr marL="0" lvl="0" indent="0" algn="ctr" rtl="0">
+                        <a:spcBef>
+                          <a:spcPts val="0"/>
+                        </a:spcBef>
+                        <a:spcAft>
+                          <a:spcPts val="0"/>
+                        </a:spcAft>
+                        <a:buNone/>
+                      </a:pPr>
+                      <a:r>
+                        <a:rPr lang="en" dirty="0"/>
+                        <a:t>5</a:t>
+                      </a:r>
+                      <a:endParaRPr dirty="0"/>
+                    </a:p>
+                  </a:txBody>
+                  <a:tcPr marL="91425" marR="91425" marT="91425" marB="91425" anchor="ctr">
                     <a:solidFill>
                       <a:schemeClr val="bg1"/>
                     </a:solidFill>
@@ -16402,48 +14517,12 @@
                       </a:pPr>
                       <a:r>
                         <a:rPr lang="en" dirty="0"/>
-                        <a:t>7/11/2022</a:t>
+                        <a:t>09/09/2022</a:t>
                       </a:r>
                       <a:endParaRPr dirty="0"/>
                     </a:p>
                   </a:txBody>
                   <a:tcPr marL="91425" marR="91425" marT="91425" marB="91425" anchor="ctr">
-                    <a:lnL w="12700" cap="flat" cmpd="sng" algn="ctr">
-                      <a:solidFill>
-                        <a:schemeClr val="tx1"/>
-                      </a:solidFill>
-                      <a:prstDash val="solid"/>
-                      <a:round/>
-                      <a:headEnd type="none" w="med" len="med"/>
-                      <a:tailEnd type="none" w="med" len="med"/>
-                    </a:lnL>
-                    <a:lnR w="12700" cap="flat" cmpd="sng" algn="ctr">
-                      <a:solidFill>
-                        <a:schemeClr val="tx1"/>
-                      </a:solidFill>
-                      <a:prstDash val="solid"/>
-                      <a:round/>
-                      <a:headEnd type="none" w="med" len="med"/>
-                      <a:tailEnd type="none" w="med" len="med"/>
-                    </a:lnR>
-                    <a:lnT w="12700" cap="flat" cmpd="sng" algn="ctr">
-                      <a:solidFill>
-                        <a:schemeClr val="tx1"/>
-                      </a:solidFill>
-                      <a:prstDash val="solid"/>
-                      <a:round/>
-                      <a:headEnd type="none" w="med" len="med"/>
-                      <a:tailEnd type="none" w="med" len="med"/>
-                    </a:lnT>
-                    <a:lnB w="12700" cap="flat" cmpd="sng" algn="ctr">
-                      <a:solidFill>
-                        <a:schemeClr val="tx1"/>
-                      </a:solidFill>
-                      <a:prstDash val="solid"/>
-                      <a:round/>
-                      <a:headEnd type="none" w="med" len="med"/>
-                      <a:tailEnd type="none" w="med" len="med"/>
-                    </a:lnB>
                     <a:solidFill>
                       <a:schemeClr val="bg1"/>
                     </a:solidFill>
@@ -16465,48 +14544,12 @@
                       </a:pPr>
                       <a:r>
                         <a:rPr lang="en" dirty="0"/>
-                        <a:t>11/11/2022</a:t>
+                        <a:t>15/09/2022</a:t>
                       </a:r>
                       <a:endParaRPr dirty="0"/>
                     </a:p>
                   </a:txBody>
                   <a:tcPr marL="91425" marR="91425" marT="91425" marB="91425" anchor="ctr">
-                    <a:lnL w="12700" cap="flat" cmpd="sng" algn="ctr">
-                      <a:solidFill>
-                        <a:schemeClr val="tx1"/>
-                      </a:solidFill>
-                      <a:prstDash val="solid"/>
-                      <a:round/>
-                      <a:headEnd type="none" w="med" len="med"/>
-                      <a:tailEnd type="none" w="med" len="med"/>
-                    </a:lnL>
-                    <a:lnR w="12700" cap="flat" cmpd="sng" algn="ctr">
-                      <a:solidFill>
-                        <a:schemeClr val="tx1"/>
-                      </a:solidFill>
-                      <a:prstDash val="solid"/>
-                      <a:round/>
-                      <a:headEnd type="none" w="med" len="med"/>
-                      <a:tailEnd type="none" w="med" len="med"/>
-                    </a:lnR>
-                    <a:lnT w="12700" cap="flat" cmpd="sng" algn="ctr">
-                      <a:solidFill>
-                        <a:schemeClr val="tx1"/>
-                      </a:solidFill>
-                      <a:prstDash val="solid"/>
-                      <a:round/>
-                      <a:headEnd type="none" w="med" len="med"/>
-                      <a:tailEnd type="none" w="med" len="med"/>
-                    </a:lnT>
-                    <a:lnB w="12700" cap="flat" cmpd="sng" algn="ctr">
-                      <a:solidFill>
-                        <a:schemeClr val="tx1"/>
-                      </a:solidFill>
-                      <a:prstDash val="solid"/>
-                      <a:round/>
-                      <a:headEnd type="none" w="med" len="med"/>
-                      <a:tailEnd type="none" w="med" len="med"/>
-                    </a:lnB>
                     <a:solidFill>
                       <a:schemeClr val="bg1"/>
                     </a:solidFill>
@@ -16537,49 +14580,13 @@
                         <a:buNone/>
                       </a:pPr>
                       <a:r>
-                        <a:rPr lang="en" dirty="0"/>
-                        <a:t>Completed</a:t>
+                        <a:rPr lang="en-IN" dirty="0"/>
+                        <a:t>Planned</a:t>
                       </a:r>
                       <a:endParaRPr dirty="0"/>
                     </a:p>
                   </a:txBody>
                   <a:tcPr marL="91425" marR="91425" marT="91425" marB="91425" anchor="ctr">
-                    <a:lnL w="12700" cap="flat" cmpd="sng" algn="ctr">
-                      <a:solidFill>
-                        <a:schemeClr val="tx1"/>
-                      </a:solidFill>
-                      <a:prstDash val="solid"/>
-                      <a:round/>
-                      <a:headEnd type="none" w="med" len="med"/>
-                      <a:tailEnd type="none" w="med" len="med"/>
-                    </a:lnL>
-                    <a:lnR w="12700" cap="flat" cmpd="sng" algn="ctr">
-                      <a:solidFill>
-                        <a:schemeClr val="tx1"/>
-                      </a:solidFill>
-                      <a:prstDash val="solid"/>
-                      <a:round/>
-                      <a:headEnd type="none" w="med" len="med"/>
-                      <a:tailEnd type="none" w="med" len="med"/>
-                    </a:lnR>
-                    <a:lnT w="12700" cap="flat" cmpd="sng" algn="ctr">
-                      <a:solidFill>
-                        <a:schemeClr val="tx1"/>
-                      </a:solidFill>
-                      <a:prstDash val="solid"/>
-                      <a:round/>
-                      <a:headEnd type="none" w="med" len="med"/>
-                      <a:tailEnd type="none" w="med" len="med"/>
-                    </a:lnT>
-                    <a:lnB w="12700" cap="flat" cmpd="sng" algn="ctr">
-                      <a:solidFill>
-                        <a:schemeClr val="tx1"/>
-                      </a:solidFill>
-                      <a:prstDash val="solid"/>
-                      <a:round/>
-                      <a:headEnd type="none" w="med" len="med"/>
-                      <a:tailEnd type="none" w="med" len="med"/>
-                    </a:lnB>
                     <a:solidFill>
                       <a:schemeClr val="bg1"/>
                     </a:solidFill>
@@ -16587,278 +14594,168 @@
                 </a:tc>
                 <a:extLst>
                   <a:ext uri="{0D108BD9-81ED-4DB2-BD59-A6C34878D82A}">
-                    <a16:rowId xmlns:a16="http://schemas.microsoft.com/office/drawing/2014/main" val="10005"/>
+                    <a16:rowId xmlns:a16="http://schemas.microsoft.com/office/drawing/2014/main" val="10007"/>
                   </a:ext>
                 </a:extLst>
               </a:tr>
-              <a:tr h="591787">
-                <a:tc>
-                  <a:txBody>
-                    <a:bodyPr/>
-                    <a:lstStyle/>
-                    <a:p>
-                      <a:pPr marL="0" lvl="0" indent="0" algn="ctr" rtl="0">
-                        <a:spcBef>
-                          <a:spcPts val="0"/>
-                        </a:spcBef>
-                        <a:spcAft>
-                          <a:spcPts val="0"/>
-                        </a:spcAft>
-                        <a:buNone/>
-                      </a:pPr>
-                      <a:r>
-                        <a:rPr lang="en"/>
-                        <a:t>9</a:t>
-                      </a:r>
-                      <a:endParaRPr/>
-                    </a:p>
-                  </a:txBody>
-                  <a:tcPr marL="91425" marR="91425" marT="91425" marB="91425" anchor="ctr">
-                    <a:lnL w="12700" cap="flat" cmpd="sng" algn="ctr">
-                      <a:solidFill>
-                        <a:schemeClr val="tx1"/>
-                      </a:solidFill>
-                      <a:prstDash val="solid"/>
-                      <a:round/>
-                      <a:headEnd type="none" w="med" len="med"/>
-                      <a:tailEnd type="none" w="med" len="med"/>
-                    </a:lnL>
-                    <a:lnR w="12700" cap="flat" cmpd="sng" algn="ctr">
-                      <a:solidFill>
-                        <a:schemeClr val="tx1"/>
-                      </a:solidFill>
-                      <a:prstDash val="solid"/>
-                      <a:round/>
-                      <a:headEnd type="none" w="med" len="med"/>
-                      <a:tailEnd type="none" w="med" len="med"/>
-                    </a:lnR>
-                    <a:lnT w="12700" cap="flat" cmpd="sng" algn="ctr">
-                      <a:solidFill>
-                        <a:schemeClr val="tx1"/>
-                      </a:solidFill>
-                      <a:prstDash val="solid"/>
-                      <a:round/>
-                      <a:headEnd type="none" w="med" len="med"/>
-                      <a:tailEnd type="none" w="med" len="med"/>
-                    </a:lnT>
-                    <a:lnB w="12700" cap="flat" cmpd="sng" algn="ctr">
-                      <a:solidFill>
-                        <a:schemeClr val="tx1"/>
-                      </a:solidFill>
-                      <a:prstDash val="solid"/>
-                      <a:round/>
-                      <a:headEnd type="none" w="med" len="med"/>
-                      <a:tailEnd type="none" w="med" len="med"/>
-                    </a:lnB>
-                    <a:solidFill>
-                      <a:schemeClr val="bg1"/>
-                    </a:solidFill>
-                  </a:tcPr>
-                </a:tc>
-                <a:tc vMerge="1">
-                  <a:txBody>
-                    <a:bodyPr/>
-                    <a:lstStyle/>
-                    <a:p>
-                      <a:endParaRPr lang="en-US"/>
-                    </a:p>
-                  </a:txBody>
-                  <a:tcPr/>
-                </a:tc>
-                <a:tc>
-                  <a:txBody>
-                    <a:bodyPr/>
-                    <a:lstStyle/>
-                    <a:p>
-                      <a:pPr marL="0" lvl="0" indent="0" algn="ctr" rtl="0">
-                        <a:spcBef>
-                          <a:spcPts val="0"/>
-                        </a:spcBef>
-                        <a:spcAft>
-                          <a:spcPts val="0"/>
-                        </a:spcAft>
-                        <a:buNone/>
-                      </a:pPr>
-                      <a:r>
-                        <a:rPr lang="en"/>
-                        <a:t>13/11/2022</a:t>
-                      </a:r>
-                      <a:endParaRPr/>
-                    </a:p>
-                  </a:txBody>
-                  <a:tcPr marL="91425" marR="91425" marT="91425" marB="91425" anchor="ctr">
-                    <a:lnL w="12700" cap="flat" cmpd="sng" algn="ctr">
-                      <a:solidFill>
-                        <a:schemeClr val="tx1"/>
-                      </a:solidFill>
-                      <a:prstDash val="solid"/>
-                      <a:round/>
-                      <a:headEnd type="none" w="med" len="med"/>
-                      <a:tailEnd type="none" w="med" len="med"/>
-                    </a:lnL>
-                    <a:lnR w="12700" cap="flat" cmpd="sng" algn="ctr">
-                      <a:solidFill>
-                        <a:schemeClr val="tx1"/>
-                      </a:solidFill>
-                      <a:prstDash val="solid"/>
-                      <a:round/>
-                      <a:headEnd type="none" w="med" len="med"/>
-                      <a:tailEnd type="none" w="med" len="med"/>
-                    </a:lnR>
-                    <a:lnT w="12700" cap="flat" cmpd="sng" algn="ctr">
-                      <a:solidFill>
-                        <a:schemeClr val="tx1"/>
-                      </a:solidFill>
-                      <a:prstDash val="solid"/>
-                      <a:round/>
-                      <a:headEnd type="none" w="med" len="med"/>
-                      <a:tailEnd type="none" w="med" len="med"/>
-                    </a:lnT>
-                    <a:lnB w="12700" cap="flat" cmpd="sng" algn="ctr">
-                      <a:solidFill>
-                        <a:schemeClr val="tx1"/>
-                      </a:solidFill>
-                      <a:prstDash val="solid"/>
-                      <a:round/>
-                      <a:headEnd type="none" w="med" len="med"/>
-                      <a:tailEnd type="none" w="med" len="med"/>
-                    </a:lnB>
-                    <a:solidFill>
-                      <a:schemeClr val="bg1"/>
-                    </a:solidFill>
-                  </a:tcPr>
-                </a:tc>
-                <a:tc>
-                  <a:txBody>
-                    <a:bodyPr/>
-                    <a:lstStyle/>
-                    <a:p>
-                      <a:pPr marL="0" lvl="0" indent="0" algn="ctr" rtl="0">
-                        <a:spcBef>
-                          <a:spcPts val="0"/>
-                        </a:spcBef>
-                        <a:spcAft>
-                          <a:spcPts val="0"/>
-                        </a:spcAft>
-                        <a:buNone/>
-                      </a:pPr>
-                      <a:r>
-                        <a:rPr lang="en" dirty="0"/>
-                        <a:t>15/11/2022</a:t>
+              <a:tr h="507937">
+                <a:tc>
+                  <a:txBody>
+                    <a:bodyPr/>
+                    <a:lstStyle/>
+                    <a:p>
+                      <a:pPr marL="0" lvl="0" indent="0" algn="ctr" rtl="0">
+                        <a:spcBef>
+                          <a:spcPts val="0"/>
+                        </a:spcBef>
+                        <a:spcAft>
+                          <a:spcPts val="0"/>
+                        </a:spcAft>
+                        <a:buNone/>
+                      </a:pPr>
+                      <a:r>
+                        <a:rPr lang="en-IN" dirty="0"/>
+                        <a:t>6</a:t>
                       </a:r>
                       <a:endParaRPr dirty="0"/>
                     </a:p>
                   </a:txBody>
                   <a:tcPr marL="91425" marR="91425" marT="91425" marB="91425" anchor="ctr">
-                    <a:lnL w="12700" cap="flat" cmpd="sng" algn="ctr">
-                      <a:solidFill>
-                        <a:schemeClr val="tx1"/>
-                      </a:solidFill>
-                      <a:prstDash val="solid"/>
-                      <a:round/>
-                      <a:headEnd type="none" w="med" len="med"/>
-                      <a:tailEnd type="none" w="med" len="med"/>
-                    </a:lnL>
-                    <a:lnR w="12700" cap="flat" cmpd="sng" algn="ctr">
-                      <a:solidFill>
-                        <a:schemeClr val="tx1"/>
-                      </a:solidFill>
-                      <a:prstDash val="solid"/>
-                      <a:round/>
-                      <a:headEnd type="none" w="med" len="med"/>
-                      <a:tailEnd type="none" w="med" len="med"/>
-                    </a:lnR>
-                    <a:lnT w="12700" cap="flat" cmpd="sng" algn="ctr">
-                      <a:solidFill>
-                        <a:schemeClr val="tx1"/>
-                      </a:solidFill>
-                      <a:prstDash val="solid"/>
-                      <a:round/>
-                      <a:headEnd type="none" w="med" len="med"/>
-                      <a:tailEnd type="none" w="med" len="med"/>
-                    </a:lnT>
-                    <a:lnB w="12700" cap="flat" cmpd="sng" algn="ctr">
-                      <a:solidFill>
-                        <a:schemeClr val="tx1"/>
-                      </a:solidFill>
-                      <a:prstDash val="solid"/>
-                      <a:round/>
-                      <a:headEnd type="none" w="med" len="med"/>
-                      <a:tailEnd type="none" w="med" len="med"/>
-                    </a:lnB>
-                    <a:solidFill>
-                      <a:schemeClr val="bg1"/>
-                    </a:solidFill>
-                  </a:tcPr>
-                </a:tc>
-                <a:tc vMerge="1">
-                  <a:txBody>
-                    <a:bodyPr/>
-                    <a:lstStyle/>
-                    <a:p>
-                      <a:endParaRPr lang="en-US"/>
-                    </a:p>
-                  </a:txBody>
-                  <a:tcPr/>
-                </a:tc>
-                <a:tc>
-                  <a:txBody>
-                    <a:bodyPr/>
-                    <a:lstStyle/>
-                    <a:p>
-                      <a:pPr marL="0" lvl="0" indent="0" algn="ctr" rtl="0">
-                        <a:spcBef>
-                          <a:spcPts val="0"/>
-                        </a:spcBef>
-                        <a:spcAft>
-                          <a:spcPts val="0"/>
-                        </a:spcAft>
-                        <a:buNone/>
-                      </a:pPr>
-                      <a:r>
-                        <a:rPr lang="en" dirty="0"/>
-                        <a:t>Completed</a:t>
+                    <a:solidFill>
+                      <a:schemeClr val="bg1"/>
+                    </a:solidFill>
+                  </a:tcPr>
+                </a:tc>
+                <a:tc rowSpan="2">
+                  <a:txBody>
+                    <a:bodyPr/>
+                    <a:lstStyle/>
+                    <a:p>
+                      <a:pPr marL="0" lvl="0" indent="0" algn="ctr" rtl="0">
+                        <a:spcBef>
+                          <a:spcPts val="0"/>
+                        </a:spcBef>
+                        <a:spcAft>
+                          <a:spcPts val="0"/>
+                        </a:spcAft>
+                        <a:buNone/>
+                      </a:pPr>
+                      <a:r>
+                        <a:rPr lang="en-IN" dirty="0"/>
+                        <a:t>Sprint 3</a:t>
                       </a:r>
                       <a:endParaRPr dirty="0"/>
                     </a:p>
                   </a:txBody>
                   <a:tcPr marL="91425" marR="91425" marT="91425" marB="91425" anchor="ctr">
-                    <a:lnL w="12700" cap="flat" cmpd="sng" algn="ctr">
-                      <a:solidFill>
-                        <a:schemeClr val="tx1"/>
-                      </a:solidFill>
-                      <a:prstDash val="solid"/>
-                      <a:round/>
-                      <a:headEnd type="none" w="med" len="med"/>
-                      <a:tailEnd type="none" w="med" len="med"/>
-                    </a:lnL>
-                    <a:lnR w="12700" cap="flat" cmpd="sng" algn="ctr">
-                      <a:solidFill>
-                        <a:schemeClr val="tx1"/>
-                      </a:solidFill>
-                      <a:prstDash val="solid"/>
-                      <a:round/>
-                      <a:headEnd type="none" w="med" len="med"/>
-                      <a:tailEnd type="none" w="med" len="med"/>
-                    </a:lnR>
-                    <a:lnT w="12700" cap="flat" cmpd="sng" algn="ctr">
-                      <a:solidFill>
-                        <a:schemeClr val="tx1"/>
-                      </a:solidFill>
-                      <a:prstDash val="solid"/>
-                      <a:round/>
-                      <a:headEnd type="none" w="med" len="med"/>
-                      <a:tailEnd type="none" w="med" len="med"/>
-                    </a:lnT>
-                    <a:lnB w="12700" cap="flat" cmpd="sng" algn="ctr">
-                      <a:solidFill>
-                        <a:schemeClr val="tx1"/>
-                      </a:solidFill>
-                      <a:prstDash val="solid"/>
-                      <a:round/>
-                      <a:headEnd type="none" w="med" len="med"/>
-                      <a:tailEnd type="none" w="med" len="med"/>
-                    </a:lnB>
+                    <a:solidFill>
+                      <a:schemeClr val="bg1"/>
+                    </a:solidFill>
+                  </a:tcPr>
+                </a:tc>
+                <a:tc>
+                  <a:txBody>
+                    <a:bodyPr/>
+                    <a:lstStyle/>
+                    <a:p>
+                      <a:pPr marL="0" lvl="0" indent="0" algn="ctr" rtl="0">
+                        <a:spcBef>
+                          <a:spcPts val="0"/>
+                        </a:spcBef>
+                        <a:spcAft>
+                          <a:spcPts val="0"/>
+                        </a:spcAft>
+                        <a:buNone/>
+                      </a:pPr>
+                      <a:r>
+                        <a:rPr lang="en-IN" dirty="0"/>
+                        <a:t>16/09/25</a:t>
+                      </a:r>
+                      <a:endParaRPr dirty="0"/>
+                    </a:p>
+                  </a:txBody>
+                  <a:tcPr marL="91425" marR="91425" marT="91425" marB="91425" anchor="ctr">
+                    <a:solidFill>
+                      <a:schemeClr val="bg1"/>
+                    </a:solidFill>
+                  </a:tcPr>
+                </a:tc>
+                <a:tc>
+                  <a:txBody>
+                    <a:bodyPr/>
+                    <a:lstStyle/>
+                    <a:p>
+                      <a:pPr marL="0" lvl="0" indent="0" algn="ctr" rtl="0">
+                        <a:spcBef>
+                          <a:spcPts val="0"/>
+                        </a:spcBef>
+                        <a:spcAft>
+                          <a:spcPts val="0"/>
+                        </a:spcAft>
+                        <a:buNone/>
+                      </a:pPr>
+                      <a:r>
+                        <a:rPr lang="en-IN" dirty="0"/>
+                        <a:t>24/09/25</a:t>
+                      </a:r>
+                      <a:endParaRPr dirty="0"/>
+                    </a:p>
+                  </a:txBody>
+                  <a:tcPr marL="91425" marR="91425" marT="91425" marB="91425" anchor="ctr">
+                    <a:solidFill>
+                      <a:schemeClr val="bg1"/>
+                    </a:solidFill>
+                  </a:tcPr>
+                </a:tc>
+                <a:tc rowSpan="2">
+                  <a:txBody>
+                    <a:bodyPr/>
+                    <a:lstStyle/>
+                    <a:p>
+                      <a:pPr marL="0" lvl="0" indent="0" algn="ctr" rtl="0">
+                        <a:spcBef>
+                          <a:spcPts val="0"/>
+                        </a:spcBef>
+                        <a:spcAft>
+                          <a:spcPts val="0"/>
+                        </a:spcAft>
+                        <a:buNone/>
+                      </a:pPr>
+                      <a:r>
+                        <a:rPr lang="en-IN" dirty="0"/>
+                        <a:t>7</a:t>
+                      </a:r>
+                      <a:endParaRPr dirty="0"/>
+                    </a:p>
+                  </a:txBody>
+                  <a:tcPr marL="91425" marR="91425" marT="91425" marB="91425" anchor="ctr">
+                    <a:solidFill>
+                      <a:schemeClr val="bg1"/>
+                    </a:solidFill>
+                  </a:tcPr>
+                </a:tc>
+                <a:tc>
+                  <a:txBody>
+                    <a:bodyPr/>
+                    <a:lstStyle/>
+                    <a:p>
+                      <a:pPr marL="0" lvl="0" indent="0" algn="ctr" rtl="0">
+                        <a:spcBef>
+                          <a:spcPts val="0"/>
+                        </a:spcBef>
+                        <a:spcAft>
+                          <a:spcPts val="0"/>
+                        </a:spcAft>
+                        <a:buNone/>
+                      </a:pPr>
+                      <a:r>
+                        <a:rPr lang="en-IN" dirty="0"/>
+                        <a:t>Planned</a:t>
+                      </a:r>
+                      <a:endParaRPr dirty="0"/>
+                    </a:p>
+                  </a:txBody>
+                  <a:tcPr marL="91425" marR="91425" marT="91425" marB="91425" anchor="ctr">
                     <a:solidFill>
                       <a:schemeClr val="bg1"/>
                     </a:solidFill>
@@ -16866,7 +14763,168 @@
                 </a:tc>
                 <a:extLst>
                   <a:ext uri="{0D108BD9-81ED-4DB2-BD59-A6C34878D82A}">
-                    <a16:rowId xmlns:a16="http://schemas.microsoft.com/office/drawing/2014/main" val="10006"/>
+                    <a16:rowId xmlns:a16="http://schemas.microsoft.com/office/drawing/2014/main" val="3226602303"/>
+                  </a:ext>
+                </a:extLst>
+              </a:tr>
+              <a:tr h="507937">
+                <a:tc>
+                  <a:txBody>
+                    <a:bodyPr/>
+                    <a:lstStyle/>
+                    <a:p>
+                      <a:pPr marL="0" lvl="0" indent="0" algn="ctr" rtl="0">
+                        <a:spcBef>
+                          <a:spcPts val="0"/>
+                        </a:spcBef>
+                        <a:spcAft>
+                          <a:spcPts val="0"/>
+                        </a:spcAft>
+                        <a:buNone/>
+                      </a:pPr>
+                      <a:r>
+                        <a:rPr lang="en-IN" dirty="0"/>
+                        <a:t>7</a:t>
+                      </a:r>
+                      <a:endParaRPr dirty="0"/>
+                    </a:p>
+                  </a:txBody>
+                  <a:tcPr marL="91425" marR="91425" marT="91425" marB="91425" anchor="ctr">
+                    <a:solidFill>
+                      <a:schemeClr val="bg1"/>
+                    </a:solidFill>
+                  </a:tcPr>
+                </a:tc>
+                <a:tc vMerge="1">
+                  <a:txBody>
+                    <a:bodyPr/>
+                    <a:lstStyle/>
+                    <a:p>
+                      <a:pPr marL="0" lvl="0" indent="0" algn="ctr" rtl="0">
+                        <a:spcBef>
+                          <a:spcPts val="0"/>
+                        </a:spcBef>
+                        <a:spcAft>
+                          <a:spcPts val="0"/>
+                        </a:spcAft>
+                        <a:buNone/>
+                      </a:pPr>
+                      <a:endParaRPr dirty="0"/>
+                    </a:p>
+                  </a:txBody>
+                  <a:tcPr marL="91425" marR="91425" marT="91425" marB="91425" anchor="ctr">
+                    <a:solidFill>
+                      <a:schemeClr val="bg1"/>
+                    </a:solidFill>
+                  </a:tcPr>
+                </a:tc>
+                <a:tc>
+                  <a:txBody>
+                    <a:bodyPr/>
+                    <a:lstStyle/>
+                    <a:p>
+                      <a:pPr marL="0" lvl="0" indent="0" algn="ctr" rtl="0">
+                        <a:spcBef>
+                          <a:spcPts val="0"/>
+                        </a:spcBef>
+                        <a:spcAft>
+                          <a:spcPts val="0"/>
+                        </a:spcAft>
+                        <a:buNone/>
+                      </a:pPr>
+                      <a:r>
+                        <a:rPr lang="en-IN" dirty="0"/>
+                        <a:t>25/09/25</a:t>
+                      </a:r>
+                      <a:endParaRPr dirty="0"/>
+                    </a:p>
+                  </a:txBody>
+                  <a:tcPr marL="91425" marR="91425" marT="91425" marB="91425" anchor="ctr">
+                    <a:solidFill>
+                      <a:schemeClr val="bg1"/>
+                    </a:solidFill>
+                  </a:tcPr>
+                </a:tc>
+                <a:tc>
+                  <a:txBody>
+                    <a:bodyPr/>
+                    <a:lstStyle/>
+                    <a:p>
+                      <a:pPr marL="0" lvl="0" indent="0" algn="ctr" rtl="0">
+                        <a:spcBef>
+                          <a:spcPts val="0"/>
+                        </a:spcBef>
+                        <a:spcAft>
+                          <a:spcPts val="0"/>
+                        </a:spcAft>
+                        <a:buNone/>
+                      </a:pPr>
+                      <a:r>
+                        <a:rPr lang="en-IN" dirty="0"/>
+                        <a:t>02/10/25</a:t>
+                      </a:r>
+                      <a:endParaRPr dirty="0"/>
+                    </a:p>
+                  </a:txBody>
+                  <a:tcPr marL="91425" marR="91425" marT="91425" marB="91425" anchor="ctr">
+                    <a:solidFill>
+                      <a:schemeClr val="bg1"/>
+                    </a:solidFill>
+                  </a:tcPr>
+                </a:tc>
+                <a:tc vMerge="1">
+                  <a:txBody>
+                    <a:bodyPr/>
+                    <a:lstStyle/>
+                    <a:p>
+                      <a:pPr marL="0" lvl="0" indent="0" algn="ctr" rtl="0">
+                        <a:spcBef>
+                          <a:spcPts val="0"/>
+                        </a:spcBef>
+                        <a:spcAft>
+                          <a:spcPts val="0"/>
+                        </a:spcAft>
+                        <a:buNone/>
+                      </a:pPr>
+                      <a:endParaRPr dirty="0"/>
+                    </a:p>
+                  </a:txBody>
+                  <a:tcPr marL="91425" marR="91425" marT="91425" marB="91425" anchor="ctr">
+                    <a:solidFill>
+                      <a:schemeClr val="bg1"/>
+                    </a:solidFill>
+                  </a:tcPr>
+                </a:tc>
+                <a:tc>
+                  <a:txBody>
+                    <a:bodyPr/>
+                    <a:lstStyle/>
+                    <a:p>
+                      <a:pPr marL="0" lvl="0" indent="0" algn="ctr" rtl="0">
+                        <a:spcBef>
+                          <a:spcPts val="0"/>
+                        </a:spcBef>
+                        <a:spcAft>
+                          <a:spcPts val="0"/>
+                        </a:spcAft>
+                        <a:buNone/>
+                      </a:pPr>
+                      <a:r>
+                        <a:rPr lang="en-IN" dirty="0"/>
+                        <a:t>Planned</a:t>
+                      </a:r>
+                      <a:endParaRPr dirty="0"/>
+                    </a:p>
+                  </a:txBody>
+                  <a:tcPr marL="91425" marR="91425" marT="91425" marB="91425" anchor="ctr">
+                    <a:solidFill>
+                      <a:schemeClr val="bg1"/>
+                    </a:solidFill>
+                  </a:tcPr>
+                </a:tc>
+                <a:extLst>
+                  <a:ext uri="{0D108BD9-81ED-4DB2-BD59-A6C34878D82A}">
+                    <a16:rowId xmlns:a16="http://schemas.microsoft.com/office/drawing/2014/main" val="1898791333"/>
                   </a:ext>
                 </a:extLst>
               </a:tr>
@@ -16874,39 +14932,10 @@
           </a:graphicData>
         </a:graphic>
       </p:graphicFrame>
-      <p:sp>
-        <p:nvSpPr>
-          <p:cNvPr id="7" name="TextBox 6"/>
-          <p:cNvSpPr txBox="1"/>
-          <p:nvPr/>
-        </p:nvSpPr>
-        <p:spPr>
-          <a:xfrm>
-            <a:off x="609600" y="5638800"/>
-            <a:ext cx="7848600" cy="369332"/>
-          </a:xfrm>
-          <a:prstGeom prst="rect">
-            <a:avLst/>
-          </a:prstGeom>
-          <a:noFill/>
-        </p:spPr>
-        <p:txBody>
-          <a:bodyPr wrap="square" rtlCol="0">
-            <a:spAutoFit/>
-          </a:bodyPr>
-          <a:lstStyle/>
-          <a:p>
-            <a:r>
-              <a:rPr lang="en-US" dirty="0"/>
-              <a:t>The table given above is for reference only. Update/create a table with your data. </a:t>
-            </a:r>
-          </a:p>
-        </p:txBody>
-      </p:sp>
     </p:spTree>
     <p:extLst>
       <p:ext uri="{BB962C8B-B14F-4D97-AF65-F5344CB8AC3E}">
-        <p14:creationId xmlns:p14="http://schemas.microsoft.com/office/powerpoint/2010/main" val="3560652123"/>
+        <p14:creationId xmlns:p14="http://schemas.microsoft.com/office/powerpoint/2010/main" val="3929722202"/>
       </p:ext>
     </p:extLst>
   </p:cSld>
@@ -16950,7 +14979,7 @@
           <a:p>
             <a:r>
               <a:rPr lang="en-US" dirty="0"/>
-              <a:t>DATA FLOW DIAGRAM</a:t>
+              <a:t>PROJECT PLAN</a:t>
             </a:r>
           </a:p>
         </p:txBody>
@@ -16970,10 +14999,7 @@
           <a:bodyPr/>
           <a:lstStyle/>
           <a:p>
-            <a:r>
-              <a:rPr lang="en-US" dirty="0"/>
-              <a:t>LEVEL 1</a:t>
-            </a:r>
+            <a:endParaRPr lang="en-US" dirty="0"/>
           </a:p>
         </p:txBody>
       </p:sp>
@@ -17024,68 +15050,1145 @@
           </a:p>
         </p:txBody>
       </p:sp>
-      <p:pic>
-        <p:nvPicPr>
-          <p:cNvPr id="6" name="Google Shape;317;p19"/>
-          <p:cNvPicPr preferRelativeResize="0"/>
-          <p:nvPr/>
-        </p:nvPicPr>
-        <p:blipFill>
-          <a:blip r:embed="rId2">
-            <a:alphaModFix/>
-          </a:blip>
-          <a:stretch>
-            <a:fillRect/>
-          </a:stretch>
-        </p:blipFill>
-        <p:spPr>
-          <a:xfrm>
-            <a:off x="1447800" y="1600200"/>
-            <a:ext cx="6155475" cy="4019589"/>
-          </a:xfrm>
-          <a:prstGeom prst="rect">
-            <a:avLst/>
-          </a:prstGeom>
-          <a:noFill/>
-          <a:ln>
-            <a:noFill/>
-          </a:ln>
-        </p:spPr>
-      </p:pic>
-      <p:sp>
-        <p:nvSpPr>
-          <p:cNvPr id="7" name="TextBox 6"/>
-          <p:cNvSpPr txBox="1"/>
-          <p:nvPr/>
-        </p:nvSpPr>
-        <p:spPr>
-          <a:xfrm>
-            <a:off x="990600" y="5638800"/>
-            <a:ext cx="7239000" cy="369332"/>
-          </a:xfrm>
-          <a:prstGeom prst="rect">
-            <a:avLst/>
-          </a:prstGeom>
-          <a:noFill/>
-        </p:spPr>
-        <p:txBody>
-          <a:bodyPr wrap="square" rtlCol="0">
-            <a:spAutoFit/>
-          </a:bodyPr>
-          <a:lstStyle/>
-          <a:p>
-            <a:pPr algn="ctr"/>
-            <a:r>
-              <a:rPr lang="en-US" dirty="0"/>
-              <a:t>The figure given above is for reference only. Create a figure with your data. </a:t>
-            </a:r>
-          </a:p>
-        </p:txBody>
-      </p:sp>
+      <p:graphicFrame>
+        <p:nvGraphicFramePr>
+          <p:cNvPr id="6" name="Google Shape;402;p31"/>
+          <p:cNvGraphicFramePr/>
+          <p:nvPr>
+            <p:extLst>
+              <p:ext uri="{D42A27DB-BD31-4B8C-83A1-F6EECF244321}">
+                <p14:modId xmlns:p14="http://schemas.microsoft.com/office/powerpoint/2010/main" val="891241710"/>
+              </p:ext>
+            </p:extLst>
+          </p:nvPr>
+        </p:nvGraphicFramePr>
+        <p:xfrm>
+          <a:off x="505691" y="1219200"/>
+          <a:ext cx="8104910" cy="2206667"/>
+        </p:xfrm>
+        <a:graphic>
+          <a:graphicData uri="http://schemas.openxmlformats.org/drawingml/2006/table">
+            <a:tbl>
+              <a:tblPr>
+                <a:noFill/>
+              </a:tblPr>
+              <a:tblGrid>
+                <a:gridCol w="1339735">
+                  <a:extLst>
+                    <a:ext uri="{9D8B030D-6E8A-4147-A177-3AD203B41FA5}">
+                      <a16:colId xmlns:a16="http://schemas.microsoft.com/office/drawing/2014/main" val="20000"/>
+                    </a:ext>
+                  </a:extLst>
+                </a:gridCol>
+                <a:gridCol w="1353035">
+                  <a:extLst>
+                    <a:ext uri="{9D8B030D-6E8A-4147-A177-3AD203B41FA5}">
+                      <a16:colId xmlns:a16="http://schemas.microsoft.com/office/drawing/2014/main" val="20001"/>
+                    </a:ext>
+                  </a:extLst>
+                </a:gridCol>
+                <a:gridCol w="1353035">
+                  <a:extLst>
+                    <a:ext uri="{9D8B030D-6E8A-4147-A177-3AD203B41FA5}">
+                      <a16:colId xmlns:a16="http://schemas.microsoft.com/office/drawing/2014/main" val="20002"/>
+                    </a:ext>
+                  </a:extLst>
+                </a:gridCol>
+                <a:gridCol w="1353035">
+                  <a:extLst>
+                    <a:ext uri="{9D8B030D-6E8A-4147-A177-3AD203B41FA5}">
+                      <a16:colId xmlns:a16="http://schemas.microsoft.com/office/drawing/2014/main" val="20003"/>
+                    </a:ext>
+                  </a:extLst>
+                </a:gridCol>
+                <a:gridCol w="1353035">
+                  <a:extLst>
+                    <a:ext uri="{9D8B030D-6E8A-4147-A177-3AD203B41FA5}">
+                      <a16:colId xmlns:a16="http://schemas.microsoft.com/office/drawing/2014/main" val="20004"/>
+                    </a:ext>
+                  </a:extLst>
+                </a:gridCol>
+                <a:gridCol w="1353035">
+                  <a:extLst>
+                    <a:ext uri="{9D8B030D-6E8A-4147-A177-3AD203B41FA5}">
+                      <a16:colId xmlns:a16="http://schemas.microsoft.com/office/drawing/2014/main" val="20005"/>
+                    </a:ext>
+                  </a:extLst>
+                </a:gridCol>
+              </a:tblGrid>
+              <a:tr h="856519">
+                <a:tc>
+                  <a:txBody>
+                    <a:bodyPr/>
+                    <a:lstStyle/>
+                    <a:p>
+                      <a:pPr marL="0" lvl="0" indent="0" algn="ctr" rtl="0">
+                        <a:spcBef>
+                          <a:spcPts val="0"/>
+                        </a:spcBef>
+                        <a:spcAft>
+                          <a:spcPts val="0"/>
+                        </a:spcAft>
+                        <a:buNone/>
+                      </a:pPr>
+                      <a:r>
+                        <a:rPr lang="en" b="1" dirty="0"/>
+                        <a:t>User</a:t>
+                      </a:r>
+                      <a:endParaRPr b="1" dirty="0"/>
+                    </a:p>
+                    <a:p>
+                      <a:pPr marL="0" lvl="0" indent="0" algn="ctr" rtl="0">
+                        <a:spcBef>
+                          <a:spcPts val="0"/>
+                        </a:spcBef>
+                        <a:spcAft>
+                          <a:spcPts val="0"/>
+                        </a:spcAft>
+                        <a:buNone/>
+                      </a:pPr>
+                      <a:r>
+                        <a:rPr lang="en" b="1" dirty="0"/>
+                        <a:t>StoryID</a:t>
+                      </a:r>
+                      <a:endParaRPr b="1" dirty="0"/>
+                    </a:p>
+                  </a:txBody>
+                  <a:tcPr marL="91425" marR="91425" marT="91425" marB="91425" anchor="ctr">
+                    <a:lnL w="12700" cap="flat" cmpd="sng" algn="ctr">
+                      <a:solidFill>
+                        <a:schemeClr val="tx1"/>
+                      </a:solidFill>
+                      <a:prstDash val="solid"/>
+                      <a:round/>
+                      <a:headEnd type="none" w="med" len="med"/>
+                      <a:tailEnd type="none" w="med" len="med"/>
+                    </a:lnL>
+                    <a:lnR w="12700" cap="flat" cmpd="sng" algn="ctr">
+                      <a:solidFill>
+                        <a:schemeClr val="tx1"/>
+                      </a:solidFill>
+                      <a:prstDash val="solid"/>
+                      <a:round/>
+                      <a:headEnd type="none" w="med" len="med"/>
+                      <a:tailEnd type="none" w="med" len="med"/>
+                    </a:lnR>
+                    <a:lnT w="12700" cap="flat" cmpd="sng" algn="ctr">
+                      <a:solidFill>
+                        <a:schemeClr val="tx1"/>
+                      </a:solidFill>
+                      <a:prstDash val="solid"/>
+                      <a:round/>
+                      <a:headEnd type="none" w="med" len="med"/>
+                      <a:tailEnd type="none" w="med" len="med"/>
+                    </a:lnT>
+                    <a:lnB w="12700" cap="flat" cmpd="sng" algn="ctr">
+                      <a:solidFill>
+                        <a:schemeClr val="tx1"/>
+                      </a:solidFill>
+                      <a:prstDash val="solid"/>
+                      <a:round/>
+                      <a:headEnd type="none" w="med" len="med"/>
+                      <a:tailEnd type="none" w="med" len="med"/>
+                    </a:lnB>
+                    <a:solidFill>
+                      <a:schemeClr val="bg1"/>
+                    </a:solidFill>
+                  </a:tcPr>
+                </a:tc>
+                <a:tc>
+                  <a:txBody>
+                    <a:bodyPr/>
+                    <a:lstStyle/>
+                    <a:p>
+                      <a:pPr marL="0" lvl="0" indent="0" algn="ctr" rtl="0">
+                        <a:spcBef>
+                          <a:spcPts val="0"/>
+                        </a:spcBef>
+                        <a:spcAft>
+                          <a:spcPts val="0"/>
+                        </a:spcAft>
+                        <a:buNone/>
+                      </a:pPr>
+                      <a:r>
+                        <a:rPr lang="en" b="1"/>
+                        <a:t>Task Name</a:t>
+                      </a:r>
+                      <a:endParaRPr b="1"/>
+                    </a:p>
+                  </a:txBody>
+                  <a:tcPr marL="91425" marR="91425" marT="91425" marB="91425" anchor="ctr">
+                    <a:lnL w="12700" cap="flat" cmpd="sng" algn="ctr">
+                      <a:solidFill>
+                        <a:schemeClr val="tx1"/>
+                      </a:solidFill>
+                      <a:prstDash val="solid"/>
+                      <a:round/>
+                      <a:headEnd type="none" w="med" len="med"/>
+                      <a:tailEnd type="none" w="med" len="med"/>
+                    </a:lnL>
+                    <a:lnR w="12700" cap="flat" cmpd="sng" algn="ctr">
+                      <a:solidFill>
+                        <a:schemeClr val="tx1"/>
+                      </a:solidFill>
+                      <a:prstDash val="solid"/>
+                      <a:round/>
+                      <a:headEnd type="none" w="med" len="med"/>
+                      <a:tailEnd type="none" w="med" len="med"/>
+                    </a:lnR>
+                    <a:lnT w="12700" cap="flat" cmpd="sng" algn="ctr">
+                      <a:solidFill>
+                        <a:schemeClr val="tx1"/>
+                      </a:solidFill>
+                      <a:prstDash val="solid"/>
+                      <a:round/>
+                      <a:headEnd type="none" w="med" len="med"/>
+                      <a:tailEnd type="none" w="med" len="med"/>
+                    </a:lnT>
+                    <a:lnB w="12700" cap="flat" cmpd="sng" algn="ctr">
+                      <a:solidFill>
+                        <a:schemeClr val="tx1"/>
+                      </a:solidFill>
+                      <a:prstDash val="solid"/>
+                      <a:round/>
+                      <a:headEnd type="none" w="med" len="med"/>
+                      <a:tailEnd type="none" w="med" len="med"/>
+                    </a:lnB>
+                    <a:solidFill>
+                      <a:schemeClr val="bg1"/>
+                    </a:solidFill>
+                  </a:tcPr>
+                </a:tc>
+                <a:tc>
+                  <a:txBody>
+                    <a:bodyPr/>
+                    <a:lstStyle/>
+                    <a:p>
+                      <a:pPr marL="0" lvl="0" indent="0" algn="ctr" rtl="0">
+                        <a:spcBef>
+                          <a:spcPts val="0"/>
+                        </a:spcBef>
+                        <a:spcAft>
+                          <a:spcPts val="0"/>
+                        </a:spcAft>
+                        <a:buNone/>
+                      </a:pPr>
+                      <a:r>
+                        <a:rPr lang="en" b="1"/>
+                        <a:t>Start Date</a:t>
+                      </a:r>
+                      <a:endParaRPr b="1"/>
+                    </a:p>
+                  </a:txBody>
+                  <a:tcPr marL="91425" marR="91425" marT="91425" marB="91425" anchor="ctr">
+                    <a:lnL w="12700" cap="flat" cmpd="sng" algn="ctr">
+                      <a:solidFill>
+                        <a:schemeClr val="tx1"/>
+                      </a:solidFill>
+                      <a:prstDash val="solid"/>
+                      <a:round/>
+                      <a:headEnd type="none" w="med" len="med"/>
+                      <a:tailEnd type="none" w="med" len="med"/>
+                    </a:lnL>
+                    <a:lnR w="12700" cap="flat" cmpd="sng" algn="ctr">
+                      <a:solidFill>
+                        <a:schemeClr val="tx1"/>
+                      </a:solidFill>
+                      <a:prstDash val="solid"/>
+                      <a:round/>
+                      <a:headEnd type="none" w="med" len="med"/>
+                      <a:tailEnd type="none" w="med" len="med"/>
+                    </a:lnR>
+                    <a:lnT w="12700" cap="flat" cmpd="sng" algn="ctr">
+                      <a:solidFill>
+                        <a:schemeClr val="tx1"/>
+                      </a:solidFill>
+                      <a:prstDash val="solid"/>
+                      <a:round/>
+                      <a:headEnd type="none" w="med" len="med"/>
+                      <a:tailEnd type="none" w="med" len="med"/>
+                    </a:lnT>
+                    <a:lnB w="12700" cap="flat" cmpd="sng" algn="ctr">
+                      <a:solidFill>
+                        <a:schemeClr val="tx1"/>
+                      </a:solidFill>
+                      <a:prstDash val="solid"/>
+                      <a:round/>
+                      <a:headEnd type="none" w="med" len="med"/>
+                      <a:tailEnd type="none" w="med" len="med"/>
+                    </a:lnB>
+                    <a:solidFill>
+                      <a:schemeClr val="bg1"/>
+                    </a:solidFill>
+                  </a:tcPr>
+                </a:tc>
+                <a:tc>
+                  <a:txBody>
+                    <a:bodyPr/>
+                    <a:lstStyle/>
+                    <a:p>
+                      <a:pPr marL="0" lvl="0" indent="0" algn="ctr" rtl="0">
+                        <a:spcBef>
+                          <a:spcPts val="0"/>
+                        </a:spcBef>
+                        <a:spcAft>
+                          <a:spcPts val="0"/>
+                        </a:spcAft>
+                        <a:buNone/>
+                      </a:pPr>
+                      <a:r>
+                        <a:rPr lang="en" b="1"/>
+                        <a:t>End Date</a:t>
+                      </a:r>
+                      <a:endParaRPr b="1"/>
+                    </a:p>
+                  </a:txBody>
+                  <a:tcPr marL="91425" marR="91425" marT="91425" marB="91425" anchor="ctr">
+                    <a:lnL w="12700" cap="flat" cmpd="sng" algn="ctr">
+                      <a:solidFill>
+                        <a:schemeClr val="tx1"/>
+                      </a:solidFill>
+                      <a:prstDash val="solid"/>
+                      <a:round/>
+                      <a:headEnd type="none" w="med" len="med"/>
+                      <a:tailEnd type="none" w="med" len="med"/>
+                    </a:lnL>
+                    <a:lnR w="12700" cap="flat" cmpd="sng" algn="ctr">
+                      <a:solidFill>
+                        <a:schemeClr val="tx1"/>
+                      </a:solidFill>
+                      <a:prstDash val="solid"/>
+                      <a:round/>
+                      <a:headEnd type="none" w="med" len="med"/>
+                      <a:tailEnd type="none" w="med" len="med"/>
+                    </a:lnR>
+                    <a:lnT w="12700" cap="flat" cmpd="sng" algn="ctr">
+                      <a:solidFill>
+                        <a:schemeClr val="tx1"/>
+                      </a:solidFill>
+                      <a:prstDash val="solid"/>
+                      <a:round/>
+                      <a:headEnd type="none" w="med" len="med"/>
+                      <a:tailEnd type="none" w="med" len="med"/>
+                    </a:lnT>
+                    <a:lnB w="12700" cap="flat" cmpd="sng" algn="ctr">
+                      <a:solidFill>
+                        <a:schemeClr val="tx1"/>
+                      </a:solidFill>
+                      <a:prstDash val="solid"/>
+                      <a:round/>
+                      <a:headEnd type="none" w="med" len="med"/>
+                      <a:tailEnd type="none" w="med" len="med"/>
+                    </a:lnB>
+                    <a:solidFill>
+                      <a:schemeClr val="bg1"/>
+                    </a:solidFill>
+                  </a:tcPr>
+                </a:tc>
+                <a:tc>
+                  <a:txBody>
+                    <a:bodyPr/>
+                    <a:lstStyle/>
+                    <a:p>
+                      <a:pPr marL="0" lvl="0" indent="0" algn="ctr" rtl="0">
+                        <a:spcBef>
+                          <a:spcPts val="0"/>
+                        </a:spcBef>
+                        <a:spcAft>
+                          <a:spcPts val="0"/>
+                        </a:spcAft>
+                        <a:buNone/>
+                      </a:pPr>
+                      <a:r>
+                        <a:rPr lang="en" b="1"/>
+                        <a:t>   Days </a:t>
+                      </a:r>
+                      <a:endParaRPr b="1"/>
+                    </a:p>
+                  </a:txBody>
+                  <a:tcPr marL="91425" marR="91425" marT="91425" marB="91425" anchor="ctr">
+                    <a:lnL w="12700" cap="flat" cmpd="sng" algn="ctr">
+                      <a:solidFill>
+                        <a:schemeClr val="tx1"/>
+                      </a:solidFill>
+                      <a:prstDash val="solid"/>
+                      <a:round/>
+                      <a:headEnd type="none" w="med" len="med"/>
+                      <a:tailEnd type="none" w="med" len="med"/>
+                    </a:lnL>
+                    <a:lnR w="12700" cap="flat" cmpd="sng" algn="ctr">
+                      <a:solidFill>
+                        <a:schemeClr val="tx1"/>
+                      </a:solidFill>
+                      <a:prstDash val="solid"/>
+                      <a:round/>
+                      <a:headEnd type="none" w="med" len="med"/>
+                      <a:tailEnd type="none" w="med" len="med"/>
+                    </a:lnR>
+                    <a:lnT w="12700" cap="flat" cmpd="sng" algn="ctr">
+                      <a:solidFill>
+                        <a:schemeClr val="tx1"/>
+                      </a:solidFill>
+                      <a:prstDash val="solid"/>
+                      <a:round/>
+                      <a:headEnd type="none" w="med" len="med"/>
+                      <a:tailEnd type="none" w="med" len="med"/>
+                    </a:lnT>
+                    <a:lnB w="12700" cap="flat" cmpd="sng" algn="ctr">
+                      <a:solidFill>
+                        <a:schemeClr val="tx1"/>
+                      </a:solidFill>
+                      <a:prstDash val="solid"/>
+                      <a:round/>
+                      <a:headEnd type="none" w="med" len="med"/>
+                      <a:tailEnd type="none" w="med" len="med"/>
+                    </a:lnB>
+                    <a:solidFill>
+                      <a:schemeClr val="bg1"/>
+                    </a:solidFill>
+                  </a:tcPr>
+                </a:tc>
+                <a:tc>
+                  <a:txBody>
+                    <a:bodyPr/>
+                    <a:lstStyle/>
+                    <a:p>
+                      <a:pPr marL="0" lvl="0" indent="0" algn="ctr" rtl="0">
+                        <a:spcBef>
+                          <a:spcPts val="0"/>
+                        </a:spcBef>
+                        <a:spcAft>
+                          <a:spcPts val="0"/>
+                        </a:spcAft>
+                        <a:buNone/>
+                      </a:pPr>
+                      <a:r>
+                        <a:rPr lang="en" b="1"/>
+                        <a:t>  Status</a:t>
+                      </a:r>
+                      <a:endParaRPr b="1"/>
+                    </a:p>
+                  </a:txBody>
+                  <a:tcPr marL="91425" marR="91425" marT="91425" marB="91425" anchor="ctr">
+                    <a:lnL w="12700" cap="flat" cmpd="sng" algn="ctr">
+                      <a:solidFill>
+                        <a:schemeClr val="tx1"/>
+                      </a:solidFill>
+                      <a:prstDash val="solid"/>
+                      <a:round/>
+                      <a:headEnd type="none" w="med" len="med"/>
+                      <a:tailEnd type="none" w="med" len="med"/>
+                    </a:lnL>
+                    <a:lnR w="12700" cap="flat" cmpd="sng" algn="ctr">
+                      <a:solidFill>
+                        <a:schemeClr val="tx1"/>
+                      </a:solidFill>
+                      <a:prstDash val="solid"/>
+                      <a:round/>
+                      <a:headEnd type="none" w="med" len="med"/>
+                      <a:tailEnd type="none" w="med" len="med"/>
+                    </a:lnR>
+                    <a:lnT w="12700" cap="flat" cmpd="sng" algn="ctr">
+                      <a:solidFill>
+                        <a:schemeClr val="tx1"/>
+                      </a:solidFill>
+                      <a:prstDash val="solid"/>
+                      <a:round/>
+                      <a:headEnd type="none" w="med" len="med"/>
+                      <a:tailEnd type="none" w="med" len="med"/>
+                    </a:lnT>
+                    <a:lnB w="12700" cap="flat" cmpd="sng" algn="ctr">
+                      <a:solidFill>
+                        <a:schemeClr val="tx1"/>
+                      </a:solidFill>
+                      <a:prstDash val="solid"/>
+                      <a:round/>
+                      <a:headEnd type="none" w="med" len="med"/>
+                      <a:tailEnd type="none" w="med" len="med"/>
+                    </a:lnB>
+                    <a:solidFill>
+                      <a:schemeClr val="bg1"/>
+                    </a:solidFill>
+                  </a:tcPr>
+                </a:tc>
+                <a:extLst>
+                  <a:ext uri="{0D108BD9-81ED-4DB2-BD59-A6C34878D82A}">
+                    <a16:rowId xmlns:a16="http://schemas.microsoft.com/office/drawing/2014/main" val="10000"/>
+                  </a:ext>
+                </a:extLst>
+              </a:tr>
+              <a:tr h="675074">
+                <a:tc>
+                  <a:txBody>
+                    <a:bodyPr/>
+                    <a:lstStyle/>
+                    <a:p>
+                      <a:pPr marL="0" lvl="0" indent="0" algn="ctr" rtl="0">
+                        <a:spcBef>
+                          <a:spcPts val="0"/>
+                        </a:spcBef>
+                        <a:spcAft>
+                          <a:spcPts val="0"/>
+                        </a:spcAft>
+                        <a:buNone/>
+                      </a:pPr>
+                      <a:r>
+                        <a:rPr lang="en-IN" dirty="0"/>
+                        <a:t>8</a:t>
+                      </a:r>
+                      <a:endParaRPr dirty="0"/>
+                    </a:p>
+                  </a:txBody>
+                  <a:tcPr marL="91425" marR="91425" marT="91425" marB="91425" anchor="ctr">
+                    <a:lnL w="12700" cap="flat" cmpd="sng" algn="ctr">
+                      <a:solidFill>
+                        <a:schemeClr val="tx1"/>
+                      </a:solidFill>
+                      <a:prstDash val="solid"/>
+                      <a:round/>
+                      <a:headEnd type="none" w="med" len="med"/>
+                      <a:tailEnd type="none" w="med" len="med"/>
+                    </a:lnL>
+                    <a:lnR w="12700" cap="flat" cmpd="sng" algn="ctr">
+                      <a:solidFill>
+                        <a:schemeClr val="tx1"/>
+                      </a:solidFill>
+                      <a:prstDash val="solid"/>
+                      <a:round/>
+                      <a:headEnd type="none" w="med" len="med"/>
+                      <a:tailEnd type="none" w="med" len="med"/>
+                    </a:lnR>
+                    <a:lnT w="12700" cap="flat" cmpd="sng" algn="ctr">
+                      <a:solidFill>
+                        <a:schemeClr val="tx1"/>
+                      </a:solidFill>
+                      <a:prstDash val="solid"/>
+                      <a:round/>
+                      <a:headEnd type="none" w="med" len="med"/>
+                      <a:tailEnd type="none" w="med" len="med"/>
+                    </a:lnT>
+                    <a:lnB w="12700" cap="flat" cmpd="sng" algn="ctr">
+                      <a:solidFill>
+                        <a:schemeClr val="tx1"/>
+                      </a:solidFill>
+                      <a:prstDash val="solid"/>
+                      <a:round/>
+                      <a:headEnd type="none" w="med" len="med"/>
+                      <a:tailEnd type="none" w="med" len="med"/>
+                    </a:lnB>
+                    <a:solidFill>
+                      <a:schemeClr val="bg1"/>
+                    </a:solidFill>
+                  </a:tcPr>
+                </a:tc>
+                <a:tc rowSpan="2">
+                  <a:txBody>
+                    <a:bodyPr/>
+                    <a:lstStyle/>
+                    <a:p>
+                      <a:pPr marL="0" lvl="0" indent="0" algn="ctr" rtl="0">
+                        <a:spcBef>
+                          <a:spcPts val="0"/>
+                        </a:spcBef>
+                        <a:spcAft>
+                          <a:spcPts val="0"/>
+                        </a:spcAft>
+                        <a:buNone/>
+                      </a:pPr>
+                      <a:r>
+                        <a:rPr lang="en" dirty="0"/>
+                        <a:t>SPRINT 4</a:t>
+                      </a:r>
+                      <a:endParaRPr dirty="0"/>
+                    </a:p>
+                  </a:txBody>
+                  <a:tcPr marL="91425" marR="91425" marT="91425" marB="91425" anchor="ctr">
+                    <a:lnL w="12700" cap="flat" cmpd="sng" algn="ctr">
+                      <a:solidFill>
+                        <a:schemeClr val="tx1"/>
+                      </a:solidFill>
+                      <a:prstDash val="solid"/>
+                      <a:round/>
+                      <a:headEnd type="none" w="med" len="med"/>
+                      <a:tailEnd type="none" w="med" len="med"/>
+                    </a:lnL>
+                    <a:lnR w="12700" cap="flat" cmpd="sng" algn="ctr">
+                      <a:solidFill>
+                        <a:schemeClr val="tx1"/>
+                      </a:solidFill>
+                      <a:prstDash val="solid"/>
+                      <a:round/>
+                      <a:headEnd type="none" w="med" len="med"/>
+                      <a:tailEnd type="none" w="med" len="med"/>
+                    </a:lnR>
+                    <a:lnT w="12700" cap="flat" cmpd="sng" algn="ctr">
+                      <a:solidFill>
+                        <a:schemeClr val="tx1"/>
+                      </a:solidFill>
+                      <a:prstDash val="solid"/>
+                      <a:round/>
+                      <a:headEnd type="none" w="med" len="med"/>
+                      <a:tailEnd type="none" w="med" len="med"/>
+                    </a:lnT>
+                    <a:lnB w="12700" cap="flat" cmpd="sng" algn="ctr">
+                      <a:solidFill>
+                        <a:schemeClr val="tx1"/>
+                      </a:solidFill>
+                      <a:prstDash val="solid"/>
+                      <a:round/>
+                      <a:headEnd type="none" w="med" len="med"/>
+                      <a:tailEnd type="none" w="med" len="med"/>
+                    </a:lnB>
+                    <a:solidFill>
+                      <a:schemeClr val="bg1"/>
+                    </a:solidFill>
+                  </a:tcPr>
+                </a:tc>
+                <a:tc>
+                  <a:txBody>
+                    <a:bodyPr/>
+                    <a:lstStyle/>
+                    <a:p>
+                      <a:pPr marL="0" lvl="0" indent="0" algn="ctr" rtl="0">
+                        <a:spcBef>
+                          <a:spcPts val="0"/>
+                        </a:spcBef>
+                        <a:spcAft>
+                          <a:spcPts val="0"/>
+                        </a:spcAft>
+                        <a:buNone/>
+                      </a:pPr>
+                      <a:r>
+                        <a:rPr lang="en" dirty="0"/>
+                        <a:t>03/10/2022</a:t>
+                      </a:r>
+                      <a:endParaRPr dirty="0"/>
+                    </a:p>
+                  </a:txBody>
+                  <a:tcPr marL="91425" marR="91425" marT="91425" marB="91425" anchor="ctr">
+                    <a:lnL w="12700" cap="flat" cmpd="sng" algn="ctr">
+                      <a:solidFill>
+                        <a:schemeClr val="tx1"/>
+                      </a:solidFill>
+                      <a:prstDash val="solid"/>
+                      <a:round/>
+                      <a:headEnd type="none" w="med" len="med"/>
+                      <a:tailEnd type="none" w="med" len="med"/>
+                    </a:lnL>
+                    <a:lnR w="12700" cap="flat" cmpd="sng" algn="ctr">
+                      <a:solidFill>
+                        <a:schemeClr val="tx1"/>
+                      </a:solidFill>
+                      <a:prstDash val="solid"/>
+                      <a:round/>
+                      <a:headEnd type="none" w="med" len="med"/>
+                      <a:tailEnd type="none" w="med" len="med"/>
+                    </a:lnR>
+                    <a:lnT w="12700" cap="flat" cmpd="sng" algn="ctr">
+                      <a:solidFill>
+                        <a:schemeClr val="tx1"/>
+                      </a:solidFill>
+                      <a:prstDash val="solid"/>
+                      <a:round/>
+                      <a:headEnd type="none" w="med" len="med"/>
+                      <a:tailEnd type="none" w="med" len="med"/>
+                    </a:lnT>
+                    <a:lnB w="12700" cap="flat" cmpd="sng" algn="ctr">
+                      <a:solidFill>
+                        <a:schemeClr val="tx1"/>
+                      </a:solidFill>
+                      <a:prstDash val="solid"/>
+                      <a:round/>
+                      <a:headEnd type="none" w="med" len="med"/>
+                      <a:tailEnd type="none" w="med" len="med"/>
+                    </a:lnB>
+                    <a:solidFill>
+                      <a:schemeClr val="bg1"/>
+                    </a:solidFill>
+                  </a:tcPr>
+                </a:tc>
+                <a:tc>
+                  <a:txBody>
+                    <a:bodyPr/>
+                    <a:lstStyle/>
+                    <a:p>
+                      <a:pPr marL="0" lvl="0" indent="0" algn="ctr" rtl="0">
+                        <a:spcBef>
+                          <a:spcPts val="0"/>
+                        </a:spcBef>
+                        <a:spcAft>
+                          <a:spcPts val="0"/>
+                        </a:spcAft>
+                        <a:buNone/>
+                      </a:pPr>
+                      <a:r>
+                        <a:rPr lang="en" dirty="0"/>
+                        <a:t>09/10/2022</a:t>
+                      </a:r>
+                      <a:endParaRPr dirty="0"/>
+                    </a:p>
+                  </a:txBody>
+                  <a:tcPr marL="91425" marR="91425" marT="91425" marB="91425" anchor="ctr">
+                    <a:lnL w="12700" cap="flat" cmpd="sng" algn="ctr">
+                      <a:solidFill>
+                        <a:schemeClr val="tx1"/>
+                      </a:solidFill>
+                      <a:prstDash val="solid"/>
+                      <a:round/>
+                      <a:headEnd type="none" w="med" len="med"/>
+                      <a:tailEnd type="none" w="med" len="med"/>
+                    </a:lnL>
+                    <a:lnR w="12700" cap="flat" cmpd="sng" algn="ctr">
+                      <a:solidFill>
+                        <a:schemeClr val="tx1"/>
+                      </a:solidFill>
+                      <a:prstDash val="solid"/>
+                      <a:round/>
+                      <a:headEnd type="none" w="med" len="med"/>
+                      <a:tailEnd type="none" w="med" len="med"/>
+                    </a:lnR>
+                    <a:lnT w="12700" cap="flat" cmpd="sng" algn="ctr">
+                      <a:solidFill>
+                        <a:schemeClr val="tx1"/>
+                      </a:solidFill>
+                      <a:prstDash val="solid"/>
+                      <a:round/>
+                      <a:headEnd type="none" w="med" len="med"/>
+                      <a:tailEnd type="none" w="med" len="med"/>
+                    </a:lnT>
+                    <a:lnB w="12700" cap="flat" cmpd="sng" algn="ctr">
+                      <a:solidFill>
+                        <a:schemeClr val="tx1"/>
+                      </a:solidFill>
+                      <a:prstDash val="solid"/>
+                      <a:round/>
+                      <a:headEnd type="none" w="med" len="med"/>
+                      <a:tailEnd type="none" w="med" len="med"/>
+                    </a:lnB>
+                    <a:solidFill>
+                      <a:schemeClr val="bg1"/>
+                    </a:solidFill>
+                  </a:tcPr>
+                </a:tc>
+                <a:tc rowSpan="2">
+                  <a:txBody>
+                    <a:bodyPr/>
+                    <a:lstStyle/>
+                    <a:p>
+                      <a:pPr marL="0" lvl="0" indent="0" algn="ctr" rtl="0">
+                        <a:spcBef>
+                          <a:spcPts val="0"/>
+                        </a:spcBef>
+                        <a:spcAft>
+                          <a:spcPts val="0"/>
+                        </a:spcAft>
+                        <a:buNone/>
+                      </a:pPr>
+                      <a:r>
+                        <a:rPr lang="en" dirty="0"/>
+                        <a:t>  7</a:t>
+                      </a:r>
+                      <a:endParaRPr dirty="0"/>
+                    </a:p>
+                  </a:txBody>
+                  <a:tcPr marL="91425" marR="91425" marT="91425" marB="91425" anchor="ctr">
+                    <a:lnL w="12700" cap="flat" cmpd="sng" algn="ctr">
+                      <a:solidFill>
+                        <a:schemeClr val="tx1"/>
+                      </a:solidFill>
+                      <a:prstDash val="solid"/>
+                      <a:round/>
+                      <a:headEnd type="none" w="med" len="med"/>
+                      <a:tailEnd type="none" w="med" len="med"/>
+                    </a:lnL>
+                    <a:lnR w="12700" cap="flat" cmpd="sng" algn="ctr">
+                      <a:solidFill>
+                        <a:schemeClr val="tx1"/>
+                      </a:solidFill>
+                      <a:prstDash val="solid"/>
+                      <a:round/>
+                      <a:headEnd type="none" w="med" len="med"/>
+                      <a:tailEnd type="none" w="med" len="med"/>
+                    </a:lnR>
+                    <a:lnT w="12700" cap="flat" cmpd="sng" algn="ctr">
+                      <a:solidFill>
+                        <a:schemeClr val="tx1"/>
+                      </a:solidFill>
+                      <a:prstDash val="solid"/>
+                      <a:round/>
+                      <a:headEnd type="none" w="med" len="med"/>
+                      <a:tailEnd type="none" w="med" len="med"/>
+                    </a:lnT>
+                    <a:lnB w="12700" cap="flat" cmpd="sng" algn="ctr">
+                      <a:solidFill>
+                        <a:schemeClr val="tx1"/>
+                      </a:solidFill>
+                      <a:prstDash val="solid"/>
+                      <a:round/>
+                      <a:headEnd type="none" w="med" len="med"/>
+                      <a:tailEnd type="none" w="med" len="med"/>
+                    </a:lnB>
+                    <a:solidFill>
+                      <a:schemeClr val="bg1"/>
+                    </a:solidFill>
+                  </a:tcPr>
+                </a:tc>
+                <a:tc>
+                  <a:txBody>
+                    <a:bodyPr/>
+                    <a:lstStyle/>
+                    <a:p>
+                      <a:pPr marL="0" lvl="0" indent="0" algn="ctr" rtl="0">
+                        <a:spcBef>
+                          <a:spcPts val="0"/>
+                        </a:spcBef>
+                        <a:spcAft>
+                          <a:spcPts val="0"/>
+                        </a:spcAft>
+                        <a:buNone/>
+                      </a:pPr>
+                      <a:r>
+                        <a:rPr lang="en-IN" dirty="0"/>
+                        <a:t>Planned</a:t>
+                      </a:r>
+                      <a:endParaRPr dirty="0"/>
+                    </a:p>
+                  </a:txBody>
+                  <a:tcPr marL="91425" marR="91425" marT="91425" marB="91425" anchor="ctr">
+                    <a:lnL w="12700" cap="flat" cmpd="sng" algn="ctr">
+                      <a:solidFill>
+                        <a:schemeClr val="tx1"/>
+                      </a:solidFill>
+                      <a:prstDash val="solid"/>
+                      <a:round/>
+                      <a:headEnd type="none" w="med" len="med"/>
+                      <a:tailEnd type="none" w="med" len="med"/>
+                    </a:lnL>
+                    <a:lnR w="12700" cap="flat" cmpd="sng" algn="ctr">
+                      <a:solidFill>
+                        <a:schemeClr val="tx1"/>
+                      </a:solidFill>
+                      <a:prstDash val="solid"/>
+                      <a:round/>
+                      <a:headEnd type="none" w="med" len="med"/>
+                      <a:tailEnd type="none" w="med" len="med"/>
+                    </a:lnR>
+                    <a:lnT w="12700" cap="flat" cmpd="sng" algn="ctr">
+                      <a:solidFill>
+                        <a:schemeClr val="tx1"/>
+                      </a:solidFill>
+                      <a:prstDash val="solid"/>
+                      <a:round/>
+                      <a:headEnd type="none" w="med" len="med"/>
+                      <a:tailEnd type="none" w="med" len="med"/>
+                    </a:lnT>
+                    <a:lnB w="12700" cap="flat" cmpd="sng" algn="ctr">
+                      <a:solidFill>
+                        <a:schemeClr val="tx1"/>
+                      </a:solidFill>
+                      <a:prstDash val="solid"/>
+                      <a:round/>
+                      <a:headEnd type="none" w="med" len="med"/>
+                      <a:tailEnd type="none" w="med" len="med"/>
+                    </a:lnB>
+                    <a:solidFill>
+                      <a:schemeClr val="bg1"/>
+                    </a:solidFill>
+                  </a:tcPr>
+                </a:tc>
+                <a:extLst>
+                  <a:ext uri="{0D108BD9-81ED-4DB2-BD59-A6C34878D82A}">
+                    <a16:rowId xmlns:a16="http://schemas.microsoft.com/office/drawing/2014/main" val="10001"/>
+                  </a:ext>
+                </a:extLst>
+              </a:tr>
+              <a:tr h="675074">
+                <a:tc>
+                  <a:txBody>
+                    <a:bodyPr/>
+                    <a:lstStyle/>
+                    <a:p>
+                      <a:pPr marL="0" lvl="0" indent="0" algn="ctr" rtl="0">
+                        <a:spcBef>
+                          <a:spcPts val="0"/>
+                        </a:spcBef>
+                        <a:spcAft>
+                          <a:spcPts val="0"/>
+                        </a:spcAft>
+                        <a:buNone/>
+                      </a:pPr>
+                      <a:r>
+                        <a:rPr lang="en" dirty="0"/>
+                        <a:t>9</a:t>
+                      </a:r>
+                      <a:endParaRPr dirty="0"/>
+                    </a:p>
+                  </a:txBody>
+                  <a:tcPr marL="91425" marR="91425" marT="91425" marB="91425" anchor="ctr">
+                    <a:lnL w="12700" cap="flat" cmpd="sng" algn="ctr">
+                      <a:solidFill>
+                        <a:schemeClr val="tx1"/>
+                      </a:solidFill>
+                      <a:prstDash val="solid"/>
+                      <a:round/>
+                      <a:headEnd type="none" w="med" len="med"/>
+                      <a:tailEnd type="none" w="med" len="med"/>
+                    </a:lnL>
+                    <a:lnR w="12700" cap="flat" cmpd="sng" algn="ctr">
+                      <a:solidFill>
+                        <a:schemeClr val="tx1"/>
+                      </a:solidFill>
+                      <a:prstDash val="solid"/>
+                      <a:round/>
+                      <a:headEnd type="none" w="med" len="med"/>
+                      <a:tailEnd type="none" w="med" len="med"/>
+                    </a:lnR>
+                    <a:lnT w="12700" cap="flat" cmpd="sng" algn="ctr">
+                      <a:solidFill>
+                        <a:schemeClr val="tx1"/>
+                      </a:solidFill>
+                      <a:prstDash val="solid"/>
+                      <a:round/>
+                      <a:headEnd type="none" w="med" len="med"/>
+                      <a:tailEnd type="none" w="med" len="med"/>
+                    </a:lnT>
+                    <a:lnB w="12700" cap="flat" cmpd="sng" algn="ctr">
+                      <a:solidFill>
+                        <a:schemeClr val="tx1"/>
+                      </a:solidFill>
+                      <a:prstDash val="solid"/>
+                      <a:round/>
+                      <a:headEnd type="none" w="med" len="med"/>
+                      <a:tailEnd type="none" w="med" len="med"/>
+                    </a:lnB>
+                    <a:solidFill>
+                      <a:schemeClr val="bg1"/>
+                    </a:solidFill>
+                  </a:tcPr>
+                </a:tc>
+                <a:tc vMerge="1">
+                  <a:txBody>
+                    <a:bodyPr/>
+                    <a:lstStyle/>
+                    <a:p>
+                      <a:endParaRPr lang="en-US"/>
+                    </a:p>
+                  </a:txBody>
+                  <a:tcPr/>
+                </a:tc>
+                <a:tc>
+                  <a:txBody>
+                    <a:bodyPr/>
+                    <a:lstStyle/>
+                    <a:p>
+                      <a:pPr marL="0" lvl="0" indent="0" algn="ctr" rtl="0">
+                        <a:spcBef>
+                          <a:spcPts val="0"/>
+                        </a:spcBef>
+                        <a:spcAft>
+                          <a:spcPts val="0"/>
+                        </a:spcAft>
+                        <a:buNone/>
+                      </a:pPr>
+                      <a:r>
+                        <a:rPr lang="en" dirty="0"/>
+                        <a:t>10/10/2022</a:t>
+                      </a:r>
+                      <a:endParaRPr dirty="0"/>
+                    </a:p>
+                  </a:txBody>
+                  <a:tcPr marL="91425" marR="91425" marT="91425" marB="91425" anchor="ctr">
+                    <a:lnL w="12700" cap="flat" cmpd="sng" algn="ctr">
+                      <a:solidFill>
+                        <a:schemeClr val="tx1"/>
+                      </a:solidFill>
+                      <a:prstDash val="solid"/>
+                      <a:round/>
+                      <a:headEnd type="none" w="med" len="med"/>
+                      <a:tailEnd type="none" w="med" len="med"/>
+                    </a:lnL>
+                    <a:lnR w="12700" cap="flat" cmpd="sng" algn="ctr">
+                      <a:solidFill>
+                        <a:schemeClr val="tx1"/>
+                      </a:solidFill>
+                      <a:prstDash val="solid"/>
+                      <a:round/>
+                      <a:headEnd type="none" w="med" len="med"/>
+                      <a:tailEnd type="none" w="med" len="med"/>
+                    </a:lnR>
+                    <a:lnT w="12700" cap="flat" cmpd="sng" algn="ctr">
+                      <a:solidFill>
+                        <a:schemeClr val="tx1"/>
+                      </a:solidFill>
+                      <a:prstDash val="solid"/>
+                      <a:round/>
+                      <a:headEnd type="none" w="med" len="med"/>
+                      <a:tailEnd type="none" w="med" len="med"/>
+                    </a:lnT>
+                    <a:lnB w="12700" cap="flat" cmpd="sng" algn="ctr">
+                      <a:solidFill>
+                        <a:schemeClr val="tx1"/>
+                      </a:solidFill>
+                      <a:prstDash val="solid"/>
+                      <a:round/>
+                      <a:headEnd type="none" w="med" len="med"/>
+                      <a:tailEnd type="none" w="med" len="med"/>
+                    </a:lnB>
+                    <a:solidFill>
+                      <a:schemeClr val="bg1"/>
+                    </a:solidFill>
+                  </a:tcPr>
+                </a:tc>
+                <a:tc>
+                  <a:txBody>
+                    <a:bodyPr/>
+                    <a:lstStyle/>
+                    <a:p>
+                      <a:pPr marL="0" lvl="0" indent="0" algn="ctr" rtl="0">
+                        <a:spcBef>
+                          <a:spcPts val="0"/>
+                        </a:spcBef>
+                        <a:spcAft>
+                          <a:spcPts val="0"/>
+                        </a:spcAft>
+                        <a:buNone/>
+                      </a:pPr>
+                      <a:r>
+                        <a:rPr lang="en"/>
+                        <a:t>10/10/2022</a:t>
+                      </a:r>
+                      <a:endParaRPr/>
+                    </a:p>
+                  </a:txBody>
+                  <a:tcPr marL="91425" marR="91425" marT="91425" marB="91425" anchor="ctr">
+                    <a:lnL w="12700" cap="flat" cmpd="sng" algn="ctr">
+                      <a:solidFill>
+                        <a:schemeClr val="tx1"/>
+                      </a:solidFill>
+                      <a:prstDash val="solid"/>
+                      <a:round/>
+                      <a:headEnd type="none" w="med" len="med"/>
+                      <a:tailEnd type="none" w="med" len="med"/>
+                    </a:lnL>
+                    <a:lnR w="12700" cap="flat" cmpd="sng" algn="ctr">
+                      <a:solidFill>
+                        <a:schemeClr val="tx1"/>
+                      </a:solidFill>
+                      <a:prstDash val="solid"/>
+                      <a:round/>
+                      <a:headEnd type="none" w="med" len="med"/>
+                      <a:tailEnd type="none" w="med" len="med"/>
+                    </a:lnR>
+                    <a:lnT w="12700" cap="flat" cmpd="sng" algn="ctr">
+                      <a:solidFill>
+                        <a:schemeClr val="tx1"/>
+                      </a:solidFill>
+                      <a:prstDash val="solid"/>
+                      <a:round/>
+                      <a:headEnd type="none" w="med" len="med"/>
+                      <a:tailEnd type="none" w="med" len="med"/>
+                    </a:lnT>
+                    <a:lnB w="12700" cap="flat" cmpd="sng" algn="ctr">
+                      <a:solidFill>
+                        <a:schemeClr val="tx1"/>
+                      </a:solidFill>
+                      <a:prstDash val="solid"/>
+                      <a:round/>
+                      <a:headEnd type="none" w="med" len="med"/>
+                      <a:tailEnd type="none" w="med" len="med"/>
+                    </a:lnB>
+                    <a:solidFill>
+                      <a:schemeClr val="bg1"/>
+                    </a:solidFill>
+                  </a:tcPr>
+                </a:tc>
+                <a:tc vMerge="1">
+                  <a:txBody>
+                    <a:bodyPr/>
+                    <a:lstStyle/>
+                    <a:p>
+                      <a:endParaRPr lang="en-US"/>
+                    </a:p>
+                  </a:txBody>
+                  <a:tcPr/>
+                </a:tc>
+                <a:tc>
+                  <a:txBody>
+                    <a:bodyPr/>
+                    <a:lstStyle/>
+                    <a:p>
+                      <a:pPr marL="0" lvl="0" indent="0" algn="ctr" rtl="0">
+                        <a:spcBef>
+                          <a:spcPts val="0"/>
+                        </a:spcBef>
+                        <a:spcAft>
+                          <a:spcPts val="0"/>
+                        </a:spcAft>
+                        <a:buNone/>
+                      </a:pPr>
+                      <a:r>
+                        <a:rPr lang="en-IN" dirty="0"/>
+                        <a:t>Planned</a:t>
+                      </a:r>
+                      <a:endParaRPr dirty="0"/>
+                    </a:p>
+                  </a:txBody>
+                  <a:tcPr marL="91425" marR="91425" marT="91425" marB="91425" anchor="ctr">
+                    <a:lnL w="12700" cap="flat" cmpd="sng" algn="ctr">
+                      <a:solidFill>
+                        <a:schemeClr val="tx1"/>
+                      </a:solidFill>
+                      <a:prstDash val="solid"/>
+                      <a:round/>
+                      <a:headEnd type="none" w="med" len="med"/>
+                      <a:tailEnd type="none" w="med" len="med"/>
+                    </a:lnL>
+                    <a:lnR w="12700" cap="flat" cmpd="sng" algn="ctr">
+                      <a:solidFill>
+                        <a:schemeClr val="tx1"/>
+                      </a:solidFill>
+                      <a:prstDash val="solid"/>
+                      <a:round/>
+                      <a:headEnd type="none" w="med" len="med"/>
+                      <a:tailEnd type="none" w="med" len="med"/>
+                    </a:lnR>
+                    <a:lnT w="12700" cap="flat" cmpd="sng" algn="ctr">
+                      <a:solidFill>
+                        <a:schemeClr val="tx1"/>
+                      </a:solidFill>
+                      <a:prstDash val="solid"/>
+                      <a:round/>
+                      <a:headEnd type="none" w="med" len="med"/>
+                      <a:tailEnd type="none" w="med" len="med"/>
+                    </a:lnT>
+                    <a:lnB w="12700" cap="flat" cmpd="sng" algn="ctr">
+                      <a:solidFill>
+                        <a:schemeClr val="tx1"/>
+                      </a:solidFill>
+                      <a:prstDash val="solid"/>
+                      <a:round/>
+                      <a:headEnd type="none" w="med" len="med"/>
+                      <a:tailEnd type="none" w="med" len="med"/>
+                    </a:lnB>
+                    <a:solidFill>
+                      <a:schemeClr val="bg1"/>
+                    </a:solidFill>
+                  </a:tcPr>
+                </a:tc>
+                <a:extLst>
+                  <a:ext uri="{0D108BD9-81ED-4DB2-BD59-A6C34878D82A}">
+                    <a16:rowId xmlns:a16="http://schemas.microsoft.com/office/drawing/2014/main" val="10002"/>
+                  </a:ext>
+                </a:extLst>
+              </a:tr>
+            </a:tbl>
+          </a:graphicData>
+        </a:graphic>
+      </p:graphicFrame>
     </p:spTree>
     <p:extLst>
       <p:ext uri="{BB962C8B-B14F-4D97-AF65-F5344CB8AC3E}">
-        <p14:creationId xmlns:p14="http://schemas.microsoft.com/office/powerpoint/2010/main" val="2943013317"/>
+        <p14:creationId xmlns:p14="http://schemas.microsoft.com/office/powerpoint/2010/main" val="3560652123"/>
       </p:ext>
     </p:extLst>
   </p:cSld>
@@ -17157,7 +16260,7 @@
               <a:rPr lang="en-US" sz="2500" b="1" dirty="0">
                 <a:cs typeface="Times New Roman" panose="02020603050405020304" pitchFamily="18" charset="0"/>
               </a:rPr>
-              <a:t>BALACHANDHRAN KP</a:t>
+              <a:t>BALACHANDRAN KP</a:t>
             </a:r>
             <a:br>
               <a:rPr lang="en-US" dirty="0">
@@ -17452,7 +16555,7 @@
           <a:p>
             <a:r>
               <a:rPr lang="en-US" dirty="0"/>
-              <a:t>Level 1.1</a:t>
+              <a:t>LEVEL 1</a:t>
             </a:r>
           </a:p>
         </p:txBody>
@@ -17506,13 +16609,25 @@
       </p:sp>
       <p:pic>
         <p:nvPicPr>
-          <p:cNvPr id="6" name="Google Shape;325;p20"/>
-          <p:cNvPicPr preferRelativeResize="0"/>
+          <p:cNvPr id="11" name="Picture 10">
+            <a:extLst>
+              <a:ext uri="{FF2B5EF4-FFF2-40B4-BE49-F238E27FC236}">
+                <a16:creationId xmlns:a16="http://schemas.microsoft.com/office/drawing/2014/main" id="{B21B7DD0-D24E-D332-B42C-9AF7365DADAD}"/>
+              </a:ext>
+            </a:extLst>
+          </p:cNvPr>
+          <p:cNvPicPr>
+            <a:picLocks noChangeAspect="1"/>
+          </p:cNvPicPr>
           <p:nvPr/>
         </p:nvPicPr>
         <p:blipFill>
           <a:blip r:embed="rId2">
-            <a:alphaModFix/>
+            <a:extLst>
+              <a:ext uri="{28A0092B-C50C-407E-A947-70E740481C1C}">
+                <a14:useLocalDpi xmlns:a14="http://schemas.microsoft.com/office/drawing/2010/main" val="0"/>
+              </a:ext>
+            </a:extLst>
           </a:blip>
           <a:stretch>
             <a:fillRect/>
@@ -17520,52 +16635,18 @@
         </p:blipFill>
         <p:spPr>
           <a:xfrm>
-            <a:off x="479224" y="1600200"/>
-            <a:ext cx="8207576" cy="4191000"/>
+            <a:off x="647700" y="1676400"/>
+            <a:ext cx="7848600" cy="4120553"/>
           </a:xfrm>
           <a:prstGeom prst="rect">
             <a:avLst/>
           </a:prstGeom>
-          <a:noFill/>
-          <a:ln>
-            <a:noFill/>
-          </a:ln>
         </p:spPr>
       </p:pic>
-      <p:sp>
-        <p:nvSpPr>
-          <p:cNvPr id="7" name="TextBox 6"/>
-          <p:cNvSpPr txBox="1"/>
-          <p:nvPr/>
-        </p:nvSpPr>
-        <p:spPr>
-          <a:xfrm>
-            <a:off x="1066800" y="5638800"/>
-            <a:ext cx="7239000" cy="369332"/>
-          </a:xfrm>
-          <a:prstGeom prst="rect">
-            <a:avLst/>
-          </a:prstGeom>
-          <a:noFill/>
-        </p:spPr>
-        <p:txBody>
-          <a:bodyPr wrap="square" rtlCol="0">
-            <a:spAutoFit/>
-          </a:bodyPr>
-          <a:lstStyle/>
-          <a:p>
-            <a:pPr algn="ctr"/>
-            <a:r>
-              <a:rPr lang="en-US" dirty="0"/>
-              <a:t>The figure given above is for reference only. Create a figure with your data. </a:t>
-            </a:r>
-          </a:p>
-        </p:txBody>
-      </p:sp>
     </p:spTree>
     <p:extLst>
       <p:ext uri="{BB962C8B-B14F-4D97-AF65-F5344CB8AC3E}">
-        <p14:creationId xmlns:p14="http://schemas.microsoft.com/office/powerpoint/2010/main" val="354542763"/>
+        <p14:creationId xmlns:p14="http://schemas.microsoft.com/office/powerpoint/2010/main" val="2943013317"/>
       </p:ext>
     </p:extLst>
   </p:cSld>
@@ -17631,7 +16712,7 @@
           <a:p>
             <a:r>
               <a:rPr lang="en-US" dirty="0"/>
-              <a:t>Level 1.2</a:t>
+              <a:t>Level 1.1</a:t>
             </a:r>
           </a:p>
         </p:txBody>
@@ -17685,13 +16766,25 @@
       </p:sp>
       <p:pic>
         <p:nvPicPr>
-          <p:cNvPr id="6" name="Google Shape;332;p21"/>
-          <p:cNvPicPr preferRelativeResize="0"/>
+          <p:cNvPr id="11" name="Picture 10">
+            <a:extLst>
+              <a:ext uri="{FF2B5EF4-FFF2-40B4-BE49-F238E27FC236}">
+                <a16:creationId xmlns:a16="http://schemas.microsoft.com/office/drawing/2014/main" id="{570A2D3B-2756-C4A2-6CAA-DD0FA2DDFA9A}"/>
+              </a:ext>
+            </a:extLst>
+          </p:cNvPr>
+          <p:cNvPicPr>
+            <a:picLocks noChangeAspect="1"/>
+          </p:cNvPicPr>
           <p:nvPr/>
         </p:nvPicPr>
         <p:blipFill>
           <a:blip r:embed="rId2">
-            <a:alphaModFix/>
+            <a:extLst>
+              <a:ext uri="{28A0092B-C50C-407E-A947-70E740481C1C}">
+                <a14:useLocalDpi xmlns:a14="http://schemas.microsoft.com/office/drawing/2010/main" val="0"/>
+              </a:ext>
+            </a:extLst>
           </a:blip>
           <a:stretch>
             <a:fillRect/>
@@ -17699,52 +16792,18 @@
         </p:blipFill>
         <p:spPr>
           <a:xfrm>
-            <a:off x="522734" y="1600200"/>
-            <a:ext cx="8087865" cy="4114800"/>
+            <a:off x="76200" y="1752600"/>
+            <a:ext cx="8991600" cy="4137972"/>
           </a:xfrm>
           <a:prstGeom prst="rect">
             <a:avLst/>
           </a:prstGeom>
-          <a:noFill/>
-          <a:ln>
-            <a:noFill/>
-          </a:ln>
         </p:spPr>
       </p:pic>
-      <p:sp>
-        <p:nvSpPr>
-          <p:cNvPr id="7" name="TextBox 6"/>
-          <p:cNvSpPr txBox="1"/>
-          <p:nvPr/>
-        </p:nvSpPr>
-        <p:spPr>
-          <a:xfrm>
-            <a:off x="1066800" y="5638800"/>
-            <a:ext cx="7239000" cy="369332"/>
-          </a:xfrm>
-          <a:prstGeom prst="rect">
-            <a:avLst/>
-          </a:prstGeom>
-          <a:noFill/>
-        </p:spPr>
-        <p:txBody>
-          <a:bodyPr wrap="square" rtlCol="0">
-            <a:spAutoFit/>
-          </a:bodyPr>
-          <a:lstStyle/>
-          <a:p>
-            <a:pPr algn="ctr"/>
-            <a:r>
-              <a:rPr lang="en-US" dirty="0"/>
-              <a:t>The figure given above is for reference only. Create a figure with your data. </a:t>
-            </a:r>
-          </a:p>
-        </p:txBody>
-      </p:sp>
     </p:spTree>
     <p:extLst>
       <p:ext uri="{BB962C8B-B14F-4D97-AF65-F5344CB8AC3E}">
-        <p14:creationId xmlns:p14="http://schemas.microsoft.com/office/powerpoint/2010/main" val="2305161154"/>
+        <p14:creationId xmlns:p14="http://schemas.microsoft.com/office/powerpoint/2010/main" val="354542763"/>
       </p:ext>
     </p:extLst>
   </p:cSld>
@@ -17795,28 +16854,6 @@
       </p:sp>
       <p:sp>
         <p:nvSpPr>
-          <p:cNvPr id="3" name="Content Placeholder 2"/>
-          <p:cNvSpPr>
-            <a:spLocks noGrp="1"/>
-          </p:cNvSpPr>
-          <p:nvPr>
-            <p:ph idx="1"/>
-          </p:nvPr>
-        </p:nvSpPr>
-        <p:spPr/>
-        <p:txBody>
-          <a:bodyPr/>
-          <a:lstStyle/>
-          <a:p>
-            <a:r>
-              <a:rPr lang="en-US" dirty="0"/>
-              <a:t>Place you ER Diagram (if any) here.</a:t>
-            </a:r>
-          </a:p>
-        </p:txBody>
-      </p:sp>
-      <p:sp>
-        <p:nvSpPr>
           <p:cNvPr id="4" name="Footer Placeholder 3"/>
           <p:cNvSpPr>
             <a:spLocks noGrp="1"/>
@@ -17831,10 +16868,9 @@
           <a:lstStyle/>
           <a:p>
             <a:r>
-              <a:rPr lang="en-US"/>
+              <a:rPr lang="en-US" dirty="0"/>
               <a:t>Department of Computer Applications</a:t>
             </a:r>
-            <a:endParaRPr lang="en-US" dirty="0"/>
           </a:p>
         </p:txBody>
       </p:sp>
@@ -17848,7 +16884,12 @@
             <p:ph type="sldNum" sz="quarter" idx="12"/>
           </p:nvPr>
         </p:nvSpPr>
-        <p:spPr/>
+        <p:spPr>
+          <a:xfrm>
+            <a:off x="8077200" y="6356351"/>
+            <a:ext cx="381000" cy="378004"/>
+          </a:xfrm>
+        </p:spPr>
         <p:txBody>
           <a:bodyPr/>
           <a:lstStyle/>
@@ -17862,6 +16903,42 @@
           </a:p>
         </p:txBody>
       </p:sp>
+      <p:pic>
+        <p:nvPicPr>
+          <p:cNvPr id="11" name="Picture 10">
+            <a:extLst>
+              <a:ext uri="{FF2B5EF4-FFF2-40B4-BE49-F238E27FC236}">
+                <a16:creationId xmlns:a16="http://schemas.microsoft.com/office/drawing/2014/main" id="{4B8EE0DE-6909-7F6B-8AEF-A0A4D7E8792F}"/>
+              </a:ext>
+            </a:extLst>
+          </p:cNvPr>
+          <p:cNvPicPr>
+            <a:picLocks noChangeAspect="1"/>
+          </p:cNvPicPr>
+          <p:nvPr/>
+        </p:nvPicPr>
+        <p:blipFill>
+          <a:blip r:embed="rId2">
+            <a:extLst>
+              <a:ext uri="{28A0092B-C50C-407E-A947-70E740481C1C}">
+                <a14:useLocalDpi xmlns:a14="http://schemas.microsoft.com/office/drawing/2010/main" val="0"/>
+              </a:ext>
+            </a:extLst>
+          </a:blip>
+          <a:stretch>
+            <a:fillRect/>
+          </a:stretch>
+        </p:blipFill>
+        <p:spPr>
+          <a:xfrm>
+            <a:off x="0" y="1143000"/>
+            <a:ext cx="9067800" cy="4953000"/>
+          </a:xfrm>
+          <a:prstGeom prst="rect">
+            <a:avLst/>
+          </a:prstGeom>
+        </p:spPr>
+      </p:pic>
     </p:spTree>
     <p:extLst>
       <p:ext uri="{BB962C8B-B14F-4D97-AF65-F5344CB8AC3E}">
@@ -18665,10 +17742,13 @@
                 <a:cs typeface="Times New Roman"/>
                 <a:sym typeface="Times New Roman"/>
               </a:rPr>
-              <a:t>This organize every need of a martial artists into an </a:t>
-            </a:r>
-            <a:r>
-              <a:rPr lang="en-US">
+              <a:t>This organize every need of a martial artists into an single platform.</a:t>
+            </a:r>
+          </a:p>
+          <a:p>
+            <a:pPr lvl="0"/>
+            <a:r>
+              <a:rPr lang="en-US" dirty="0">
                 <a:solidFill>
                   <a:srgbClr val="000000"/>
                 </a:solidFill>
@@ -18676,7 +17756,51 @@
                 <a:cs typeface="Times New Roman"/>
                 <a:sym typeface="Times New Roman"/>
               </a:rPr>
-              <a:t>single platform.</a:t>
+              <a:t>This platform also create a community among martial artists and can acknowledge about the martial arts </a:t>
+            </a:r>
+            <a:r>
+              <a:rPr lang="en-US" dirty="0" err="1">
+                <a:solidFill>
+                  <a:srgbClr val="000000"/>
+                </a:solidFill>
+                <a:ea typeface="Times New Roman"/>
+                <a:cs typeface="Times New Roman"/>
+                <a:sym typeface="Times New Roman"/>
+              </a:rPr>
+              <a:t>trends,competitions,products</a:t>
+            </a:r>
+            <a:r>
+              <a:rPr lang="en-US" dirty="0">
+                <a:solidFill>
+                  <a:srgbClr val="000000"/>
+                </a:solidFill>
+                <a:ea typeface="Times New Roman"/>
+                <a:cs typeface="Times New Roman"/>
+                <a:sym typeface="Times New Roman"/>
+              </a:rPr>
+              <a:t> </a:t>
+            </a:r>
+            <a:r>
+              <a:rPr lang="en-US" dirty="0" err="1">
+                <a:solidFill>
+                  <a:srgbClr val="000000"/>
+                </a:solidFill>
+                <a:ea typeface="Times New Roman"/>
+                <a:cs typeface="Times New Roman"/>
+                <a:sym typeface="Times New Roman"/>
+              </a:rPr>
+              <a:t>etc</a:t>
+            </a:r>
+            <a:r>
+              <a:rPr lang="en-US" dirty="0">
+                <a:solidFill>
+                  <a:srgbClr val="000000"/>
+                </a:solidFill>
+                <a:ea typeface="Times New Roman"/>
+                <a:cs typeface="Times New Roman"/>
+                <a:sym typeface="Times New Roman"/>
+              </a:rPr>
+              <a:t>…</a:t>
             </a:r>
           </a:p>
           <a:p>
@@ -18818,18 +17942,16 @@
           <a:p>
             <a:pPr lvl="0"/>
             <a:r>
-              <a:rPr lang="en-US" dirty="0">
-                <a:solidFill>
-                  <a:srgbClr val="000000"/>
-                </a:solidFill>
-                <a:ea typeface="Times New Roman"/>
-                <a:cs typeface="Times New Roman"/>
-                <a:sym typeface="Times New Roman"/>
-              </a:rPr>
-              <a:t>Write Project Objectives using bullet points (1 Slide)</a:t>
-            </a:r>
-          </a:p>
-          <a:p>
+              <a:rPr lang="en-US" dirty="0"/>
+              <a:t>The objective of this project is to design and develop a comprehensive web-based platform that enables martial artists to find good products needed for their practice, track progress, and engage with a global community through a social media platform for martial artists.</a:t>
+            </a:r>
+          </a:p>
+          <a:p>
+            <a:pPr lvl="0"/>
+            <a:endParaRPr lang="en-US" dirty="0"/>
+          </a:p>
+          <a:p>
+            <a:pPr lvl="0"/>
             <a:endParaRPr lang="en-US" dirty="0"/>
           </a:p>
         </p:txBody>
@@ -18972,11 +18094,36 @@
                 <a:cs typeface="Times New Roman"/>
                 <a:sym typeface="Times New Roman"/>
               </a:rPr>
-              <a:t>Write Existing system using bullet points (1 Slide)</a:t>
-            </a:r>
-          </a:p>
-          <a:p>
-            <a:endParaRPr lang="en-US" dirty="0"/>
+              <a:t>There are no specific platforms that focuses on martial artists. </a:t>
+            </a:r>
+          </a:p>
+          <a:p>
+            <a:pPr lvl="0"/>
+            <a:r>
+              <a:rPr lang="en-US" dirty="0">
+                <a:solidFill>
+                  <a:srgbClr val="000000"/>
+                </a:solidFill>
+                <a:ea typeface="Times New Roman"/>
+                <a:cs typeface="Times New Roman"/>
+                <a:sym typeface="Times New Roman"/>
+              </a:rPr>
+              <a:t>Some platforms offers martial artists what they need but not in a convenient way.</a:t>
+            </a:r>
+          </a:p>
+          <a:p>
+            <a:pPr lvl="0"/>
+            <a:r>
+              <a:rPr lang="en-US" dirty="0">
+                <a:solidFill>
+                  <a:srgbClr val="000000"/>
+                </a:solidFill>
+                <a:ea typeface="Times New Roman"/>
+                <a:cs typeface="Times New Roman"/>
+                <a:sym typeface="Times New Roman"/>
+              </a:rPr>
+              <a:t>And there is no platforms that offers e-commerce, entertainments and progress tracking under the same umbrella. </a:t>
+            </a:r>
           </a:p>
         </p:txBody>
       </p:sp>
@@ -19122,7 +18269,9 @@
         </p:nvSpPr>
         <p:spPr/>
         <p:txBody>
-          <a:bodyPr/>
+          <a:bodyPr>
+            <a:normAutofit lnSpcReduction="10000"/>
+          </a:bodyPr>
           <a:lstStyle/>
           <a:p>
             <a:pPr lvl="0"/>
@@ -19135,19 +18284,22 @@
                 <a:cs typeface="Times New Roman"/>
                 <a:sym typeface="Times New Roman"/>
               </a:rPr>
-              <a:t>Write Proposed system using bullet points (1 Slide)</a:t>
+              <a:t>Martial World is an another level web based platform for martial artists.</a:t>
             </a:r>
           </a:p>
           <a:p>
             <a:pPr lvl="0"/>
-            <a:endParaRPr lang="en-US" dirty="0">
-              <a:solidFill>
-                <a:srgbClr val="000000"/>
-              </a:solidFill>
-              <a:ea typeface="Times New Roman"/>
-              <a:cs typeface="Times New Roman"/>
-              <a:sym typeface="Times New Roman"/>
-            </a:endParaRPr>
+            <a:r>
+              <a:rPr lang="en-US" dirty="0">
+                <a:solidFill>
+                  <a:srgbClr val="000000"/>
+                </a:solidFill>
+                <a:ea typeface="Times New Roman"/>
+                <a:cs typeface="Times New Roman"/>
+                <a:sym typeface="Times New Roman"/>
+              </a:rPr>
+              <a:t>Martial world contain e-commerce platform for products needed for martial art practice, social media platform to connect all martial artists and share their techniques and skills, and a progress tracking and syllabus following section to keep and follow your progress.</a:t>
+            </a:r>
           </a:p>
           <a:p>
             <a:endParaRPr lang="en-US" dirty="0"/>
@@ -19176,10 +18328,9 @@
           <a:lstStyle/>
           <a:p>
             <a:r>
-              <a:rPr lang="en-US"/>
+              <a:rPr lang="en-US" dirty="0"/>
               <a:t>Department of Computer Applications</a:t>
             </a:r>
-            <a:endParaRPr lang="en-US" dirty="0"/>
           </a:p>
         </p:txBody>
       </p:sp>
@@ -19278,7 +18429,9 @@
         </p:nvSpPr>
         <p:spPr/>
         <p:txBody>
-          <a:bodyPr/>
+          <a:bodyPr>
+            <a:normAutofit lnSpcReduction="10000"/>
+          </a:bodyPr>
           <a:lstStyle/>
           <a:p>
             <a:pPr lvl="0"/>
@@ -19291,7 +18444,7 @@
                 <a:cs typeface="Times New Roman"/>
                 <a:sym typeface="Times New Roman"/>
               </a:rPr>
-              <a:t>Write Project Motivations using bullet points (1 Slide)</a:t>
+              <a:t>As a martial arts practitioner for over a decade and as an instructor, I faced challenges of accessing training resources and finding martial arts contents in every social media platforms and also keeping track of my martial arts progress. So I come with the idea of an web-based platform for martial artists called Martial World.</a:t>
             </a:r>
           </a:p>
           <a:p>
@@ -20179,4 +19332,24 @@
     </a:ext>
   </a:extLst>
 </a:theme>
+</file>
+
+<file path=ppt/webextensions/taskpanes.xml><?xml version="1.0" encoding="utf-8"?>
+<wetp:taskpanes xmlns:wetp="http://schemas.microsoft.com/office/webextensions/taskpanes/2010/11">
+  <wetp:taskpane dockstate="right" visibility="0" width="438" row="0">
+    <wetp:webextensionref xmlns:r="http://schemas.openxmlformats.org/officeDocument/2006/relationships" r:id="rId1"/>
+  </wetp:taskpane>
+</wetp:taskpanes>
+</file>
+
+<file path=ppt/webextensions/webextension1.xml><?xml version="1.0" encoding="utf-8"?>
+<we:webextension xmlns:we="http://schemas.microsoft.com/office/webextensions/webextension/2010/11" id="{56FF0E3A-CE68-446F-8671-72D11C7753AE}">
+  <we:reference id="wa200007130" version="1.0.0.1" store="en-US" storeType="OMEX"/>
+  <we:alternateReferences>
+    <we:reference id="wa200007130" version="1.0.0.1" store="wa200007130" storeType="OMEX"/>
+  </we:alternateReferences>
+  <we:properties/>
+  <we:bindings/>
+  <we:snapshot xmlns:r="http://schemas.openxmlformats.org/officeDocument/2006/relationships"/>
+</we:webextension>
 </file>